--- a/src/assets/downloads/example-deck.pptx
+++ b/src/assets/downloads/example-deck.pptx
@@ -16,9 +16,10 @@
     <p:sldId id="264" r:id="rId10"/>
     <p:sldId id="265" r:id="rId11"/>
     <p:sldId id="266" r:id="rId12"/>
+    <p:sldId id="267" r:id="rId13"/>
   </p:sldIdLst>
   <p:notesMasterIdLst>
-    <p:notesMasterId r:id="rId13"/>
+    <p:notesMasterId r:id="rId14"/>
   </p:notesMasterIdLst>
   <p:sldSz cx="12192000" cy="6858000"/>
   <p:notesSz cx="6858000" cy="12192000"/>
@@ -1225,6 +1226,94 @@
 </p:notes>
 </file>
 
+<file path=ppt/notesSlides/notesSlide12.xml><?xml version="1.0" encoding="utf-8"?>
+<p:notes xmlns:a="http://schemas.openxmlformats.org/drawingml/2006/main" xmlns:r="http://schemas.openxmlformats.org/officeDocument/2006/relationships" xmlns:p="http://schemas.openxmlformats.org/presentationml/2006/main">
+  <p:cSld>
+    <p:spTree>
+      <p:nvGrpSpPr>
+        <p:cNvPr id="1" name=""/>
+        <p:cNvGrpSpPr/>
+        <p:nvPr/>
+      </p:nvGrpSpPr>
+      <p:grpSpPr>
+        <a:xfrm>
+          <a:off x="0" y="0"/>
+          <a:ext cx="0" cy="0"/>
+          <a:chOff x="0" y="0"/>
+          <a:chExt cx="0" cy="0"/>
+        </a:xfrm>
+      </p:grpSpPr>
+      <p:sp>
+        <p:nvSpPr>
+          <p:cNvPr id="2" name="Slide Image Placeholder 1"/>
+          <p:cNvSpPr>
+            <a:spLocks noGrp="1" noRot="1" noChangeAspect="1"/>
+          </p:cNvSpPr>
+          <p:nvPr>
+            <p:ph type="sldImg"/>
+          </p:nvPr>
+        </p:nvSpPr>
+        <p:spPr/>
+      </p:sp>
+      <p:sp>
+        <p:nvSpPr>
+          <p:cNvPr id="3" name="Notes Placeholder 2"/>
+          <p:cNvSpPr>
+            <a:spLocks noGrp="1"/>
+          </p:cNvSpPr>
+          <p:nvPr>
+            <p:ph type="body" idx="1"/>
+          </p:nvPr>
+        </p:nvSpPr>
+        <p:spPr/>
+        <p:txBody>
+          <a:bodyPr/>
+          <a:lstStyle/>
+          <a:p>
+            <a:r>
+              <a:rPr lang="en-US" dirty="0"/>
+              <a:t/>
+            </a:r>
+            <a:endParaRPr lang="en-US" dirty="0"/>
+          </a:p>
+        </p:txBody>
+      </p:sp>
+      <p:sp>
+        <p:nvSpPr>
+          <p:cNvPr id="4" name="Slide Number Placeholder 3"/>
+          <p:cNvSpPr>
+            <a:spLocks noGrp="1"/>
+          </p:cNvSpPr>
+          <p:nvPr>
+            <p:ph type="sldNum" sz="quarter" idx="10"/>
+          </p:nvPr>
+        </p:nvSpPr>
+        <p:spPr/>
+        <p:txBody>
+          <a:bodyPr/>
+          <a:lstStyle/>
+          <a:p>
+            <a:fld id="{F7021451-1387-4CA6-816F-3879F97B5CBC}" type="slidenum">
+              <a:rPr lang="en-US"/>
+              <a:t>12</a:t>
+            </a:fld>
+            <a:endParaRPr lang="en-US"/>
+          </a:p>
+        </p:txBody>
+      </p:sp>
+    </p:spTree>
+    <p:extLst>
+      <p:ext uri="{BB962C8B-B14F-4D97-AF65-F5344CB8AC3E}">
+        <p14:creationId xmlns:p14="http://schemas.microsoft.com/office/powerpoint/2010/main" val="1024086991"/>
+      </p:ext>
+    </p:extLst>
+  </p:cSld>
+  <p:clrMapOvr>
+    <a:masterClrMapping/>
+  </p:clrMapOvr>
+</p:notes>
+</file>
+
 <file path=ppt/notesSlides/notesSlide2.xml><?xml version="1.0" encoding="utf-8"?>
 <p:notes xmlns:a="http://schemas.openxmlformats.org/drawingml/2006/main" xmlns:r="http://schemas.openxmlformats.org/officeDocument/2006/relationships" xmlns:p="http://schemas.openxmlformats.org/presentationml/2006/main">
   <p:cSld>
@@ -2308,7 +2397,7 @@
       </p:sp>
       <p:pic>
         <p:nvPicPr>
-          <p:cNvPr id="4" name="Image 0" descr="/var/folders/lw/rmylcyvd5rjfxk9g1z9rrm8w0000gq/T/showship-deck-07m3yT/logo_trimmed.png">    </p:cNvPr>
+          <p:cNvPr id="4" name="Image 0" descr="/var/folders/lw/rmylcyvd5rjfxk9g1z9rrm8w0000gq/T/showship-deck-KIMuBX/logo_trimmed.png">    </p:cNvPr>
           <p:cNvPicPr>
             <a:picLocks noChangeAspect="1"/>
           </p:cNvPicPr>
@@ -2827,7 +2916,7 @@
                 <a:ea typeface="Arial" pitchFamily="34" charset="-122"/>
                 <a:cs typeface="Arial" pitchFamily="34" charset="-120"/>
               </a:rPr>
-              <a:t>Looking Ahead</a:t>
+              <a:t>Engineering Activity · GitHub</a:t>
             </a:r>
             <a:endParaRPr lang="en-US" sz="1100" dirty="0"/>
           </a:p>
@@ -2868,7 +2957,7 @@
                 <a:ea typeface="Georgia" pitchFamily="34" charset="-122"/>
                 <a:cs typeface="Georgia" pitchFamily="34" charset="-120"/>
               </a:rPr>
-              <a:t>Next Week's Plan</a:t>
+              <a:t>Team Delivery Activity This Week</a:t>
             </a:r>
             <a:endParaRPr lang="en-US" sz="2800" dirty="0"/>
           </a:p>
@@ -2897,9 +2986,672 @@
           </a:ln>
         </p:spPr>
       </p:sp>
+      <p:sp>
+        <p:nvSpPr>
+          <p:cNvPr id="9" name="Shape 7"/>
+          <p:cNvSpPr/>
+          <p:nvPr/>
+        </p:nvSpPr>
+        <p:spPr>
+          <a:xfrm>
+            <a:off x="640080" y="1783080"/>
+            <a:ext cx="2743200" cy="0"/>
+          </a:xfrm>
+          <a:prstGeom prst="line">
+            <a:avLst/>
+          </a:prstGeom>
+          <a:noFill/>
+          <a:ln w="25400">
+            <a:solidFill>
+              <a:srgbClr val="1A1A1A"/>
+            </a:solidFill>
+            <a:prstDash val="solid"/>
+          </a:ln>
+        </p:spPr>
+      </p:sp>
+      <p:sp>
+        <p:nvSpPr>
+          <p:cNvPr id="10" name="Text 8"/>
+          <p:cNvSpPr/>
+          <p:nvPr/>
+        </p:nvSpPr>
+        <p:spPr>
+          <a:xfrm>
+            <a:off x="640080" y="1874520"/>
+            <a:ext cx="2743200" cy="821436"/>
+          </a:xfrm>
+          <a:prstGeom prst="rect">
+            <a:avLst/>
+          </a:prstGeom>
+          <a:noFill/>
+          <a:ln/>
+        </p:spPr>
+        <p:txBody>
+          <a:bodyPr wrap="square" lIns="0" tIns="0" rIns="0" bIns="0" rtlCol="0" anchor="b"/>
+          <a:lstStyle/>
+          <a:p>
+            <a:pPr indent="0" marL="0">
+              <a:buNone/>
+            </a:pPr>
+            <a:r>
+              <a:rPr lang="en-US" sz="4400" dirty="0">
+                <a:solidFill>
+                  <a:srgbClr val="1F5C3A"/>
+                </a:solidFill>
+                <a:latin typeface="Georgia" pitchFamily="34" charset="0"/>
+                <a:ea typeface="Georgia" pitchFamily="34" charset="-122"/>
+                <a:cs typeface="Georgia" pitchFamily="34" charset="-120"/>
+              </a:rPr>
+              <a:t>3</a:t>
+            </a:r>
+            <a:endParaRPr lang="en-US" sz="4400" dirty="0"/>
+          </a:p>
+        </p:txBody>
+      </p:sp>
+      <p:sp>
+        <p:nvSpPr>
+          <p:cNvPr id="11" name="Text 9"/>
+          <p:cNvSpPr/>
+          <p:nvPr/>
+        </p:nvSpPr>
+        <p:spPr>
+          <a:xfrm>
+            <a:off x="640080" y="2725826"/>
+            <a:ext cx="2743200" cy="522732"/>
+          </a:xfrm>
+          <a:prstGeom prst="rect">
+            <a:avLst/>
+          </a:prstGeom>
+          <a:noFill/>
+          <a:ln/>
+        </p:spPr>
+        <p:txBody>
+          <a:bodyPr wrap="square" lIns="0" tIns="0" rIns="0" bIns="0" rtlCol="0" anchor="t"/>
+          <a:lstStyle/>
+          <a:p>
+            <a:pPr indent="0" marL="0">
+              <a:buNone/>
+            </a:pPr>
+            <a:r>
+              <a:rPr lang="en-US" sz="1200" dirty="0">
+                <a:solidFill>
+                  <a:srgbClr val="4A4A46"/>
+                </a:solidFill>
+                <a:latin typeface="Arial" pitchFamily="34" charset="0"/>
+                <a:ea typeface="Arial" pitchFamily="34" charset="-122"/>
+                <a:cs typeface="Arial" pitchFamily="34" charset="-120"/>
+              </a:rPr>
+              <a:t>Features approved</a:t>
+            </a:r>
+            <a:endParaRPr lang="en-US" sz="1200" dirty="0"/>
+          </a:p>
+        </p:txBody>
+      </p:sp>
+      <p:sp>
+        <p:nvSpPr>
+          <p:cNvPr id="12" name="Shape 10"/>
+          <p:cNvSpPr/>
+          <p:nvPr/>
+        </p:nvSpPr>
+        <p:spPr>
+          <a:xfrm>
+            <a:off x="640080" y="3276600"/>
+            <a:ext cx="2743200" cy="0"/>
+          </a:xfrm>
+          <a:prstGeom prst="line">
+            <a:avLst/>
+          </a:prstGeom>
+          <a:noFill/>
+          <a:ln w="9525">
+            <a:solidFill>
+              <a:srgbClr val="D6D6D0"/>
+            </a:solidFill>
+            <a:prstDash val="solid"/>
+          </a:ln>
+        </p:spPr>
+      </p:sp>
+      <p:sp>
+        <p:nvSpPr>
+          <p:cNvPr id="13" name="Text 11"/>
+          <p:cNvSpPr/>
+          <p:nvPr/>
+        </p:nvSpPr>
+        <p:spPr>
+          <a:xfrm>
+            <a:off x="640080" y="3368040"/>
+            <a:ext cx="2743200" cy="821436"/>
+          </a:xfrm>
+          <a:prstGeom prst="rect">
+            <a:avLst/>
+          </a:prstGeom>
+          <a:noFill/>
+          <a:ln/>
+        </p:spPr>
+        <p:txBody>
+          <a:bodyPr wrap="square" lIns="0" tIns="0" rIns="0" bIns="0" rtlCol="0" anchor="b"/>
+          <a:lstStyle/>
+          <a:p>
+            <a:pPr indent="0" marL="0">
+              <a:buNone/>
+            </a:pPr>
+            <a:r>
+              <a:rPr lang="en-US" sz="4400" dirty="0">
+                <a:solidFill>
+                  <a:srgbClr val="1A1A1A"/>
+                </a:solidFill>
+                <a:latin typeface="Georgia" pitchFamily="34" charset="0"/>
+                <a:ea typeface="Georgia" pitchFamily="34" charset="-122"/>
+                <a:cs typeface="Georgia" pitchFamily="34" charset="-120"/>
+              </a:rPr>
+              <a:t>2</a:t>
+            </a:r>
+            <a:endParaRPr lang="en-US" sz="4400" dirty="0"/>
+          </a:p>
+        </p:txBody>
+      </p:sp>
+      <p:sp>
+        <p:nvSpPr>
+          <p:cNvPr id="14" name="Text 12"/>
+          <p:cNvSpPr/>
+          <p:nvPr/>
+        </p:nvSpPr>
+        <p:spPr>
+          <a:xfrm>
+            <a:off x="640080" y="4219346"/>
+            <a:ext cx="2743200" cy="522732"/>
+          </a:xfrm>
+          <a:prstGeom prst="rect">
+            <a:avLst/>
+          </a:prstGeom>
+          <a:noFill/>
+          <a:ln/>
+        </p:spPr>
+        <p:txBody>
+          <a:bodyPr wrap="square" lIns="0" tIns="0" rIns="0" bIns="0" rtlCol="0" anchor="t"/>
+          <a:lstStyle/>
+          <a:p>
+            <a:pPr indent="0" marL="0">
+              <a:buNone/>
+            </a:pPr>
+            <a:r>
+              <a:rPr lang="en-US" sz="1200" dirty="0">
+                <a:solidFill>
+                  <a:srgbClr val="4A4A46"/>
+                </a:solidFill>
+                <a:latin typeface="Arial" pitchFamily="34" charset="0"/>
+                <a:ea typeface="Arial" pitchFamily="34" charset="-122"/>
+                <a:cs typeface="Arial" pitchFamily="34" charset="-120"/>
+              </a:rPr>
+              <a:t>In final review</a:t>
+            </a:r>
+            <a:endParaRPr lang="en-US" sz="1200" dirty="0"/>
+          </a:p>
+        </p:txBody>
+      </p:sp>
+      <p:sp>
+        <p:nvSpPr>
+          <p:cNvPr id="15" name="Shape 13"/>
+          <p:cNvSpPr/>
+          <p:nvPr/>
+        </p:nvSpPr>
+        <p:spPr>
+          <a:xfrm>
+            <a:off x="640080" y="4770120"/>
+            <a:ext cx="2743200" cy="0"/>
+          </a:xfrm>
+          <a:prstGeom prst="line">
+            <a:avLst/>
+          </a:prstGeom>
+          <a:noFill/>
+          <a:ln w="9525">
+            <a:solidFill>
+              <a:srgbClr val="D6D6D0"/>
+            </a:solidFill>
+            <a:prstDash val="solid"/>
+          </a:ln>
+        </p:spPr>
+      </p:sp>
+      <p:sp>
+        <p:nvSpPr>
+          <p:cNvPr id="16" name="Text 14"/>
+          <p:cNvSpPr/>
+          <p:nvPr/>
+        </p:nvSpPr>
+        <p:spPr>
+          <a:xfrm>
+            <a:off x="640080" y="4861560"/>
+            <a:ext cx="2743200" cy="821436"/>
+          </a:xfrm>
+          <a:prstGeom prst="rect">
+            <a:avLst/>
+          </a:prstGeom>
+          <a:noFill/>
+          <a:ln/>
+        </p:spPr>
+        <p:txBody>
+          <a:bodyPr wrap="square" lIns="0" tIns="0" rIns="0" bIns="0" rtlCol="0" anchor="b"/>
+          <a:lstStyle/>
+          <a:p>
+            <a:pPr indent="0" marL="0">
+              <a:buNone/>
+            </a:pPr>
+            <a:r>
+              <a:rPr lang="en-US" sz="4400" dirty="0">
+                <a:solidFill>
+                  <a:srgbClr val="1A1A1A"/>
+                </a:solidFill>
+                <a:latin typeface="Georgia" pitchFamily="34" charset="0"/>
+                <a:ea typeface="Georgia" pitchFamily="34" charset="-122"/>
+                <a:cs typeface="Georgia" pitchFamily="34" charset="-120"/>
+              </a:rPr>
+              <a:t>7</a:t>
+            </a:r>
+            <a:endParaRPr lang="en-US" sz="4400" dirty="0"/>
+          </a:p>
+        </p:txBody>
+      </p:sp>
+      <p:sp>
+        <p:nvSpPr>
+          <p:cNvPr id="17" name="Text 15"/>
+          <p:cNvSpPr/>
+          <p:nvPr/>
+        </p:nvSpPr>
+        <p:spPr>
+          <a:xfrm>
+            <a:off x="640080" y="5712866"/>
+            <a:ext cx="2743200" cy="522732"/>
+          </a:xfrm>
+          <a:prstGeom prst="rect">
+            <a:avLst/>
+          </a:prstGeom>
+          <a:noFill/>
+          <a:ln/>
+        </p:spPr>
+        <p:txBody>
+          <a:bodyPr wrap="square" lIns="0" tIns="0" rIns="0" bIns="0" rtlCol="0" anchor="t"/>
+          <a:lstStyle/>
+          <a:p>
+            <a:pPr indent="0" marL="0">
+              <a:buNone/>
+            </a:pPr>
+            <a:r>
+              <a:rPr lang="en-US" sz="1200" dirty="0">
+                <a:solidFill>
+                  <a:srgbClr val="4A4A46"/>
+                </a:solidFill>
+                <a:latin typeface="Arial" pitchFamily="34" charset="0"/>
+                <a:ea typeface="Arial" pitchFamily="34" charset="-122"/>
+                <a:cs typeface="Arial" pitchFamily="34" charset="-120"/>
+              </a:rPr>
+              <a:t>Code reviews completed</a:t>
+            </a:r>
+            <a:endParaRPr lang="en-US" sz="1200" dirty="0"/>
+          </a:p>
+        </p:txBody>
+      </p:sp>
+      <p:sp>
+        <p:nvSpPr>
+          <p:cNvPr id="18" name="Shape 16"/>
+          <p:cNvSpPr/>
+          <p:nvPr/>
+        </p:nvSpPr>
+        <p:spPr>
+          <a:xfrm>
+            <a:off x="3657600" y="1783080"/>
+            <a:ext cx="0" cy="4480560"/>
+          </a:xfrm>
+          <a:prstGeom prst="line">
+            <a:avLst/>
+          </a:prstGeom>
+          <a:noFill/>
+          <a:ln w="9525">
+            <a:solidFill>
+              <a:srgbClr val="D6D6D0"/>
+            </a:solidFill>
+            <a:prstDash val="solid"/>
+          </a:ln>
+        </p:spPr>
+      </p:sp>
+      <p:sp>
+        <p:nvSpPr>
+          <p:cNvPr id="19" name="Shape 17"/>
+          <p:cNvSpPr/>
+          <p:nvPr/>
+        </p:nvSpPr>
+        <p:spPr>
+          <a:xfrm>
+            <a:off x="3931920" y="1783080"/>
+            <a:ext cx="7619695" cy="0"/>
+          </a:xfrm>
+          <a:prstGeom prst="line">
+            <a:avLst/>
+          </a:prstGeom>
+          <a:noFill/>
+          <a:ln w="25400">
+            <a:solidFill>
+              <a:srgbClr val="1A1A1A"/>
+            </a:solidFill>
+            <a:prstDash val="solid"/>
+          </a:ln>
+        </p:spPr>
+      </p:sp>
       <p:graphicFrame>
         <p:nvGraphicFramePr>
-          <p:cNvPr id="11" name="Table 0"/>
+          <p:cNvPr id="20" name="Chart 0" descr=""/>
+          <p:cNvGraphicFramePr/>
+          <p:nvPr/>
+        </p:nvGraphicFramePr>
+        <p:xfrm>
+          <a:off x="3840480" y="1920240"/>
+          <a:ext cx="7711135" cy="3977640"/>
+        </p:xfrm>
+        <a:graphic xmlns:a="http://schemas.openxmlformats.org/drawingml/2006/main">
+          <a:graphicData uri="http://schemas.openxmlformats.org/drawingml/2006/chart">
+            <c:chart xmlns:c="http://schemas.openxmlformats.org/drawingml/2006/chart" r:id="rId1"/>
+          </a:graphicData>
+        </a:graphic>
+      </p:graphicFrame>
+      <p:sp>
+        <p:nvSpPr>
+          <p:cNvPr id="21" name="Text 18"/>
+          <p:cNvSpPr/>
+          <p:nvPr/>
+        </p:nvSpPr>
+        <p:spPr>
+          <a:xfrm>
+            <a:off x="3931920" y="5916168"/>
+            <a:ext cx="7619695" cy="320040"/>
+          </a:xfrm>
+          <a:prstGeom prst="rect">
+            <a:avLst/>
+          </a:prstGeom>
+          <a:noFill/>
+          <a:ln/>
+        </p:spPr>
+        <p:txBody>
+          <a:bodyPr wrap="square" lIns="0" tIns="0" rIns="0" bIns="0" rtlCol="0" anchor="ctr"/>
+          <a:lstStyle/>
+          <a:p>
+            <a:pPr indent="0" marL="0">
+              <a:buNone/>
+            </a:pPr>
+            <a:r>
+              <a:rPr lang="en-US" sz="1100" i="1" dirty="0">
+                <a:solidFill>
+                  <a:srgbClr val="8C8C86"/>
+                </a:solidFill>
+                <a:latin typeface="Georgia" pitchFamily="34" charset="0"/>
+                <a:ea typeface="Georgia" pitchFamily="34" charset="-122"/>
+                <a:cs typeface="Georgia" pitchFamily="34" charset="-120"/>
+              </a:rPr>
+              <a:t>Source: GitHub activity this week.</a:t>
+            </a:r>
+            <a:endParaRPr lang="en-US" sz="1100" dirty="0"/>
+          </a:p>
+        </p:txBody>
+      </p:sp>
+    </p:spTree>
+  </p:cSld>
+  <p:clrMapOvr>
+    <a:masterClrMapping/>
+  </p:clrMapOvr>
+</p:sld>
+</file>
+
+<file path=ppt/slides/slide11.xml><?xml version="1.0" encoding="utf-8"?>
+<p:sld xmlns:a="http://schemas.openxmlformats.org/drawingml/2006/main" xmlns:r="http://schemas.openxmlformats.org/officeDocument/2006/relationships" xmlns:p="http://schemas.openxmlformats.org/presentationml/2006/main">
+  <p:cSld name="Slide 11">
+    <p:bg>
+      <p:bgPr>
+        <a:solidFill>
+          <a:srgbClr val="FFFFFF"/>
+        </a:solidFill>
+      </p:bgPr>
+    </p:bg>
+    <p:spTree>
+      <p:nvGrpSpPr>
+        <p:cNvPr id="1" name=""/>
+        <p:cNvGrpSpPr/>
+        <p:nvPr/>
+      </p:nvGrpSpPr>
+      <p:grpSpPr>
+        <a:xfrm>
+          <a:off x="0" y="0"/>
+          <a:ext cx="0" cy="0"/>
+          <a:chOff x="0" y="0"/>
+          <a:chExt cx="0" cy="0"/>
+        </a:xfrm>
+      </p:grpSpPr>
+      <p:sp>
+        <p:nvSpPr>
+          <p:cNvPr id="2" name="Shape 0"/>
+          <p:cNvSpPr/>
+          <p:nvPr/>
+        </p:nvSpPr>
+        <p:spPr>
+          <a:xfrm>
+            <a:off x="640080" y="6473952"/>
+            <a:ext cx="10908792" cy="0"/>
+          </a:xfrm>
+          <a:prstGeom prst="line">
+            <a:avLst/>
+          </a:prstGeom>
+          <a:noFill/>
+          <a:ln w="9525">
+            <a:solidFill>
+              <a:srgbClr val="D6D6D0"/>
+            </a:solidFill>
+            <a:prstDash val="solid"/>
+          </a:ln>
+        </p:spPr>
+      </p:sp>
+      <p:sp>
+        <p:nvSpPr>
+          <p:cNvPr id="3" name="Text 1"/>
+          <p:cNvSpPr/>
+          <p:nvPr/>
+        </p:nvSpPr>
+        <p:spPr>
+          <a:xfrm>
+            <a:off x="640080" y="6547104"/>
+            <a:ext cx="7315200" cy="219456"/>
+          </a:xfrm>
+          <a:prstGeom prst="rect">
+            <a:avLst/>
+          </a:prstGeom>
+          <a:noFill/>
+          <a:ln/>
+        </p:spPr>
+        <p:txBody>
+          <a:bodyPr wrap="square" lIns="0" tIns="0" rIns="0" bIns="0" rtlCol="0" anchor="ctr"/>
+          <a:lstStyle/>
+          <a:p>
+            <a:pPr indent="0" marL="0">
+              <a:buNone/>
+            </a:pPr>
+            <a:r>
+              <a:rPr lang="en-US" sz="1100" dirty="0">
+                <a:solidFill>
+                  <a:srgbClr val="9CA3AF"/>
+                </a:solidFill>
+                <a:latin typeface="Arial" pitchFamily="34" charset="0"/>
+                <a:ea typeface="Arial" pitchFamily="34" charset="-122"/>
+                <a:cs typeface="Arial" pitchFamily="34" charset="-120"/>
+              </a:rPr>
+              <a:t>October 9, 2026</a:t>
+            </a:r>
+            <a:endParaRPr lang="en-US" sz="1100" dirty="0"/>
+          </a:p>
+        </p:txBody>
+      </p:sp>
+      <p:sp>
+        <p:nvSpPr>
+          <p:cNvPr id="4" name="Text 2"/>
+          <p:cNvSpPr/>
+          <p:nvPr/>
+        </p:nvSpPr>
+        <p:spPr>
+          <a:xfrm>
+            <a:off x="10634472" y="6547104"/>
+            <a:ext cx="914400" cy="219456"/>
+          </a:xfrm>
+          <a:prstGeom prst="rect">
+            <a:avLst/>
+          </a:prstGeom>
+          <a:noFill/>
+          <a:ln/>
+        </p:spPr>
+        <p:txBody>
+          <a:bodyPr wrap="square" lIns="0" tIns="0" rIns="0" bIns="0" rtlCol="0" anchor="ctr"/>
+          <a:lstStyle/>
+          <a:p>
+            <a:pPr algn="r" indent="0" marL="0">
+              <a:buNone/>
+            </a:pPr>
+            <a:r>
+              <a:rPr lang="en-US" sz="1100" b="1" dirty="0">
+                <a:solidFill>
+                  <a:srgbClr val="9CA3AF"/>
+                </a:solidFill>
+                <a:latin typeface="Arial" pitchFamily="34" charset="0"/>
+                <a:ea typeface="Arial" pitchFamily="34" charset="-122"/>
+                <a:cs typeface="Arial" pitchFamily="34" charset="-120"/>
+              </a:rPr>
+              <a:t>11</a:t>
+            </a:r>
+            <a:endParaRPr lang="en-US" sz="1100" dirty="0"/>
+          </a:p>
+        </p:txBody>
+      </p:sp>
+      <p:sp>
+        <p:nvSpPr>
+          <p:cNvPr id="5" name="Shape 3"/>
+          <p:cNvSpPr/>
+          <p:nvPr/>
+        </p:nvSpPr>
+        <p:spPr>
+          <a:xfrm>
+            <a:off x="640080" y="384048"/>
+            <a:ext cx="10908792" cy="0"/>
+          </a:xfrm>
+          <a:prstGeom prst="line">
+            <a:avLst/>
+          </a:prstGeom>
+          <a:noFill/>
+          <a:ln w="25400">
+            <a:solidFill>
+              <a:srgbClr val="1A1A1A"/>
+            </a:solidFill>
+            <a:prstDash val="solid"/>
+          </a:ln>
+        </p:spPr>
+      </p:sp>
+      <p:sp>
+        <p:nvSpPr>
+          <p:cNvPr id="6" name="Text 4"/>
+          <p:cNvSpPr/>
+          <p:nvPr/>
+        </p:nvSpPr>
+        <p:spPr>
+          <a:xfrm>
+            <a:off x="640080" y="512064"/>
+            <a:ext cx="10881360" cy="256032"/>
+          </a:xfrm>
+          <a:prstGeom prst="rect">
+            <a:avLst/>
+          </a:prstGeom>
+          <a:noFill/>
+          <a:ln/>
+        </p:spPr>
+        <p:txBody>
+          <a:bodyPr wrap="square" lIns="0" tIns="0" rIns="0" bIns="0" rtlCol="0" anchor="ctr"/>
+          <a:lstStyle/>
+          <a:p>
+            <a:pPr indent="0" marL="0">
+              <a:buNone/>
+            </a:pPr>
+            <a:r>
+              <a:rPr lang="en-US" sz="1100" b="1" dirty="0">
+                <a:solidFill>
+                  <a:srgbClr val="8C8C86"/>
+                </a:solidFill>
+                <a:latin typeface="Arial" pitchFamily="34" charset="0"/>
+                <a:ea typeface="Arial" pitchFamily="34" charset="-122"/>
+                <a:cs typeface="Arial" pitchFamily="34" charset="-120"/>
+              </a:rPr>
+              <a:t>Looking Ahead</a:t>
+            </a:r>
+            <a:endParaRPr lang="en-US" sz="1100" dirty="0"/>
+          </a:p>
+        </p:txBody>
+      </p:sp>
+      <p:sp>
+        <p:nvSpPr>
+          <p:cNvPr id="7" name="Text 5"/>
+          <p:cNvSpPr/>
+          <p:nvPr/>
+        </p:nvSpPr>
+        <p:spPr>
+          <a:xfrm>
+            <a:off x="640080" y="768096"/>
+            <a:ext cx="10881360" cy="640080"/>
+          </a:xfrm>
+          <a:prstGeom prst="rect">
+            <a:avLst/>
+          </a:prstGeom>
+          <a:noFill/>
+          <a:ln/>
+        </p:spPr>
+        <p:txBody>
+          <a:bodyPr wrap="square" lIns="0" tIns="0" rIns="0" bIns="0" rtlCol="0" anchor="ctr">
+            <a:normAutofit/>
+          </a:bodyPr>
+          <a:lstStyle/>
+          <a:p>
+            <a:pPr indent="0" marL="0">
+              <a:buNone/>
+            </a:pPr>
+            <a:r>
+              <a:rPr lang="en-US" sz="2800" dirty="0">
+                <a:solidFill>
+                  <a:srgbClr val="1A1A1A"/>
+                </a:solidFill>
+                <a:latin typeface="Georgia" pitchFamily="34" charset="0"/>
+                <a:ea typeface="Georgia" pitchFamily="34" charset="-122"/>
+                <a:cs typeface="Georgia" pitchFamily="34" charset="-120"/>
+              </a:rPr>
+              <a:t>Next Week's Plan</a:t>
+            </a:r>
+            <a:endParaRPr lang="en-US" sz="2800" dirty="0"/>
+          </a:p>
+        </p:txBody>
+      </p:sp>
+      <p:sp>
+        <p:nvSpPr>
+          <p:cNvPr id="8" name="Shape 6"/>
+          <p:cNvSpPr/>
+          <p:nvPr/>
+        </p:nvSpPr>
+        <p:spPr>
+          <a:xfrm>
+            <a:off x="640080" y="1499616"/>
+            <a:ext cx="10908792" cy="0"/>
+          </a:xfrm>
+          <a:prstGeom prst="line">
+            <a:avLst/>
+          </a:prstGeom>
+          <a:noFill/>
+          <a:ln w="9525">
+            <a:solidFill>
+              <a:srgbClr val="1A1A1A"/>
+            </a:solidFill>
+            <a:prstDash val="solid"/>
+          </a:ln>
+        </p:spPr>
+      </p:sp>
+      <p:graphicFrame>
+        <p:nvGraphicFramePr>
+          <p:cNvPr id="12" name="Table 0"/>
           <p:cNvGraphicFramePr>
             <a:graphicFrameLocks noGrp="1"/>
           </p:cNvGraphicFramePr>
@@ -3911,9 +4663,9 @@
 </p:sld>
 </file>
 
-<file path=ppt/slides/slide11.xml><?xml version="1.0" encoding="utf-8"?>
+<file path=ppt/slides/slide12.xml><?xml version="1.0" encoding="utf-8"?>
 <p:sld xmlns:a="http://schemas.openxmlformats.org/drawingml/2006/main" xmlns:r="http://schemas.openxmlformats.org/officeDocument/2006/relationships" xmlns:p="http://schemas.openxmlformats.org/presentationml/2006/main">
-  <p:cSld name="Slide 11">
+  <p:cSld name="Slide 12">
     <p:bg>
       <p:bgPr>
         <a:solidFill>
@@ -3983,7 +4735,7 @@
       </p:sp>
       <p:pic>
         <p:nvPicPr>
-          <p:cNvPr id="4" name="Image 0" descr="/var/folders/lw/rmylcyvd5rjfxk9g1z9rrm8w0000gq/T/showship-deck-07m3yT/logo_trimmed.png">    </p:cNvPr>
+          <p:cNvPr id="4" name="Image 0" descr="/var/folders/lw/rmylcyvd5rjfxk9g1z9rrm8w0000gq/T/showship-deck-KIMuBX/logo_trimmed.png">    </p:cNvPr>
           <p:cNvPicPr>
             <a:picLocks noChangeAspect="1"/>
           </p:cNvPicPr>
@@ -9740,7 +10492,7 @@
                 <a:ea typeface="Arial" pitchFamily="34" charset="-122"/>
                 <a:cs typeface="Arial" pitchFamily="34" charset="-120"/>
               </a:rPr>
-              <a:t>Quality · Code Review</a:t>
+              <a:t>ClinicBook · Patient App</a:t>
             </a:r>
             <a:endParaRPr lang="en-US" sz="1100" dirty="0"/>
           </a:p>
@@ -9781,7 +10533,7 @@
                 <a:ea typeface="Georgia" pitchFamily="34" charset="-122"/>
                 <a:cs typeface="Georgia" pitchFamily="34" charset="-120"/>
               </a:rPr>
-              <a:t>Quality Check: Issues Caught Before Release</a:t>
+              <a:t>ClinicBook: What Was Done on Each Task</a:t>
             </a:r>
             <a:endParaRPr lang="en-US" sz="2800" dirty="0"/>
           </a:p>
@@ -9819,7 +10571,7 @@
         <p:spPr>
           <a:xfrm>
             <a:off x="640080" y="1783080"/>
-            <a:ext cx="10911535" cy="0"/>
+            <a:ext cx="3453384" cy="0"/>
           </a:xfrm>
           <a:prstGeom prst="line">
             <a:avLst/>
@@ -9841,8 +10593,8 @@
         </p:nvSpPr>
         <p:spPr>
           <a:xfrm>
-            <a:off x="640080" y="1892808"/>
-            <a:ext cx="1463040" cy="868680"/>
+            <a:off x="868680" y="1984248"/>
+            <a:ext cx="2996184" cy="256032"/>
           </a:xfrm>
           <a:prstGeom prst="rect">
             <a:avLst/>
@@ -9854,34 +10606,87 @@
           <a:bodyPr wrap="square" lIns="0" tIns="0" rIns="0" bIns="0" rtlCol="0" anchor="ctr"/>
           <a:lstStyle/>
           <a:p>
-            <a:pPr indent="0" marL="0">
-              <a:buNone/>
-            </a:pPr>
-            <a:r>
-              <a:rPr lang="en-US" sz="4800" dirty="0">
-                <a:solidFill>
-                  <a:srgbClr val="1F5C3A"/>
+            <a:pPr algn="l" indent="0" marL="0">
+              <a:buNone/>
+            </a:pPr>
+            <a:r>
+              <a:rPr lang="en-US" sz="1100" b="1" dirty="0">
+                <a:solidFill>
+                  <a:srgbClr val="8DB39A"/>
+                </a:solidFill>
+                <a:latin typeface="Arial" pitchFamily="34" charset="0"/>
+                <a:ea typeface="Arial" pitchFamily="34" charset="-122"/>
+                <a:cs typeface="Arial" pitchFamily="34" charset="-120"/>
+              </a:rPr>
+              <a:t>■  </a:t>
+            </a:r>
+            <a:pPr algn="l" indent="0" marL="0">
+              <a:buNone/>
+            </a:pPr>
+            <a:r>
+              <a:rPr lang="en-US" sz="1100" b="1" dirty="0">
+                <a:solidFill>
+                  <a:srgbClr val="3F6A4E"/>
+                </a:solidFill>
+                <a:latin typeface="Arial" pitchFamily="34" charset="0"/>
+                <a:ea typeface="Arial" pitchFamily="34" charset="-122"/>
+                <a:cs typeface="Arial" pitchFamily="34" charset="-120"/>
+              </a:rPr>
+              <a:t>In progress</a:t>
+            </a:r>
+            <a:endParaRPr lang="en-US" sz="1100" dirty="0"/>
+          </a:p>
+        </p:txBody>
+      </p:sp>
+      <p:sp>
+        <p:nvSpPr>
+          <p:cNvPr id="11" name="Text 9"/>
+          <p:cNvSpPr/>
+          <p:nvPr/>
+        </p:nvSpPr>
+        <p:spPr>
+          <a:xfrm>
+            <a:off x="868680" y="2313432"/>
+            <a:ext cx="2996184" cy="238125"/>
+          </a:xfrm>
+          <a:prstGeom prst="rect">
+            <a:avLst/>
+          </a:prstGeom>
+          <a:noFill/>
+          <a:ln/>
+        </p:spPr>
+        <p:txBody>
+          <a:bodyPr wrap="square" lIns="0" tIns="0" rIns="0" bIns="0" rtlCol="0" anchor="t"/>
+          <a:lstStyle/>
+          <a:p>
+            <a:pPr indent="0" marL="0">
+              <a:buNone/>
+            </a:pPr>
+            <a:r>
+              <a:rPr lang="en-US" sz="1500" b="1" dirty="0">
+                <a:solidFill>
+                  <a:srgbClr val="1A1A1A"/>
                 </a:solidFill>
                 <a:latin typeface="Georgia" pitchFamily="34" charset="0"/>
                 <a:ea typeface="Georgia" pitchFamily="34" charset="-122"/>
                 <a:cs typeface="Georgia" pitchFamily="34" charset="-120"/>
               </a:rPr>
-              <a:t>3</a:t>
-            </a:r>
-            <a:endParaRPr lang="en-US" sz="4800" dirty="0"/>
-          </a:p>
-        </p:txBody>
-      </p:sp>
-      <p:sp>
-        <p:nvSpPr>
-          <p:cNvPr id="11" name="Text 9"/>
-          <p:cNvSpPr/>
-          <p:nvPr/>
-        </p:nvSpPr>
-        <p:spPr>
-          <a:xfrm>
-            <a:off x="2148840" y="1892808"/>
-            <a:ext cx="1823618" cy="868680"/>
+              <a:t>P3 · Booking Calendar</a:t>
+            </a:r>
+            <a:endParaRPr lang="en-US" sz="1500" dirty="0"/>
+          </a:p>
+        </p:txBody>
+      </p:sp>
+      <p:sp>
+        <p:nvSpPr>
+          <p:cNvPr id="12" name="Text 10"/>
+          <p:cNvSpPr/>
+          <p:nvPr/>
+        </p:nvSpPr>
+        <p:spPr>
+          <a:xfrm>
+            <a:off x="868680" y="2597277"/>
+            <a:ext cx="2996184" cy="228600"/>
           </a:xfrm>
           <a:prstGeom prst="rect">
             <a:avLst/>
@@ -9897,7 +10702,7 @@
               <a:buNone/>
             </a:pPr>
             <a:r>
-              <a:rPr lang="en-US" sz="1250" dirty="0">
+              <a:rPr lang="en-US" sz="1100" dirty="0">
                 <a:solidFill>
                   <a:srgbClr val="4A4A46"/>
                 </a:solidFill>
@@ -9905,22 +10710,404 @@
                 <a:ea typeface="Arial" pitchFamily="34" charset="-122"/>
                 <a:cs typeface="Arial" pitchFamily="34" charset="-120"/>
               </a:rPr>
-              <a:t>Features reviewed this week</a:t>
-            </a:r>
-            <a:endParaRPr lang="en-US" sz="1250" dirty="0"/>
-          </a:p>
-        </p:txBody>
-      </p:sp>
-      <p:sp>
-        <p:nvSpPr>
-          <p:cNvPr id="12" name="Shape 10"/>
-          <p:cNvSpPr/>
-          <p:nvPr/>
-        </p:nvSpPr>
-        <p:spPr>
-          <a:xfrm>
-            <a:off x="4201058" y="1965960"/>
-            <a:ext cx="0" cy="731520"/>
+              <a:t>Owner: Leo Park @Leo</a:t>
+            </a:r>
+            <a:endParaRPr lang="en-US" sz="1100" dirty="0"/>
+          </a:p>
+        </p:txBody>
+      </p:sp>
+      <p:sp>
+        <p:nvSpPr>
+          <p:cNvPr id="13" name="Text 11"/>
+          <p:cNvSpPr/>
+          <p:nvPr/>
+        </p:nvSpPr>
+        <p:spPr>
+          <a:xfrm>
+            <a:off x="868680" y="2871597"/>
+            <a:ext cx="2996184" cy="792480"/>
+          </a:xfrm>
+          <a:prstGeom prst="rect">
+            <a:avLst/>
+          </a:prstGeom>
+          <a:noFill/>
+          <a:ln/>
+        </p:spPr>
+        <p:txBody>
+          <a:bodyPr wrap="square" lIns="0" tIns="0" rIns="0" bIns="0" rtlCol="0" anchor="t"/>
+          <a:lstStyle/>
+          <a:p>
+            <a:pPr indent="0" marL="0">
+              <a:lnSpc>
+                <a:spcPct val="110000"/>
+              </a:lnSpc>
+              <a:buNone/>
+            </a:pPr>
+            <a:r>
+              <a:rPr lang="en-US" sz="1200" dirty="0">
+                <a:solidFill>
+                  <a:srgbClr val="4A4A46"/>
+                </a:solidFill>
+                <a:latin typeface="Arial" pitchFamily="34" charset="0"/>
+                <a:ea typeface="Arial" pitchFamily="34" charset="-122"/>
+                <a:cs typeface="Arial" pitchFamily="34" charset="-120"/>
+              </a:rPr>
+              <a:t>Patients pick a doctor, a day and a time slot in one screen. Free slots update as other patients book, so nobody is offered a time that is already taken.</a:t>
+            </a:r>
+            <a:endParaRPr lang="en-US" sz="1200" dirty="0"/>
+          </a:p>
+        </p:txBody>
+      </p:sp>
+      <p:sp>
+        <p:nvSpPr>
+          <p:cNvPr id="14" name="Text 12"/>
+          <p:cNvSpPr/>
+          <p:nvPr/>
+        </p:nvSpPr>
+        <p:spPr>
+          <a:xfrm>
+            <a:off x="868680" y="3801237"/>
+            <a:ext cx="2996184" cy="228600"/>
+          </a:xfrm>
+          <a:prstGeom prst="rect">
+            <a:avLst/>
+          </a:prstGeom>
+          <a:noFill/>
+          <a:ln/>
+        </p:spPr>
+        <p:txBody>
+          <a:bodyPr wrap="square" lIns="0" tIns="0" rIns="0" bIns="0" rtlCol="0" anchor="ctr"/>
+          <a:lstStyle/>
+          <a:p>
+            <a:pPr indent="0" marL="0">
+              <a:buNone/>
+            </a:pPr>
+            <a:r>
+              <a:rPr lang="en-US" sz="1100" b="1" dirty="0">
+                <a:solidFill>
+                  <a:srgbClr val="4A4A46"/>
+                </a:solidFill>
+                <a:latin typeface="Arial" pitchFamily="34" charset="0"/>
+                <a:ea typeface="Arial" pitchFamily="34" charset="-122"/>
+                <a:cs typeface="Arial" pitchFamily="34" charset="-120"/>
+              </a:rPr>
+              <a:t>Details</a:t>
+            </a:r>
+            <a:endParaRPr lang="en-US" sz="1100" dirty="0"/>
+          </a:p>
+        </p:txBody>
+      </p:sp>
+      <p:sp>
+        <p:nvSpPr>
+          <p:cNvPr id="15" name="Shape 13"/>
+          <p:cNvSpPr/>
+          <p:nvPr/>
+        </p:nvSpPr>
+        <p:spPr>
+          <a:xfrm>
+            <a:off x="868680" y="4130421"/>
+            <a:ext cx="118872" cy="118872"/>
+          </a:xfrm>
+          <a:prstGeom prst="ellipse">
+            <a:avLst/>
+          </a:prstGeom>
+          <a:solidFill>
+            <a:srgbClr val="1F5C3A"/>
+          </a:solidFill>
+          <a:ln/>
+        </p:spPr>
+      </p:sp>
+      <p:sp>
+        <p:nvSpPr>
+          <p:cNvPr id="16" name="Text 14"/>
+          <p:cNvSpPr/>
+          <p:nvPr/>
+        </p:nvSpPr>
+        <p:spPr>
+          <a:xfrm>
+            <a:off x="1115568" y="4075557"/>
+            <a:ext cx="2749296" cy="222504"/>
+          </a:xfrm>
+          <a:prstGeom prst="rect">
+            <a:avLst/>
+          </a:prstGeom>
+          <a:noFill/>
+          <a:ln/>
+        </p:spPr>
+        <p:txBody>
+          <a:bodyPr wrap="square" lIns="0" tIns="0" rIns="0" bIns="0" rtlCol="0" anchor="t"/>
+          <a:lstStyle/>
+          <a:p>
+            <a:pPr indent="0" marL="0">
+              <a:buNone/>
+            </a:pPr>
+            <a:r>
+              <a:rPr lang="en-US" sz="1100" dirty="0">
+                <a:solidFill>
+                  <a:srgbClr val="1A1A1A"/>
+                </a:solidFill>
+                <a:latin typeface="Arial" pitchFamily="34" charset="0"/>
+                <a:ea typeface="Arial" pitchFamily="34" charset="-122"/>
+                <a:cs typeface="Arial" pitchFamily="34" charset="-120"/>
+              </a:rPr>
+              <a:t>Doctor and day picker built</a:t>
+            </a:r>
+            <a:endParaRPr lang="en-US" sz="1100" dirty="0"/>
+          </a:p>
+        </p:txBody>
+      </p:sp>
+      <p:sp>
+        <p:nvSpPr>
+          <p:cNvPr id="17" name="Shape 15"/>
+          <p:cNvSpPr/>
+          <p:nvPr/>
+        </p:nvSpPr>
+        <p:spPr>
+          <a:xfrm>
+            <a:off x="868680" y="4352925"/>
+            <a:ext cx="118872" cy="118872"/>
+          </a:xfrm>
+          <a:prstGeom prst="ellipse">
+            <a:avLst/>
+          </a:prstGeom>
+          <a:solidFill>
+            <a:srgbClr val="1F5C3A"/>
+          </a:solidFill>
+          <a:ln/>
+        </p:spPr>
+      </p:sp>
+      <p:sp>
+        <p:nvSpPr>
+          <p:cNvPr id="18" name="Text 16"/>
+          <p:cNvSpPr/>
+          <p:nvPr/>
+        </p:nvSpPr>
+        <p:spPr>
+          <a:xfrm>
+            <a:off x="1115568" y="4298061"/>
+            <a:ext cx="2749296" cy="222504"/>
+          </a:xfrm>
+          <a:prstGeom prst="rect">
+            <a:avLst/>
+          </a:prstGeom>
+          <a:noFill/>
+          <a:ln/>
+        </p:spPr>
+        <p:txBody>
+          <a:bodyPr wrap="square" lIns="0" tIns="0" rIns="0" bIns="0" rtlCol="0" anchor="t"/>
+          <a:lstStyle/>
+          <a:p>
+            <a:pPr indent="0" marL="0">
+              <a:buNone/>
+            </a:pPr>
+            <a:r>
+              <a:rPr lang="en-US" sz="1100" dirty="0">
+                <a:solidFill>
+                  <a:srgbClr val="1A1A1A"/>
+                </a:solidFill>
+                <a:latin typeface="Arial" pitchFamily="34" charset="0"/>
+                <a:ea typeface="Arial" pitchFamily="34" charset="-122"/>
+                <a:cs typeface="Arial" pitchFamily="34" charset="-120"/>
+              </a:rPr>
+              <a:t>Free time slots shown live</a:t>
+            </a:r>
+            <a:endParaRPr lang="en-US" sz="1100" dirty="0"/>
+          </a:p>
+        </p:txBody>
+      </p:sp>
+      <p:sp>
+        <p:nvSpPr>
+          <p:cNvPr id="19" name="Shape 17"/>
+          <p:cNvSpPr/>
+          <p:nvPr/>
+        </p:nvSpPr>
+        <p:spPr>
+          <a:xfrm>
+            <a:off x="868680" y="4575429"/>
+            <a:ext cx="118872" cy="118872"/>
+          </a:xfrm>
+          <a:prstGeom prst="ellipse">
+            <a:avLst/>
+          </a:prstGeom>
+          <a:ln w="19050">
+            <a:solidFill>
+              <a:srgbClr val="1F5C3A"/>
+            </a:solidFill>
+            <a:prstDash val="solid"/>
+          </a:ln>
+        </p:spPr>
+      </p:sp>
+      <p:sp>
+        <p:nvSpPr>
+          <p:cNvPr id="20" name="Text 18"/>
+          <p:cNvSpPr/>
+          <p:nvPr/>
+        </p:nvSpPr>
+        <p:spPr>
+          <a:xfrm>
+            <a:off x="1115568" y="4520565"/>
+            <a:ext cx="2749296" cy="222504"/>
+          </a:xfrm>
+          <a:prstGeom prst="rect">
+            <a:avLst/>
+          </a:prstGeom>
+          <a:noFill/>
+          <a:ln/>
+        </p:spPr>
+        <p:txBody>
+          <a:bodyPr wrap="square" lIns="0" tIns="0" rIns="0" bIns="0" rtlCol="0" anchor="t"/>
+          <a:lstStyle/>
+          <a:p>
+            <a:pPr indent="0" marL="0">
+              <a:buNone/>
+            </a:pPr>
+            <a:r>
+              <a:rPr lang="en-US" sz="1100" dirty="0">
+                <a:solidFill>
+                  <a:srgbClr val="1A1A1A"/>
+                </a:solidFill>
+                <a:latin typeface="Arial" pitchFamily="34" charset="0"/>
+                <a:ea typeface="Arial" pitchFamily="34" charset="-122"/>
+                <a:cs typeface="Arial" pitchFamily="34" charset="-120"/>
+              </a:rPr>
+              <a:t>Booking confirmation screen</a:t>
+            </a:r>
+            <a:endParaRPr lang="en-US" sz="1100" dirty="0"/>
+          </a:p>
+        </p:txBody>
+      </p:sp>
+      <p:sp>
+        <p:nvSpPr>
+          <p:cNvPr id="21" name="Shape 19"/>
+          <p:cNvSpPr/>
+          <p:nvPr/>
+        </p:nvSpPr>
+        <p:spPr>
+          <a:xfrm>
+            <a:off x="868680" y="4797933"/>
+            <a:ext cx="118872" cy="118872"/>
+          </a:xfrm>
+          <a:prstGeom prst="ellipse">
+            <a:avLst/>
+          </a:prstGeom>
+          <a:ln w="19050">
+            <a:solidFill>
+              <a:srgbClr val="8C8C86"/>
+            </a:solidFill>
+            <a:prstDash val="solid"/>
+          </a:ln>
+        </p:spPr>
+      </p:sp>
+      <p:sp>
+        <p:nvSpPr>
+          <p:cNvPr id="22" name="Text 20"/>
+          <p:cNvSpPr/>
+          <p:nvPr/>
+        </p:nvSpPr>
+        <p:spPr>
+          <a:xfrm>
+            <a:off x="1115568" y="4743069"/>
+            <a:ext cx="2749296" cy="222504"/>
+          </a:xfrm>
+          <a:prstGeom prst="rect">
+            <a:avLst/>
+          </a:prstGeom>
+          <a:noFill/>
+          <a:ln/>
+        </p:spPr>
+        <p:txBody>
+          <a:bodyPr wrap="square" lIns="0" tIns="0" rIns="0" bIns="0" rtlCol="0" anchor="t"/>
+          <a:lstStyle/>
+          <a:p>
+            <a:pPr indent="0" marL="0">
+              <a:buNone/>
+            </a:pPr>
+            <a:r>
+              <a:rPr lang="en-US" sz="1100" dirty="0">
+                <a:solidFill>
+                  <a:srgbClr val="4A4A46"/>
+                </a:solidFill>
+                <a:latin typeface="Arial" pitchFamily="34" charset="0"/>
+                <a:ea typeface="Arial" pitchFamily="34" charset="-122"/>
+                <a:cs typeface="Arial" pitchFamily="34" charset="-120"/>
+              </a:rPr>
+              <a:t>Rescheduling an existing booking</a:t>
+            </a:r>
+            <a:endParaRPr lang="en-US" sz="1100" dirty="0"/>
+          </a:p>
+        </p:txBody>
+      </p:sp>
+      <p:sp>
+        <p:nvSpPr>
+          <p:cNvPr id="23" name="Shape 21"/>
+          <p:cNvSpPr/>
+          <p:nvPr/>
+        </p:nvSpPr>
+        <p:spPr>
+          <a:xfrm>
+            <a:off x="868680" y="5020437"/>
+            <a:ext cx="118872" cy="118872"/>
+          </a:xfrm>
+          <a:prstGeom prst="ellipse">
+            <a:avLst/>
+          </a:prstGeom>
+          <a:ln w="19050">
+            <a:solidFill>
+              <a:srgbClr val="8C8C86"/>
+            </a:solidFill>
+            <a:prstDash val="solid"/>
+          </a:ln>
+        </p:spPr>
+      </p:sp>
+      <p:sp>
+        <p:nvSpPr>
+          <p:cNvPr id="24" name="Text 22"/>
+          <p:cNvSpPr/>
+          <p:nvPr/>
+        </p:nvSpPr>
+        <p:spPr>
+          <a:xfrm>
+            <a:off x="1115568" y="4965573"/>
+            <a:ext cx="2749296" cy="222504"/>
+          </a:xfrm>
+          <a:prstGeom prst="rect">
+            <a:avLst/>
+          </a:prstGeom>
+          <a:noFill/>
+          <a:ln/>
+        </p:spPr>
+        <p:txBody>
+          <a:bodyPr wrap="square" lIns="0" tIns="0" rIns="0" bIns="0" rtlCol="0" anchor="t"/>
+          <a:lstStyle/>
+          <a:p>
+            <a:pPr indent="0" marL="0">
+              <a:buNone/>
+            </a:pPr>
+            <a:r>
+              <a:rPr lang="en-US" sz="1100" dirty="0">
+                <a:solidFill>
+                  <a:srgbClr val="4A4A46"/>
+                </a:solidFill>
+                <a:latin typeface="Arial" pitchFamily="34" charset="0"/>
+                <a:ea typeface="Arial" pitchFamily="34" charset="-122"/>
+                <a:cs typeface="Arial" pitchFamily="34" charset="-120"/>
+              </a:rPr>
+              <a:t>Cancellation with clinic notice</a:t>
+            </a:r>
+            <a:endParaRPr lang="en-US" sz="1100" dirty="0"/>
+          </a:p>
+        </p:txBody>
+      </p:sp>
+      <p:sp>
+        <p:nvSpPr>
+          <p:cNvPr id="25" name="Shape 23"/>
+          <p:cNvSpPr/>
+          <p:nvPr/>
+        </p:nvSpPr>
+        <p:spPr>
+          <a:xfrm>
+            <a:off x="4230624" y="1783080"/>
+            <a:ext cx="0" cy="4160520"/>
           </a:xfrm>
           <a:prstGeom prst="line">
             <a:avLst/>
@@ -9936,14 +11123,37 @@
       </p:sp>
       <p:sp>
         <p:nvSpPr>
-          <p:cNvPr id="13" name="Text 11"/>
-          <p:cNvSpPr/>
-          <p:nvPr/>
-        </p:nvSpPr>
-        <p:spPr>
-          <a:xfrm>
-            <a:off x="4429658" y="1892808"/>
-            <a:ext cx="1463040" cy="868680"/>
+          <p:cNvPr id="26" name="Shape 24"/>
+          <p:cNvSpPr/>
+          <p:nvPr/>
+        </p:nvSpPr>
+        <p:spPr>
+          <a:xfrm>
+            <a:off x="4367784" y="1783080"/>
+            <a:ext cx="3453384" cy="0"/>
+          </a:xfrm>
+          <a:prstGeom prst="line">
+            <a:avLst/>
+          </a:prstGeom>
+          <a:noFill/>
+          <a:ln w="25400">
+            <a:solidFill>
+              <a:srgbClr val="1A1A1A"/>
+            </a:solidFill>
+            <a:prstDash val="solid"/>
+          </a:ln>
+        </p:spPr>
+      </p:sp>
+      <p:sp>
+        <p:nvSpPr>
+          <p:cNvPr id="27" name="Text 25"/>
+          <p:cNvSpPr/>
+          <p:nvPr/>
+        </p:nvSpPr>
+        <p:spPr>
+          <a:xfrm>
+            <a:off x="4596384" y="1984248"/>
+            <a:ext cx="2996184" cy="256032"/>
           </a:xfrm>
           <a:prstGeom prst="rect">
             <a:avLst/>
@@ -9955,11 +11165,64 @@
           <a:bodyPr wrap="square" lIns="0" tIns="0" rIns="0" bIns="0" rtlCol="0" anchor="ctr"/>
           <a:lstStyle/>
           <a:p>
-            <a:pPr indent="0" marL="0">
-              <a:buNone/>
-            </a:pPr>
-            <a:r>
-              <a:rPr lang="en-US" sz="4800" dirty="0">
+            <a:pPr algn="l" indent="0" marL="0">
+              <a:buNone/>
+            </a:pPr>
+            <a:r>
+              <a:rPr lang="en-US" sz="1100" b="1" dirty="0">
+                <a:solidFill>
+                  <a:srgbClr val="1F5C3A"/>
+                </a:solidFill>
+                <a:latin typeface="Arial" pitchFamily="34" charset="0"/>
+                <a:ea typeface="Arial" pitchFamily="34" charset="-122"/>
+                <a:cs typeface="Arial" pitchFamily="34" charset="-120"/>
+              </a:rPr>
+              <a:t>■  </a:t>
+            </a:r>
+            <a:pPr algn="l" indent="0" marL="0">
+              <a:buNone/>
+            </a:pPr>
+            <a:r>
+              <a:rPr lang="en-US" sz="1100" b="1" dirty="0">
+                <a:solidFill>
+                  <a:srgbClr val="1F5C3A"/>
+                </a:solidFill>
+                <a:latin typeface="Arial" pitchFamily="34" charset="0"/>
+                <a:ea typeface="Arial" pitchFamily="34" charset="-122"/>
+                <a:cs typeface="Arial" pitchFamily="34" charset="-120"/>
+              </a:rPr>
+              <a:t>Completed</a:t>
+            </a:r>
+            <a:endParaRPr lang="en-US" sz="1100" dirty="0"/>
+          </a:p>
+        </p:txBody>
+      </p:sp>
+      <p:sp>
+        <p:nvSpPr>
+          <p:cNvPr id="28" name="Text 26"/>
+          <p:cNvSpPr/>
+          <p:nvPr/>
+        </p:nvSpPr>
+        <p:spPr>
+          <a:xfrm>
+            <a:off x="4596384" y="2313432"/>
+            <a:ext cx="2996184" cy="476250"/>
+          </a:xfrm>
+          <a:prstGeom prst="rect">
+            <a:avLst/>
+          </a:prstGeom>
+          <a:noFill/>
+          <a:ln/>
+        </p:spPr>
+        <p:txBody>
+          <a:bodyPr wrap="square" lIns="0" tIns="0" rIns="0" bIns="0" rtlCol="0" anchor="t"/>
+          <a:lstStyle/>
+          <a:p>
+            <a:pPr indent="0" marL="0">
+              <a:buNone/>
+            </a:pPr>
+            <a:r>
+              <a:rPr lang="en-US" sz="1500" b="1" dirty="0">
                 <a:solidFill>
                   <a:srgbClr val="1A1A1A"/>
                 </a:solidFill>
@@ -9967,22 +11230,22 @@
                 <a:ea typeface="Georgia" pitchFamily="34" charset="-122"/>
                 <a:cs typeface="Georgia" pitchFamily="34" charset="-120"/>
               </a:rPr>
-              <a:t>2</a:t>
-            </a:r>
-            <a:endParaRPr lang="en-US" sz="4800" dirty="0"/>
-          </a:p>
-        </p:txBody>
-      </p:sp>
-      <p:sp>
-        <p:nvSpPr>
-          <p:cNvPr id="14" name="Text 12"/>
-          <p:cNvSpPr/>
-          <p:nvPr/>
-        </p:nvSpPr>
-        <p:spPr>
-          <a:xfrm>
-            <a:off x="5938418" y="1892808"/>
-            <a:ext cx="1823618" cy="868680"/>
+              <a:t>P2 · Clinic Search and Maps</a:t>
+            </a:r>
+            <a:endParaRPr lang="en-US" sz="1500" dirty="0"/>
+          </a:p>
+        </p:txBody>
+      </p:sp>
+      <p:sp>
+        <p:nvSpPr>
+          <p:cNvPr id="29" name="Text 27"/>
+          <p:cNvSpPr/>
+          <p:nvPr/>
+        </p:nvSpPr>
+        <p:spPr>
+          <a:xfrm>
+            <a:off x="4596384" y="2835402"/>
+            <a:ext cx="2996184" cy="228600"/>
           </a:xfrm>
           <a:prstGeom prst="rect">
             <a:avLst/>
@@ -9998,7 +11261,7 @@
               <a:buNone/>
             </a:pPr>
             <a:r>
-              <a:rPr lang="en-US" sz="1250" dirty="0">
+              <a:rPr lang="en-US" sz="1100" dirty="0">
                 <a:solidFill>
                   <a:srgbClr val="4A4A46"/>
                 </a:solidFill>
@@ -10006,22 +11269,339 @@
                 <a:ea typeface="Arial" pitchFamily="34" charset="-122"/>
                 <a:cs typeface="Arial" pitchFamily="34" charset="-120"/>
               </a:rPr>
-              <a:t>Approved for release</a:t>
-            </a:r>
-            <a:endParaRPr lang="en-US" sz="1250" dirty="0"/>
-          </a:p>
-        </p:txBody>
-      </p:sp>
-      <p:sp>
-        <p:nvSpPr>
-          <p:cNvPr id="15" name="Shape 13"/>
-          <p:cNvSpPr/>
-          <p:nvPr/>
-        </p:nvSpPr>
-        <p:spPr>
-          <a:xfrm>
-            <a:off x="7990637" y="1965960"/>
-            <a:ext cx="0" cy="731520"/>
+              <a:t>Owner: Leo Park @Leo</a:t>
+            </a:r>
+            <a:endParaRPr lang="en-US" sz="1100" dirty="0"/>
+          </a:p>
+        </p:txBody>
+      </p:sp>
+      <p:sp>
+        <p:nvSpPr>
+          <p:cNvPr id="30" name="Text 28"/>
+          <p:cNvSpPr/>
+          <p:nvPr/>
+        </p:nvSpPr>
+        <p:spPr>
+          <a:xfrm>
+            <a:off x="4596384" y="3109722"/>
+            <a:ext cx="2996184" cy="792480"/>
+          </a:xfrm>
+          <a:prstGeom prst="rect">
+            <a:avLst/>
+          </a:prstGeom>
+          <a:noFill/>
+          <a:ln/>
+        </p:spPr>
+        <p:txBody>
+          <a:bodyPr wrap="square" lIns="0" tIns="0" rIns="0" bIns="0" rtlCol="0" anchor="t"/>
+          <a:lstStyle/>
+          <a:p>
+            <a:pPr indent="0" marL="0">
+              <a:lnSpc>
+                <a:spcPct val="110000"/>
+              </a:lnSpc>
+              <a:buNone/>
+            </a:pPr>
+            <a:r>
+              <a:rPr lang="en-US" sz="1200" dirty="0">
+                <a:solidFill>
+                  <a:srgbClr val="4A4A46"/>
+                </a:solidFill>
+                <a:latin typeface="Arial" pitchFamily="34" charset="0"/>
+                <a:ea typeface="Arial" pitchFamily="34" charset="-122"/>
+                <a:cs typeface="Arial" pitchFamily="34" charset="-120"/>
+              </a:rPr>
+              <a:t>Patients find nearby clinics by name, specialty or distance and open directions in their maps app. Reviewed and approved this week.</a:t>
+            </a:r>
+            <a:endParaRPr lang="en-US" sz="1200" dirty="0"/>
+          </a:p>
+        </p:txBody>
+      </p:sp>
+      <p:sp>
+        <p:nvSpPr>
+          <p:cNvPr id="31" name="Text 29"/>
+          <p:cNvSpPr/>
+          <p:nvPr/>
+        </p:nvSpPr>
+        <p:spPr>
+          <a:xfrm>
+            <a:off x="4596384" y="4039362"/>
+            <a:ext cx="2996184" cy="228600"/>
+          </a:xfrm>
+          <a:prstGeom prst="rect">
+            <a:avLst/>
+          </a:prstGeom>
+          <a:noFill/>
+          <a:ln/>
+        </p:spPr>
+        <p:txBody>
+          <a:bodyPr wrap="square" lIns="0" tIns="0" rIns="0" bIns="0" rtlCol="0" anchor="ctr"/>
+          <a:lstStyle/>
+          <a:p>
+            <a:pPr indent="0" marL="0">
+              <a:buNone/>
+            </a:pPr>
+            <a:r>
+              <a:rPr lang="en-US" sz="1100" b="1" dirty="0">
+                <a:solidFill>
+                  <a:srgbClr val="4A4A46"/>
+                </a:solidFill>
+                <a:latin typeface="Arial" pitchFamily="34" charset="0"/>
+                <a:ea typeface="Arial" pitchFamily="34" charset="-122"/>
+                <a:cs typeface="Arial" pitchFamily="34" charset="-120"/>
+              </a:rPr>
+              <a:t>Details</a:t>
+            </a:r>
+            <a:endParaRPr lang="en-US" sz="1100" dirty="0"/>
+          </a:p>
+        </p:txBody>
+      </p:sp>
+      <p:sp>
+        <p:nvSpPr>
+          <p:cNvPr id="32" name="Shape 30"/>
+          <p:cNvSpPr/>
+          <p:nvPr/>
+        </p:nvSpPr>
+        <p:spPr>
+          <a:xfrm>
+            <a:off x="4596384" y="4368546"/>
+            <a:ext cx="118872" cy="118872"/>
+          </a:xfrm>
+          <a:prstGeom prst="ellipse">
+            <a:avLst/>
+          </a:prstGeom>
+          <a:solidFill>
+            <a:srgbClr val="1F5C3A"/>
+          </a:solidFill>
+          <a:ln/>
+        </p:spPr>
+      </p:sp>
+      <p:sp>
+        <p:nvSpPr>
+          <p:cNvPr id="33" name="Text 31"/>
+          <p:cNvSpPr/>
+          <p:nvPr/>
+        </p:nvSpPr>
+        <p:spPr>
+          <a:xfrm>
+            <a:off x="4843272" y="4313682"/>
+            <a:ext cx="2749296" cy="222504"/>
+          </a:xfrm>
+          <a:prstGeom prst="rect">
+            <a:avLst/>
+          </a:prstGeom>
+          <a:noFill/>
+          <a:ln/>
+        </p:spPr>
+        <p:txBody>
+          <a:bodyPr wrap="square" lIns="0" tIns="0" rIns="0" bIns="0" rtlCol="0" anchor="t"/>
+          <a:lstStyle/>
+          <a:p>
+            <a:pPr indent="0" marL="0">
+              <a:buNone/>
+            </a:pPr>
+            <a:r>
+              <a:rPr lang="en-US" sz="1100" dirty="0">
+                <a:solidFill>
+                  <a:srgbClr val="1A1A1A"/>
+                </a:solidFill>
+                <a:latin typeface="Arial" pitchFamily="34" charset="0"/>
+                <a:ea typeface="Arial" pitchFamily="34" charset="-122"/>
+                <a:cs typeface="Arial" pitchFamily="34" charset="-120"/>
+              </a:rPr>
+              <a:t>Search by name and specialty</a:t>
+            </a:r>
+            <a:endParaRPr lang="en-US" sz="1100" dirty="0"/>
+          </a:p>
+        </p:txBody>
+      </p:sp>
+      <p:sp>
+        <p:nvSpPr>
+          <p:cNvPr id="34" name="Shape 32"/>
+          <p:cNvSpPr/>
+          <p:nvPr/>
+        </p:nvSpPr>
+        <p:spPr>
+          <a:xfrm>
+            <a:off x="4596384" y="4591050"/>
+            <a:ext cx="118872" cy="118872"/>
+          </a:xfrm>
+          <a:prstGeom prst="ellipse">
+            <a:avLst/>
+          </a:prstGeom>
+          <a:solidFill>
+            <a:srgbClr val="1F5C3A"/>
+          </a:solidFill>
+          <a:ln/>
+        </p:spPr>
+      </p:sp>
+      <p:sp>
+        <p:nvSpPr>
+          <p:cNvPr id="35" name="Text 33"/>
+          <p:cNvSpPr/>
+          <p:nvPr/>
+        </p:nvSpPr>
+        <p:spPr>
+          <a:xfrm>
+            <a:off x="4843272" y="4536186"/>
+            <a:ext cx="2749296" cy="390144"/>
+          </a:xfrm>
+          <a:prstGeom prst="rect">
+            <a:avLst/>
+          </a:prstGeom>
+          <a:noFill/>
+          <a:ln/>
+        </p:spPr>
+        <p:txBody>
+          <a:bodyPr wrap="square" lIns="0" tIns="0" rIns="0" bIns="0" rtlCol="0" anchor="t"/>
+          <a:lstStyle/>
+          <a:p>
+            <a:pPr indent="0" marL="0">
+              <a:buNone/>
+            </a:pPr>
+            <a:r>
+              <a:rPr lang="en-US" sz="1100" dirty="0">
+                <a:solidFill>
+                  <a:srgbClr val="1A1A1A"/>
+                </a:solidFill>
+                <a:latin typeface="Arial" pitchFamily="34" charset="0"/>
+                <a:ea typeface="Arial" pitchFamily="34" charset="-122"/>
+                <a:cs typeface="Arial" pitchFamily="34" charset="-120"/>
+              </a:rPr>
+              <a:t>Distance sorting from the patient's location</a:t>
+            </a:r>
+            <a:endParaRPr lang="en-US" sz="1100" dirty="0"/>
+          </a:p>
+        </p:txBody>
+      </p:sp>
+      <p:sp>
+        <p:nvSpPr>
+          <p:cNvPr id="36" name="Shape 34"/>
+          <p:cNvSpPr/>
+          <p:nvPr/>
+        </p:nvSpPr>
+        <p:spPr>
+          <a:xfrm>
+            <a:off x="4596384" y="4981194"/>
+            <a:ext cx="118872" cy="118872"/>
+          </a:xfrm>
+          <a:prstGeom prst="ellipse">
+            <a:avLst/>
+          </a:prstGeom>
+          <a:solidFill>
+            <a:srgbClr val="1F5C3A"/>
+          </a:solidFill>
+          <a:ln/>
+        </p:spPr>
+      </p:sp>
+      <p:sp>
+        <p:nvSpPr>
+          <p:cNvPr id="37" name="Text 35"/>
+          <p:cNvSpPr/>
+          <p:nvPr/>
+        </p:nvSpPr>
+        <p:spPr>
+          <a:xfrm>
+            <a:off x="4843272" y="4926330"/>
+            <a:ext cx="2749296" cy="222504"/>
+          </a:xfrm>
+          <a:prstGeom prst="rect">
+            <a:avLst/>
+          </a:prstGeom>
+          <a:noFill/>
+          <a:ln/>
+        </p:spPr>
+        <p:txBody>
+          <a:bodyPr wrap="square" lIns="0" tIns="0" rIns="0" bIns="0" rtlCol="0" anchor="t"/>
+          <a:lstStyle/>
+          <a:p>
+            <a:pPr indent="0" marL="0">
+              <a:buNone/>
+            </a:pPr>
+            <a:r>
+              <a:rPr lang="en-US" sz="1100" dirty="0">
+                <a:solidFill>
+                  <a:srgbClr val="1A1A1A"/>
+                </a:solidFill>
+                <a:latin typeface="Arial" pitchFamily="34" charset="0"/>
+                <a:ea typeface="Arial" pitchFamily="34" charset="-122"/>
+                <a:cs typeface="Arial" pitchFamily="34" charset="-120"/>
+              </a:rPr>
+              <a:t>Directions open in the maps app</a:t>
+            </a:r>
+            <a:endParaRPr lang="en-US" sz="1100" dirty="0"/>
+          </a:p>
+        </p:txBody>
+      </p:sp>
+      <p:sp>
+        <p:nvSpPr>
+          <p:cNvPr id="38" name="Shape 36"/>
+          <p:cNvSpPr/>
+          <p:nvPr/>
+        </p:nvSpPr>
+        <p:spPr>
+          <a:xfrm>
+            <a:off x="4596384" y="5203698"/>
+            <a:ext cx="118872" cy="118872"/>
+          </a:xfrm>
+          <a:prstGeom prst="ellipse">
+            <a:avLst/>
+          </a:prstGeom>
+          <a:solidFill>
+            <a:srgbClr val="1F5C3A"/>
+          </a:solidFill>
+          <a:ln/>
+        </p:spPr>
+      </p:sp>
+      <p:sp>
+        <p:nvSpPr>
+          <p:cNvPr id="39" name="Text 37"/>
+          <p:cNvSpPr/>
+          <p:nvPr/>
+        </p:nvSpPr>
+        <p:spPr>
+          <a:xfrm>
+            <a:off x="4843272" y="5148834"/>
+            <a:ext cx="2749296" cy="222504"/>
+          </a:xfrm>
+          <a:prstGeom prst="rect">
+            <a:avLst/>
+          </a:prstGeom>
+          <a:noFill/>
+          <a:ln/>
+        </p:spPr>
+        <p:txBody>
+          <a:bodyPr wrap="square" lIns="0" tIns="0" rIns="0" bIns="0" rtlCol="0" anchor="t"/>
+          <a:lstStyle/>
+          <a:p>
+            <a:pPr indent="0" marL="0">
+              <a:buNone/>
+            </a:pPr>
+            <a:r>
+              <a:rPr lang="en-US" sz="1100" dirty="0">
+                <a:solidFill>
+                  <a:srgbClr val="1A1A1A"/>
+                </a:solidFill>
+                <a:latin typeface="Arial" pitchFamily="34" charset="0"/>
+                <a:ea typeface="Arial" pitchFamily="34" charset="-122"/>
+                <a:cs typeface="Arial" pitchFamily="34" charset="-120"/>
+              </a:rPr>
+              <a:t>Works offline for recent searches</a:t>
+            </a:r>
+            <a:endParaRPr lang="en-US" sz="1100" dirty="0"/>
+          </a:p>
+        </p:txBody>
+      </p:sp>
+      <p:sp>
+        <p:nvSpPr>
+          <p:cNvPr id="40" name="Shape 38"/>
+          <p:cNvSpPr/>
+          <p:nvPr/>
+        </p:nvSpPr>
+        <p:spPr>
+          <a:xfrm>
+            <a:off x="7958328" y="1783080"/>
+            <a:ext cx="0" cy="4160520"/>
           </a:xfrm>
           <a:prstGeom prst="line">
             <a:avLst/>
@@ -10037,98 +11617,20 @@
       </p:sp>
       <p:sp>
         <p:nvSpPr>
-          <p:cNvPr id="16" name="Text 14"/>
-          <p:cNvSpPr/>
-          <p:nvPr/>
-        </p:nvSpPr>
-        <p:spPr>
-          <a:xfrm>
-            <a:off x="8219237" y="1892808"/>
-            <a:ext cx="1463040" cy="868680"/>
-          </a:xfrm>
-          <a:prstGeom prst="rect">
-            <a:avLst/>
-          </a:prstGeom>
-          <a:noFill/>
-          <a:ln/>
-        </p:spPr>
-        <p:txBody>
-          <a:bodyPr wrap="square" lIns="0" tIns="0" rIns="0" bIns="0" rtlCol="0" anchor="ctr"/>
-          <a:lstStyle/>
-          <a:p>
-            <a:pPr indent="0" marL="0">
-              <a:buNone/>
-            </a:pPr>
-            <a:r>
-              <a:rPr lang="en-US" sz="4800" dirty="0">
-                <a:solidFill>
-                  <a:srgbClr val="1A1A1A"/>
-                </a:solidFill>
-                <a:latin typeface="Georgia" pitchFamily="34" charset="0"/>
-                <a:ea typeface="Georgia" pitchFamily="34" charset="-122"/>
-                <a:cs typeface="Georgia" pitchFamily="34" charset="-120"/>
-              </a:rPr>
-              <a:t>212</a:t>
-            </a:r>
-            <a:endParaRPr lang="en-US" sz="4800" dirty="0"/>
-          </a:p>
-        </p:txBody>
-      </p:sp>
-      <p:sp>
-        <p:nvSpPr>
-          <p:cNvPr id="17" name="Text 15"/>
-          <p:cNvSpPr/>
-          <p:nvPr/>
-        </p:nvSpPr>
-        <p:spPr>
-          <a:xfrm>
-            <a:off x="9727997" y="1892808"/>
-            <a:ext cx="1823618" cy="868680"/>
-          </a:xfrm>
-          <a:prstGeom prst="rect">
-            <a:avLst/>
-          </a:prstGeom>
-          <a:noFill/>
-          <a:ln/>
-        </p:spPr>
-        <p:txBody>
-          <a:bodyPr wrap="square" lIns="0" tIns="0" rIns="0" bIns="0" rtlCol="0" anchor="ctr"/>
-          <a:lstStyle/>
-          <a:p>
-            <a:pPr indent="0" marL="0">
-              <a:buNone/>
-            </a:pPr>
-            <a:r>
-              <a:rPr lang="en-US" sz="1250" dirty="0">
-                <a:solidFill>
-                  <a:srgbClr val="4A4A46"/>
-                </a:solidFill>
-                <a:latin typeface="Arial" pitchFamily="34" charset="0"/>
-                <a:ea typeface="Arial" pitchFamily="34" charset="-122"/>
-                <a:cs typeface="Arial" pitchFamily="34" charset="-120"/>
-              </a:rPr>
-              <a:t>Automated tests passing (100%)</a:t>
-            </a:r>
-            <a:endParaRPr lang="en-US" sz="1250" dirty="0"/>
-          </a:p>
-        </p:txBody>
-      </p:sp>
-      <p:sp>
-        <p:nvSpPr>
-          <p:cNvPr id="18" name="Shape 16"/>
-          <p:cNvSpPr/>
-          <p:nvPr/>
-        </p:nvSpPr>
-        <p:spPr>
-          <a:xfrm>
-            <a:off x="640080" y="3017520"/>
-            <a:ext cx="10911535" cy="0"/>
+          <p:cNvPr id="41" name="Shape 39"/>
+          <p:cNvSpPr/>
+          <p:nvPr/>
+        </p:nvSpPr>
+        <p:spPr>
+          <a:xfrm>
+            <a:off x="8095488" y="1783080"/>
+            <a:ext cx="3453384" cy="0"/>
           </a:xfrm>
           <a:prstGeom prst="line">
             <a:avLst/>
           </a:prstGeom>
           <a:noFill/>
-          <a:ln w="9525">
+          <a:ln w="25400">
             <a:solidFill>
               <a:srgbClr val="1A1A1A"/>
             </a:solidFill>
@@ -10138,14 +11640,67 @@
       </p:sp>
       <p:sp>
         <p:nvSpPr>
-          <p:cNvPr id="19" name="Text 17"/>
-          <p:cNvSpPr/>
-          <p:nvPr/>
-        </p:nvSpPr>
-        <p:spPr>
-          <a:xfrm>
-            <a:off x="640080" y="3127248"/>
-            <a:ext cx="640080" cy="411480"/>
+          <p:cNvPr id="42" name="Text 40"/>
+          <p:cNvSpPr/>
+          <p:nvPr/>
+        </p:nvSpPr>
+        <p:spPr>
+          <a:xfrm>
+            <a:off x="8324088" y="1984248"/>
+            <a:ext cx="2996184" cy="256032"/>
+          </a:xfrm>
+          <a:prstGeom prst="rect">
+            <a:avLst/>
+          </a:prstGeom>
+          <a:noFill/>
+          <a:ln/>
+        </p:spPr>
+        <p:txBody>
+          <a:bodyPr wrap="square" lIns="0" tIns="0" rIns="0" bIns="0" rtlCol="0" anchor="ctr"/>
+          <a:lstStyle/>
+          <a:p>
+            <a:pPr algn="l" indent="0" marL="0">
+              <a:buNone/>
+            </a:pPr>
+            <a:r>
+              <a:rPr lang="en-US" sz="1100" b="1" dirty="0">
+                <a:solidFill>
+                  <a:srgbClr val="8C8C86"/>
+                </a:solidFill>
+                <a:latin typeface="Arial" pitchFamily="34" charset="0"/>
+                <a:ea typeface="Arial" pitchFamily="34" charset="-122"/>
+                <a:cs typeface="Arial" pitchFamily="34" charset="-120"/>
+              </a:rPr>
+              <a:t>■  </a:t>
+            </a:r>
+            <a:pPr algn="l" indent="0" marL="0">
+              <a:buNone/>
+            </a:pPr>
+            <a:r>
+              <a:rPr lang="en-US" sz="1100" b="1" dirty="0">
+                <a:solidFill>
+                  <a:srgbClr val="77776F"/>
+                </a:solidFill>
+                <a:latin typeface="Arial" pitchFamily="34" charset="0"/>
+                <a:ea typeface="Arial" pitchFamily="34" charset="-122"/>
+                <a:cs typeface="Arial" pitchFamily="34" charset="-120"/>
+              </a:rPr>
+              <a:t>Not started</a:t>
+            </a:r>
+            <a:endParaRPr lang="en-US" sz="1100" dirty="0"/>
+          </a:p>
+        </p:txBody>
+      </p:sp>
+      <p:sp>
+        <p:nvSpPr>
+          <p:cNvPr id="43" name="Text 41"/>
+          <p:cNvSpPr/>
+          <p:nvPr/>
+        </p:nvSpPr>
+        <p:spPr>
+          <a:xfrm>
+            <a:off x="8324088" y="2313432"/>
+            <a:ext cx="2996184" cy="238125"/>
           </a:xfrm>
           <a:prstGeom prst="rect">
             <a:avLst/>
@@ -10161,30 +11716,30 @@
               <a:buNone/>
             </a:pPr>
             <a:r>
-              <a:rPr lang="en-US" sz="2200" dirty="0">
-                <a:solidFill>
-                  <a:srgbClr val="8C8C86"/>
+              <a:rPr lang="en-US" sz="1500" b="1" dirty="0">
+                <a:solidFill>
+                  <a:srgbClr val="1A1A1A"/>
                 </a:solidFill>
                 <a:latin typeface="Georgia" pitchFamily="34" charset="0"/>
                 <a:ea typeface="Georgia" pitchFamily="34" charset="-122"/>
                 <a:cs typeface="Georgia" pitchFamily="34" charset="-120"/>
               </a:rPr>
-              <a:t>01</a:t>
-            </a:r>
-            <a:endParaRPr lang="en-US" sz="2200" dirty="0"/>
-          </a:p>
-        </p:txBody>
-      </p:sp>
-      <p:sp>
-        <p:nvSpPr>
-          <p:cNvPr id="20" name="Text 18"/>
-          <p:cNvSpPr/>
-          <p:nvPr/>
-        </p:nvSpPr>
-        <p:spPr>
-          <a:xfrm>
-            <a:off x="1417320" y="3145536"/>
-            <a:ext cx="7802575" cy="237744"/>
+              <a:t>P4 · Payments and Receipts</a:t>
+            </a:r>
+            <a:endParaRPr lang="en-US" sz="1500" dirty="0"/>
+          </a:p>
+        </p:txBody>
+      </p:sp>
+      <p:sp>
+        <p:nvSpPr>
+          <p:cNvPr id="44" name="Text 42"/>
+          <p:cNvSpPr/>
+          <p:nvPr/>
+        </p:nvSpPr>
+        <p:spPr>
+          <a:xfrm>
+            <a:off x="8324088" y="2597277"/>
+            <a:ext cx="2996184" cy="228600"/>
           </a:xfrm>
           <a:prstGeom prst="rect">
             <a:avLst/>
@@ -10200,15 +11755,96 @@
               <a:buNone/>
             </a:pPr>
             <a:r>
+              <a:rPr lang="en-US" sz="1100" dirty="0">
+                <a:solidFill>
+                  <a:srgbClr val="4A4A46"/>
+                </a:solidFill>
+                <a:latin typeface="Arial" pitchFamily="34" charset="0"/>
+                <a:ea typeface="Arial" pitchFamily="34" charset="-122"/>
+                <a:cs typeface="Arial" pitchFamily="34" charset="-120"/>
+              </a:rPr>
+              <a:t>Owner: Leo Park @Leo</a:t>
+            </a:r>
+            <a:endParaRPr lang="en-US" sz="1100" dirty="0"/>
+          </a:p>
+        </p:txBody>
+      </p:sp>
+      <p:sp>
+        <p:nvSpPr>
+          <p:cNvPr id="45" name="Text 43"/>
+          <p:cNvSpPr/>
+          <p:nvPr/>
+        </p:nvSpPr>
+        <p:spPr>
+          <a:xfrm>
+            <a:off x="8324088" y="2871597"/>
+            <a:ext cx="2996184" cy="792480"/>
+          </a:xfrm>
+          <a:prstGeom prst="rect">
+            <a:avLst/>
+          </a:prstGeom>
+          <a:noFill/>
+          <a:ln/>
+        </p:spPr>
+        <p:txBody>
+          <a:bodyPr wrap="square" lIns="0" tIns="0" rIns="0" bIns="0" rtlCol="0" anchor="t"/>
+          <a:lstStyle/>
+          <a:p>
+            <a:pPr indent="0" marL="0">
+              <a:lnSpc>
+                <a:spcPct val="110000"/>
+              </a:lnSpc>
+              <a:buNone/>
+            </a:pPr>
+            <a:r>
+              <a:rPr lang="en-US" sz="1200" dirty="0">
+                <a:solidFill>
+                  <a:srgbClr val="4A4A46"/>
+                </a:solidFill>
+                <a:latin typeface="Arial" pitchFamily="34" charset="0"/>
+                <a:ea typeface="Arial" pitchFamily="34" charset="-122"/>
+                <a:cs typeface="Arial" pitchFamily="34" charset="-120"/>
+              </a:rPr>
+              <a:t>Patients pay the booking deposit in the app and get a receipt by email. Starts after the booking calendar is approved.</a:t>
+            </a:r>
+            <a:endParaRPr lang="en-US" sz="1200" dirty="0"/>
+          </a:p>
+        </p:txBody>
+      </p:sp>
+      <p:sp>
+        <p:nvSpPr>
+          <p:cNvPr id="46" name="Text 44"/>
+          <p:cNvSpPr/>
+          <p:nvPr/>
+        </p:nvSpPr>
+        <p:spPr>
+          <a:xfrm>
+            <a:off x="8324088" y="3801237"/>
+            <a:ext cx="2996184" cy="228600"/>
+          </a:xfrm>
+          <a:prstGeom prst="rect">
+            <a:avLst/>
+          </a:prstGeom>
+          <a:noFill/>
+          <a:ln/>
+        </p:spPr>
+        <p:txBody>
+          <a:bodyPr wrap="square" lIns="0" tIns="0" rIns="0" bIns="0" rtlCol="0" anchor="ctr"/>
+          <a:lstStyle/>
+          <a:p>
+            <a:pPr indent="0" marL="0">
+              <a:buNone/>
+            </a:pPr>
+            <a:r>
               <a:rPr lang="en-US" sz="1100" b="1" dirty="0">
                 <a:solidFill>
-                  <a:srgbClr val="1A1A1A"/>
-                </a:solidFill>
-                <a:latin typeface="Arial" pitchFamily="34" charset="0"/>
-                <a:ea typeface="Arial" pitchFamily="34" charset="-122"/>
-                <a:cs typeface="Arial" pitchFamily="34" charset="-120"/>
-              </a:rPr>
-              <a:t>Appointment Reminders</a:t>
+                  <a:srgbClr val="4A4A46"/>
+                </a:solidFill>
+                <a:latin typeface="Arial" pitchFamily="34" charset="0"/>
+                <a:ea typeface="Arial" pitchFamily="34" charset="-122"/>
+                <a:cs typeface="Arial" pitchFamily="34" charset="-120"/>
+              </a:rPr>
+              <a:t>Details</a:t>
             </a:r>
             <a:endParaRPr lang="en-US" sz="1100" dirty="0"/>
           </a:p>
@@ -10216,119 +11852,21 @@
       </p:sp>
       <p:sp>
         <p:nvSpPr>
-          <p:cNvPr id="21" name="Text 19"/>
-          <p:cNvSpPr/>
-          <p:nvPr/>
-        </p:nvSpPr>
-        <p:spPr>
-          <a:xfrm>
-            <a:off x="9265615" y="3136392"/>
-            <a:ext cx="2286000" cy="256032"/>
-          </a:xfrm>
-          <a:prstGeom prst="rect">
-            <a:avLst/>
-          </a:prstGeom>
-          <a:noFill/>
-          <a:ln/>
-        </p:spPr>
-        <p:txBody>
-          <a:bodyPr wrap="square" lIns="0" tIns="0" rIns="0" bIns="0" rtlCol="0" anchor="ctr"/>
-          <a:lstStyle/>
-          <a:p>
-            <a:pPr algn="r" indent="0" marL="0">
-              <a:buNone/>
-            </a:pPr>
-            <a:r>
-              <a:rPr lang="en-US" sz="1100" b="1" dirty="0">
-                <a:solidFill>
-                  <a:srgbClr val="1F5C3A"/>
-                </a:solidFill>
-                <a:latin typeface="Arial" pitchFamily="34" charset="0"/>
-                <a:ea typeface="Arial" pitchFamily="34" charset="-122"/>
-                <a:cs typeface="Arial" pitchFamily="34" charset="-120"/>
-              </a:rPr>
-              <a:t>■  </a:t>
-            </a:r>
-            <a:pPr algn="r" indent="0" marL="0">
-              <a:buNone/>
-            </a:pPr>
-            <a:r>
-              <a:rPr lang="en-US" sz="1100" b="1" dirty="0">
-                <a:solidFill>
-                  <a:srgbClr val="1F5C3A"/>
-                </a:solidFill>
-                <a:latin typeface="Arial" pitchFamily="34" charset="0"/>
-                <a:ea typeface="Arial" pitchFamily="34" charset="-122"/>
-                <a:cs typeface="Arial" pitchFamily="34" charset="-120"/>
-              </a:rPr>
-              <a:t>VERIFIED</a:t>
-            </a:r>
-            <a:endParaRPr lang="en-US" sz="1100" dirty="0"/>
-          </a:p>
-        </p:txBody>
-      </p:sp>
-      <p:sp>
-        <p:nvSpPr>
-          <p:cNvPr id="22" name="Text 20"/>
-          <p:cNvSpPr/>
-          <p:nvPr/>
-        </p:nvSpPr>
-        <p:spPr>
-          <a:xfrm>
-            <a:off x="1417320" y="3419856"/>
-            <a:ext cx="7802575" cy="487680"/>
-          </a:xfrm>
-          <a:prstGeom prst="rect">
-            <a:avLst/>
-          </a:prstGeom>
-          <a:noFill/>
-          <a:ln/>
-        </p:spPr>
-        <p:txBody>
-          <a:bodyPr wrap="square" lIns="0" tIns="0" rIns="0" bIns="0" rtlCol="0" anchor="t">
-            <a:normAutofit/>
-          </a:bodyPr>
-          <a:lstStyle/>
-          <a:p>
-            <a:pPr indent="0" marL="0">
-              <a:lnSpc>
-                <a:spcPct val="115000"/>
-              </a:lnSpc>
-              <a:buNone/>
-            </a:pPr>
-            <a:r>
-              <a:rPr lang="en-US" sz="1250" dirty="0">
-                <a:solidFill>
-                  <a:srgbClr val="4A4A46"/>
-                </a:solidFill>
-                <a:latin typeface="Arial" pitchFamily="34" charset="0"/>
-                <a:ea typeface="Arial" pitchFamily="34" charset="-122"/>
-                <a:cs typeface="Arial" pitchFamily="34" charset="-120"/>
-              </a:rPr>
-              <a:t>Clinics can send SMS and email reminders 24 hours and 2 hours before each appointment.</a:t>
-            </a:r>
-            <a:endParaRPr lang="en-US" sz="1250" dirty="0"/>
-          </a:p>
-        </p:txBody>
-      </p:sp>
-      <p:sp>
-        <p:nvSpPr>
-          <p:cNvPr id="23" name="Shape 21"/>
-          <p:cNvSpPr/>
-          <p:nvPr/>
-        </p:nvSpPr>
-        <p:spPr>
-          <a:xfrm>
-            <a:off x="1417320" y="3962400"/>
-            <a:ext cx="10134295" cy="0"/>
-          </a:xfrm>
-          <a:prstGeom prst="line">
-            <a:avLst/>
-          </a:prstGeom>
-          <a:noFill/>
-          <a:ln w="9525">
+          <p:cNvPr id="47" name="Shape 45"/>
+          <p:cNvSpPr/>
+          <p:nvPr/>
+        </p:nvSpPr>
+        <p:spPr>
+          <a:xfrm>
+            <a:off x="8324088" y="4130421"/>
+            <a:ext cx="118872" cy="118872"/>
+          </a:xfrm>
+          <a:prstGeom prst="ellipse">
+            <a:avLst/>
+          </a:prstGeom>
+          <a:ln w="19050">
             <a:solidFill>
-              <a:srgbClr val="D6D6D0"/>
+              <a:srgbClr val="8C8C86"/>
             </a:solidFill>
             <a:prstDash val="solid"/>
           </a:ln>
@@ -10336,14 +11874,14 @@
       </p:sp>
       <p:sp>
         <p:nvSpPr>
-          <p:cNvPr id="24" name="Text 22"/>
-          <p:cNvSpPr/>
-          <p:nvPr/>
-        </p:nvSpPr>
-        <p:spPr>
-          <a:xfrm>
-            <a:off x="640080" y="4072128"/>
-            <a:ext cx="640080" cy="411480"/>
+          <p:cNvPr id="48" name="Text 46"/>
+          <p:cNvSpPr/>
+          <p:nvPr/>
+        </p:nvSpPr>
+        <p:spPr>
+          <a:xfrm>
+            <a:off x="8570976" y="4075557"/>
+            <a:ext cx="2749296" cy="222504"/>
           </a:xfrm>
           <a:prstGeom prst="rect">
             <a:avLst/>
@@ -10359,54 +11897,15 @@
               <a:buNone/>
             </a:pPr>
             <a:r>
-              <a:rPr lang="en-US" sz="2200" dirty="0">
-                <a:solidFill>
-                  <a:srgbClr val="8C8C86"/>
-                </a:solidFill>
-                <a:latin typeface="Georgia" pitchFamily="34" charset="0"/>
-                <a:ea typeface="Georgia" pitchFamily="34" charset="-122"/>
-                <a:cs typeface="Georgia" pitchFamily="34" charset="-120"/>
-              </a:rPr>
-              <a:t>02</a:t>
-            </a:r>
-            <a:endParaRPr lang="en-US" sz="2200" dirty="0"/>
-          </a:p>
-        </p:txBody>
-      </p:sp>
-      <p:sp>
-        <p:nvSpPr>
-          <p:cNvPr id="25" name="Text 23"/>
-          <p:cNvSpPr/>
-          <p:nvPr/>
-        </p:nvSpPr>
-        <p:spPr>
-          <a:xfrm>
-            <a:off x="1417320" y="4090416"/>
-            <a:ext cx="7802575" cy="237744"/>
-          </a:xfrm>
-          <a:prstGeom prst="rect">
-            <a:avLst/>
-          </a:prstGeom>
-          <a:noFill/>
-          <a:ln/>
-        </p:spPr>
-        <p:txBody>
-          <a:bodyPr wrap="square" lIns="0" tIns="0" rIns="0" bIns="0" rtlCol="0" anchor="ctr"/>
-          <a:lstStyle/>
-          <a:p>
-            <a:pPr indent="0" marL="0">
-              <a:buNone/>
-            </a:pPr>
-            <a:r>
-              <a:rPr lang="en-US" sz="1100" b="1" dirty="0">
-                <a:solidFill>
-                  <a:srgbClr val="1A1A1A"/>
-                </a:solidFill>
-                <a:latin typeface="Arial" pitchFamily="34" charset="0"/>
-                <a:ea typeface="Arial" pitchFamily="34" charset="-122"/>
-                <a:cs typeface="Arial" pitchFamily="34" charset="-120"/>
-              </a:rPr>
-              <a:t>Reliability</a:t>
+              <a:rPr lang="en-US" sz="1100" dirty="0">
+                <a:solidFill>
+                  <a:srgbClr val="4A4A46"/>
+                </a:solidFill>
+                <a:latin typeface="Arial" pitchFamily="34" charset="0"/>
+                <a:ea typeface="Arial" pitchFamily="34" charset="-122"/>
+                <a:cs typeface="Arial" pitchFamily="34" charset="-120"/>
+              </a:rPr>
+              <a:t>Choose a payment method</a:t>
             </a:r>
             <a:endParaRPr lang="en-US" sz="1100" dirty="0"/>
           </a:p>
@@ -10414,119 +11913,21 @@
       </p:sp>
       <p:sp>
         <p:nvSpPr>
-          <p:cNvPr id="26" name="Text 24"/>
-          <p:cNvSpPr/>
-          <p:nvPr/>
-        </p:nvSpPr>
-        <p:spPr>
-          <a:xfrm>
-            <a:off x="9265615" y="4081272"/>
-            <a:ext cx="2286000" cy="256032"/>
-          </a:xfrm>
-          <a:prstGeom prst="rect">
-            <a:avLst/>
-          </a:prstGeom>
-          <a:noFill/>
-          <a:ln/>
-        </p:spPr>
-        <p:txBody>
-          <a:bodyPr wrap="square" lIns="0" tIns="0" rIns="0" bIns="0" rtlCol="0" anchor="ctr"/>
-          <a:lstStyle/>
-          <a:p>
-            <a:pPr algn="r" indent="0" marL="0">
-              <a:buNone/>
-            </a:pPr>
-            <a:r>
-              <a:rPr lang="en-US" sz="1100" b="1" dirty="0">
-                <a:solidFill>
-                  <a:srgbClr val="8DB39A"/>
-                </a:solidFill>
-                <a:latin typeface="Arial" pitchFamily="34" charset="0"/>
-                <a:ea typeface="Arial" pitchFamily="34" charset="-122"/>
-                <a:cs typeface="Arial" pitchFamily="34" charset="-120"/>
-              </a:rPr>
-              <a:t>■  </a:t>
-            </a:r>
-            <a:pPr algn="r" indent="0" marL="0">
-              <a:buNone/>
-            </a:pPr>
-            <a:r>
-              <a:rPr lang="en-US" sz="1100" b="1" dirty="0">
-                <a:solidFill>
-                  <a:srgbClr val="3F6A4E"/>
-                </a:solidFill>
-                <a:latin typeface="Arial" pitchFamily="34" charset="0"/>
-                <a:ea typeface="Arial" pitchFamily="34" charset="-122"/>
-                <a:cs typeface="Arial" pitchFamily="34" charset="-120"/>
-              </a:rPr>
-              <a:t>FIX BEFORE RELEASE</a:t>
-            </a:r>
-            <a:endParaRPr lang="en-US" sz="1100" dirty="0"/>
-          </a:p>
-        </p:txBody>
-      </p:sp>
-      <p:sp>
-        <p:nvSpPr>
-          <p:cNvPr id="27" name="Text 25"/>
-          <p:cNvSpPr/>
-          <p:nvPr/>
-        </p:nvSpPr>
-        <p:spPr>
-          <a:xfrm>
-            <a:off x="1417320" y="4364736"/>
-            <a:ext cx="7802575" cy="487680"/>
-          </a:xfrm>
-          <a:prstGeom prst="rect">
-            <a:avLst/>
-          </a:prstGeom>
-          <a:noFill/>
-          <a:ln/>
-        </p:spPr>
-        <p:txBody>
-          <a:bodyPr wrap="square" lIns="0" tIns="0" rIns="0" bIns="0" rtlCol="0" anchor="t">
-            <a:normAutofit/>
-          </a:bodyPr>
-          <a:lstStyle/>
-          <a:p>
-            <a:pPr indent="0" marL="0">
-              <a:lnSpc>
-                <a:spcPct val="115000"/>
-              </a:lnSpc>
-              <a:buNone/>
-            </a:pPr>
-            <a:r>
-              <a:rPr lang="en-US" sz="1250" dirty="0">
-                <a:solidFill>
-                  <a:srgbClr val="4A4A46"/>
-                </a:solidFill>
-                <a:latin typeface="Arial" pitchFamily="34" charset="0"/>
-                <a:ea typeface="Arial" pitchFamily="34" charset="-122"/>
-                <a:cs typeface="Arial" pitchFamily="34" charset="-120"/>
-              </a:rPr>
-              <a:t>A patient could receive the same reminder twice if sending is retried. Small fix identified.</a:t>
-            </a:r>
-            <a:endParaRPr lang="en-US" sz="1250" dirty="0"/>
-          </a:p>
-        </p:txBody>
-      </p:sp>
-      <p:sp>
-        <p:nvSpPr>
-          <p:cNvPr id="28" name="Shape 26"/>
-          <p:cNvSpPr/>
-          <p:nvPr/>
-        </p:nvSpPr>
-        <p:spPr>
-          <a:xfrm>
-            <a:off x="1417320" y="4907280"/>
-            <a:ext cx="10134295" cy="0"/>
-          </a:xfrm>
-          <a:prstGeom prst="line">
-            <a:avLst/>
-          </a:prstGeom>
-          <a:noFill/>
-          <a:ln w="9525">
+          <p:cNvPr id="49" name="Shape 47"/>
+          <p:cNvSpPr/>
+          <p:nvPr/>
+        </p:nvSpPr>
+        <p:spPr>
+          <a:xfrm>
+            <a:off x="8324088" y="4352925"/>
+            <a:ext cx="118872" cy="118872"/>
+          </a:xfrm>
+          <a:prstGeom prst="ellipse">
+            <a:avLst/>
+          </a:prstGeom>
+          <a:ln w="19050">
             <a:solidFill>
-              <a:srgbClr val="D6D6D0"/>
+              <a:srgbClr val="8C8C86"/>
             </a:solidFill>
             <a:prstDash val="solid"/>
           </a:ln>
@@ -10534,14 +11935,14 @@
       </p:sp>
       <p:sp>
         <p:nvSpPr>
-          <p:cNvPr id="29" name="Text 27"/>
-          <p:cNvSpPr/>
-          <p:nvPr/>
-        </p:nvSpPr>
-        <p:spPr>
-          <a:xfrm>
-            <a:off x="640080" y="5017008"/>
-            <a:ext cx="640080" cy="411480"/>
+          <p:cNvPr id="50" name="Text 48"/>
+          <p:cNvSpPr/>
+          <p:nvPr/>
+        </p:nvSpPr>
+        <p:spPr>
+          <a:xfrm>
+            <a:off x="8570976" y="4298061"/>
+            <a:ext cx="2749296" cy="222504"/>
           </a:xfrm>
           <a:prstGeom prst="rect">
             <a:avLst/>
@@ -10557,30 +11958,91 @@
               <a:buNone/>
             </a:pPr>
             <a:r>
-              <a:rPr lang="en-US" sz="2200" dirty="0">
-                <a:solidFill>
-                  <a:srgbClr val="8C8C86"/>
-                </a:solidFill>
-                <a:latin typeface="Georgia" pitchFamily="34" charset="0"/>
-                <a:ea typeface="Georgia" pitchFamily="34" charset="-122"/>
-                <a:cs typeface="Georgia" pitchFamily="34" charset="-120"/>
-              </a:rPr>
-              <a:t>03</a:t>
-            </a:r>
-            <a:endParaRPr lang="en-US" sz="2200" dirty="0"/>
-          </a:p>
-        </p:txBody>
-      </p:sp>
-      <p:sp>
-        <p:nvSpPr>
-          <p:cNvPr id="30" name="Text 28"/>
-          <p:cNvSpPr/>
-          <p:nvPr/>
-        </p:nvSpPr>
-        <p:spPr>
-          <a:xfrm>
-            <a:off x="1417320" y="5035296"/>
-            <a:ext cx="7802575" cy="237744"/>
+              <a:rPr lang="en-US" sz="1100" dirty="0">
+                <a:solidFill>
+                  <a:srgbClr val="4A4A46"/>
+                </a:solidFill>
+                <a:latin typeface="Arial" pitchFamily="34" charset="0"/>
+                <a:ea typeface="Arial" pitchFamily="34" charset="-122"/>
+                <a:cs typeface="Arial" pitchFamily="34" charset="-120"/>
+              </a:rPr>
+              <a:t>Pay the booking deposit</a:t>
+            </a:r>
+            <a:endParaRPr lang="en-US" sz="1100" dirty="0"/>
+          </a:p>
+        </p:txBody>
+      </p:sp>
+      <p:sp>
+        <p:nvSpPr>
+          <p:cNvPr id="51" name="Shape 49"/>
+          <p:cNvSpPr/>
+          <p:nvPr/>
+        </p:nvSpPr>
+        <p:spPr>
+          <a:xfrm>
+            <a:off x="8324088" y="4575429"/>
+            <a:ext cx="118872" cy="118872"/>
+          </a:xfrm>
+          <a:prstGeom prst="ellipse">
+            <a:avLst/>
+          </a:prstGeom>
+          <a:ln w="19050">
+            <a:solidFill>
+              <a:srgbClr val="8C8C86"/>
+            </a:solidFill>
+            <a:prstDash val="solid"/>
+          </a:ln>
+        </p:spPr>
+      </p:sp>
+      <p:sp>
+        <p:nvSpPr>
+          <p:cNvPr id="52" name="Text 50"/>
+          <p:cNvSpPr/>
+          <p:nvPr/>
+        </p:nvSpPr>
+        <p:spPr>
+          <a:xfrm>
+            <a:off x="8570976" y="4520565"/>
+            <a:ext cx="2749296" cy="222504"/>
+          </a:xfrm>
+          <a:prstGeom prst="rect">
+            <a:avLst/>
+          </a:prstGeom>
+          <a:noFill/>
+          <a:ln/>
+        </p:spPr>
+        <p:txBody>
+          <a:bodyPr wrap="square" lIns="0" tIns="0" rIns="0" bIns="0" rtlCol="0" anchor="t"/>
+          <a:lstStyle/>
+          <a:p>
+            <a:pPr indent="0" marL="0">
+              <a:buNone/>
+            </a:pPr>
+            <a:r>
+              <a:rPr lang="en-US" sz="1100" dirty="0">
+                <a:solidFill>
+                  <a:srgbClr val="4A4A46"/>
+                </a:solidFill>
+                <a:latin typeface="Arial" pitchFamily="34" charset="0"/>
+                <a:ea typeface="Arial" pitchFamily="34" charset="-122"/>
+                <a:cs typeface="Arial" pitchFamily="34" charset="-120"/>
+              </a:rPr>
+              <a:t>Receipt sent by email</a:t>
+            </a:r>
+            <a:endParaRPr lang="en-US" sz="1100" dirty="0"/>
+          </a:p>
+        </p:txBody>
+      </p:sp>
+      <p:sp>
+        <p:nvSpPr>
+          <p:cNvPr id="53" name="Text 51"/>
+          <p:cNvSpPr/>
+          <p:nvPr/>
+        </p:nvSpPr>
+        <p:spPr>
+          <a:xfrm>
+            <a:off x="640080" y="5989320"/>
+            <a:ext cx="10908792" cy="274320"/>
           </a:xfrm>
           <a:prstGeom prst="rect">
             <a:avLst/>
@@ -10596,104 +12058,7 @@
               <a:buNone/>
             </a:pPr>
             <a:r>
-              <a:rPr lang="en-US" sz="1100" b="1" dirty="0">
-                <a:solidFill>
-                  <a:srgbClr val="1A1A1A"/>
-                </a:solidFill>
-                <a:latin typeface="Arial" pitchFamily="34" charset="0"/>
-                <a:ea typeface="Arial" pitchFamily="34" charset="-122"/>
-                <a:cs typeface="Arial" pitchFamily="34" charset="-120"/>
-              </a:rPr>
-              <a:t>Privacy</a:t>
-            </a:r>
-            <a:endParaRPr lang="en-US" sz="1100" dirty="0"/>
-          </a:p>
-        </p:txBody>
-      </p:sp>
-      <p:sp>
-        <p:nvSpPr>
-          <p:cNvPr id="31" name="Text 29"/>
-          <p:cNvSpPr/>
-          <p:nvPr/>
-        </p:nvSpPr>
-        <p:spPr>
-          <a:xfrm>
-            <a:off x="9265615" y="5026152"/>
-            <a:ext cx="2286000" cy="256032"/>
-          </a:xfrm>
-          <a:prstGeom prst="rect">
-            <a:avLst/>
-          </a:prstGeom>
-          <a:noFill/>
-          <a:ln/>
-        </p:spPr>
-        <p:txBody>
-          <a:bodyPr wrap="square" lIns="0" tIns="0" rIns="0" bIns="0" rtlCol="0" anchor="ctr"/>
-          <a:lstStyle/>
-          <a:p>
-            <a:pPr algn="r" indent="0" marL="0">
-              <a:buNone/>
-            </a:pPr>
-            <a:r>
-              <a:rPr lang="en-US" sz="1100" b="1" dirty="0">
-                <a:solidFill>
-                  <a:srgbClr val="1F5C3A"/>
-                </a:solidFill>
-                <a:latin typeface="Arial" pitchFamily="34" charset="0"/>
-                <a:ea typeface="Arial" pitchFamily="34" charset="-122"/>
-                <a:cs typeface="Arial" pitchFamily="34" charset="-120"/>
-              </a:rPr>
-              <a:t>■  </a:t>
-            </a:r>
-            <a:pPr algn="r" indent="0" marL="0">
-              <a:buNone/>
-            </a:pPr>
-            <a:r>
-              <a:rPr lang="en-US" sz="1100" b="1" dirty="0">
-                <a:solidFill>
-                  <a:srgbClr val="1F5C3A"/>
-                </a:solidFill>
-                <a:latin typeface="Arial" pitchFamily="34" charset="0"/>
-                <a:ea typeface="Arial" pitchFamily="34" charset="-122"/>
-                <a:cs typeface="Arial" pitchFamily="34" charset="-120"/>
-              </a:rPr>
-              <a:t>VERIFIED</a:t>
-            </a:r>
-            <a:endParaRPr lang="en-US" sz="1100" dirty="0"/>
-          </a:p>
-        </p:txBody>
-      </p:sp>
-      <p:sp>
-        <p:nvSpPr>
-          <p:cNvPr id="32" name="Text 30"/>
-          <p:cNvSpPr/>
-          <p:nvPr/>
-        </p:nvSpPr>
-        <p:spPr>
-          <a:xfrm>
-            <a:off x="1417320" y="5309616"/>
-            <a:ext cx="7802575" cy="487680"/>
-          </a:xfrm>
-          <a:prstGeom prst="rect">
-            <a:avLst/>
-          </a:prstGeom>
-          <a:noFill/>
-          <a:ln/>
-        </p:spPr>
-        <p:txBody>
-          <a:bodyPr wrap="square" lIns="0" tIns="0" rIns="0" bIns="0" rtlCol="0" anchor="t">
-            <a:normAutofit/>
-          </a:bodyPr>
-          <a:lstStyle/>
-          <a:p>
-            <a:pPr indent="0" marL="0">
-              <a:lnSpc>
-                <a:spcPct val="115000"/>
-              </a:lnSpc>
-              <a:buNone/>
-            </a:pPr>
-            <a:r>
-              <a:rPr lang="en-US" sz="1250" dirty="0">
+              <a:rPr lang="en-US" sz="1100" i="1" dirty="0">
                 <a:solidFill>
                   <a:srgbClr val="4A4A46"/>
                 </a:solidFill>
@@ -10701,46 +12066,7 @@
                 <a:ea typeface="Arial" pitchFamily="34" charset="-122"/>
                 <a:cs typeface="Arial" pitchFamily="34" charset="-120"/>
               </a:rPr>
-              <a:t>Patient phone numbers are hidden in system logs and only visible to clinic staff.</a:t>
-            </a:r>
-            <a:endParaRPr lang="en-US" sz="1250" dirty="0"/>
-          </a:p>
-        </p:txBody>
-      </p:sp>
-      <p:sp>
-        <p:nvSpPr>
-          <p:cNvPr id="33" name="Text 31"/>
-          <p:cNvSpPr/>
-          <p:nvPr/>
-        </p:nvSpPr>
-        <p:spPr>
-          <a:xfrm>
-            <a:off x="640080" y="5916168"/>
-            <a:ext cx="10911535" cy="320040"/>
-          </a:xfrm>
-          <a:prstGeom prst="rect">
-            <a:avLst/>
-          </a:prstGeom>
-          <a:noFill/>
-          <a:ln/>
-        </p:spPr>
-        <p:txBody>
-          <a:bodyPr wrap="square" lIns="0" tIns="0" rIns="0" bIns="0" rtlCol="0" anchor="ctr"/>
-          <a:lstStyle/>
-          <a:p>
-            <a:pPr indent="0" marL="0">
-              <a:buNone/>
-            </a:pPr>
-            <a:r>
-              <a:rPr lang="en-US" sz="1100" i="1" dirty="0">
-                <a:solidFill>
-                  <a:srgbClr val="8C8C86"/>
-                </a:solidFill>
-                <a:latin typeface="Georgia" pitchFamily="34" charset="0"/>
-                <a:ea typeface="Georgia" pitchFamily="34" charset="-122"/>
-                <a:cs typeface="Georgia" pitchFamily="34" charset="-120"/>
-              </a:rPr>
-              <a:t>Source: lead's code reviews this week.</a:t>
+              <a:t>Status as of this week's review; detail comes from the task tracker and the lead's code reviews.</a:t>
             </a:r>
             <a:endParaRPr lang="en-US" sz="1100" dirty="0"/>
           </a:p>
@@ -10935,7 +12261,7 @@
                 <a:ea typeface="Arial" pitchFamily="34" charset="-122"/>
                 <a:cs typeface="Arial" pitchFamily="34" charset="-120"/>
               </a:rPr>
-              <a:t>Needs Attention</a:t>
+              <a:t>Quality · Code Review</a:t>
             </a:r>
             <a:endParaRPr lang="en-US" sz="1100" dirty="0"/>
           </a:p>
@@ -10976,7 +12302,7 @@
                 <a:ea typeface="Georgia" pitchFamily="34" charset="-122"/>
                 <a:cs typeface="Georgia" pitchFamily="34" charset="-120"/>
               </a:rPr>
-              <a:t>Blockers &amp; Decisions Needed</a:t>
+              <a:t>Quality Check: Issues Caught Before Release</a:t>
             </a:r>
             <a:endParaRPr lang="en-US" sz="2800" dirty="0"/>
           </a:p>
@@ -11013,8 +12339,109 @@
         </p:nvSpPr>
         <p:spPr>
           <a:xfrm>
-            <a:off x="6095848" y="1783080"/>
-            <a:ext cx="0" cy="4480560"/>
+            <a:off x="640080" y="1783080"/>
+            <a:ext cx="10911535" cy="0"/>
+          </a:xfrm>
+          <a:prstGeom prst="line">
+            <a:avLst/>
+          </a:prstGeom>
+          <a:noFill/>
+          <a:ln w="25400">
+            <a:solidFill>
+              <a:srgbClr val="1A1A1A"/>
+            </a:solidFill>
+            <a:prstDash val="solid"/>
+          </a:ln>
+        </p:spPr>
+      </p:sp>
+      <p:sp>
+        <p:nvSpPr>
+          <p:cNvPr id="10" name="Text 8"/>
+          <p:cNvSpPr/>
+          <p:nvPr/>
+        </p:nvSpPr>
+        <p:spPr>
+          <a:xfrm>
+            <a:off x="640080" y="1892808"/>
+            <a:ext cx="1463040" cy="868680"/>
+          </a:xfrm>
+          <a:prstGeom prst="rect">
+            <a:avLst/>
+          </a:prstGeom>
+          <a:noFill/>
+          <a:ln/>
+        </p:spPr>
+        <p:txBody>
+          <a:bodyPr wrap="square" lIns="0" tIns="0" rIns="0" bIns="0" rtlCol="0" anchor="ctr"/>
+          <a:lstStyle/>
+          <a:p>
+            <a:pPr indent="0" marL="0">
+              <a:buNone/>
+            </a:pPr>
+            <a:r>
+              <a:rPr lang="en-US" sz="4800" dirty="0">
+                <a:solidFill>
+                  <a:srgbClr val="1F5C3A"/>
+                </a:solidFill>
+                <a:latin typeface="Georgia" pitchFamily="34" charset="0"/>
+                <a:ea typeface="Georgia" pitchFamily="34" charset="-122"/>
+                <a:cs typeface="Georgia" pitchFamily="34" charset="-120"/>
+              </a:rPr>
+              <a:t>3</a:t>
+            </a:r>
+            <a:endParaRPr lang="en-US" sz="4800" dirty="0"/>
+          </a:p>
+        </p:txBody>
+      </p:sp>
+      <p:sp>
+        <p:nvSpPr>
+          <p:cNvPr id="11" name="Text 9"/>
+          <p:cNvSpPr/>
+          <p:nvPr/>
+        </p:nvSpPr>
+        <p:spPr>
+          <a:xfrm>
+            <a:off x="2148840" y="1892808"/>
+            <a:ext cx="1823618" cy="868680"/>
+          </a:xfrm>
+          <a:prstGeom prst="rect">
+            <a:avLst/>
+          </a:prstGeom>
+          <a:noFill/>
+          <a:ln/>
+        </p:spPr>
+        <p:txBody>
+          <a:bodyPr wrap="square" lIns="0" tIns="0" rIns="0" bIns="0" rtlCol="0" anchor="ctr"/>
+          <a:lstStyle/>
+          <a:p>
+            <a:pPr indent="0" marL="0">
+              <a:buNone/>
+            </a:pPr>
+            <a:r>
+              <a:rPr lang="en-US" sz="1250" dirty="0">
+                <a:solidFill>
+                  <a:srgbClr val="4A4A46"/>
+                </a:solidFill>
+                <a:latin typeface="Arial" pitchFamily="34" charset="0"/>
+                <a:ea typeface="Arial" pitchFamily="34" charset="-122"/>
+                <a:cs typeface="Arial" pitchFamily="34" charset="-120"/>
+              </a:rPr>
+              <a:t>Features reviewed this week</a:t>
+            </a:r>
+            <a:endParaRPr lang="en-US" sz="1250" dirty="0"/>
+          </a:p>
+        </p:txBody>
+      </p:sp>
+      <p:sp>
+        <p:nvSpPr>
+          <p:cNvPr id="12" name="Shape 10"/>
+          <p:cNvSpPr/>
+          <p:nvPr/>
+        </p:nvSpPr>
+        <p:spPr>
+          <a:xfrm>
+            <a:off x="4201058" y="1965960"/>
+            <a:ext cx="0" cy="731520"/>
           </a:xfrm>
           <a:prstGeom prst="line">
             <a:avLst/>
@@ -11030,22 +12457,100 @@
       </p:sp>
       <p:sp>
         <p:nvSpPr>
-          <p:cNvPr id="10" name="Shape 8"/>
-          <p:cNvSpPr/>
-          <p:nvPr/>
-        </p:nvSpPr>
-        <p:spPr>
-          <a:xfrm>
-            <a:off x="640080" y="1783080"/>
-            <a:ext cx="5090008" cy="0"/>
+          <p:cNvPr id="13" name="Text 11"/>
+          <p:cNvSpPr/>
+          <p:nvPr/>
+        </p:nvSpPr>
+        <p:spPr>
+          <a:xfrm>
+            <a:off x="4429658" y="1892808"/>
+            <a:ext cx="1463040" cy="868680"/>
+          </a:xfrm>
+          <a:prstGeom prst="rect">
+            <a:avLst/>
+          </a:prstGeom>
+          <a:noFill/>
+          <a:ln/>
+        </p:spPr>
+        <p:txBody>
+          <a:bodyPr wrap="square" lIns="0" tIns="0" rIns="0" bIns="0" rtlCol="0" anchor="ctr"/>
+          <a:lstStyle/>
+          <a:p>
+            <a:pPr indent="0" marL="0">
+              <a:buNone/>
+            </a:pPr>
+            <a:r>
+              <a:rPr lang="en-US" sz="4800" dirty="0">
+                <a:solidFill>
+                  <a:srgbClr val="1A1A1A"/>
+                </a:solidFill>
+                <a:latin typeface="Georgia" pitchFamily="34" charset="0"/>
+                <a:ea typeface="Georgia" pitchFamily="34" charset="-122"/>
+                <a:cs typeface="Georgia" pitchFamily="34" charset="-120"/>
+              </a:rPr>
+              <a:t>2</a:t>
+            </a:r>
+            <a:endParaRPr lang="en-US" sz="4800" dirty="0"/>
+          </a:p>
+        </p:txBody>
+      </p:sp>
+      <p:sp>
+        <p:nvSpPr>
+          <p:cNvPr id="14" name="Text 12"/>
+          <p:cNvSpPr/>
+          <p:nvPr/>
+        </p:nvSpPr>
+        <p:spPr>
+          <a:xfrm>
+            <a:off x="5938418" y="1892808"/>
+            <a:ext cx="1823618" cy="868680"/>
+          </a:xfrm>
+          <a:prstGeom prst="rect">
+            <a:avLst/>
+          </a:prstGeom>
+          <a:noFill/>
+          <a:ln/>
+        </p:spPr>
+        <p:txBody>
+          <a:bodyPr wrap="square" lIns="0" tIns="0" rIns="0" bIns="0" rtlCol="0" anchor="ctr"/>
+          <a:lstStyle/>
+          <a:p>
+            <a:pPr indent="0" marL="0">
+              <a:buNone/>
+            </a:pPr>
+            <a:r>
+              <a:rPr lang="en-US" sz="1250" dirty="0">
+                <a:solidFill>
+                  <a:srgbClr val="4A4A46"/>
+                </a:solidFill>
+                <a:latin typeface="Arial" pitchFamily="34" charset="0"/>
+                <a:ea typeface="Arial" pitchFamily="34" charset="-122"/>
+                <a:cs typeface="Arial" pitchFamily="34" charset="-120"/>
+              </a:rPr>
+              <a:t>Approved for release</a:t>
+            </a:r>
+            <a:endParaRPr lang="en-US" sz="1250" dirty="0"/>
+          </a:p>
+        </p:txBody>
+      </p:sp>
+      <p:sp>
+        <p:nvSpPr>
+          <p:cNvPr id="15" name="Shape 13"/>
+          <p:cNvSpPr/>
+          <p:nvPr/>
+        </p:nvSpPr>
+        <p:spPr>
+          <a:xfrm>
+            <a:off x="7990637" y="1965960"/>
+            <a:ext cx="0" cy="731520"/>
           </a:xfrm>
           <a:prstGeom prst="line">
             <a:avLst/>
           </a:prstGeom>
           <a:noFill/>
-          <a:ln w="38100">
+          <a:ln w="9525">
             <a:solidFill>
-              <a:srgbClr val="A4471F"/>
+              <a:srgbClr val="D6D6D0"/>
             </a:solidFill>
             <a:prstDash val="solid"/>
           </a:ln>
@@ -11053,14 +12558,14 @@
       </p:sp>
       <p:sp>
         <p:nvSpPr>
-          <p:cNvPr id="11" name="Text 9"/>
-          <p:cNvSpPr/>
-          <p:nvPr/>
-        </p:nvSpPr>
-        <p:spPr>
-          <a:xfrm>
-            <a:off x="640080" y="1929384"/>
-            <a:ext cx="5090008" cy="237744"/>
+          <p:cNvPr id="16" name="Text 14"/>
+          <p:cNvSpPr/>
+          <p:nvPr/>
+        </p:nvSpPr>
+        <p:spPr>
+          <a:xfrm>
+            <a:off x="8219237" y="1892808"/>
+            <a:ext cx="1463040" cy="868680"/>
           </a:xfrm>
           <a:prstGeom prst="rect">
             <a:avLst/>
@@ -11076,116 +12581,46 @@
               <a:buNone/>
             </a:pPr>
             <a:r>
-              <a:rPr lang="en-US" sz="1100" b="1" dirty="0">
-                <a:solidFill>
-                  <a:srgbClr val="A4471F"/>
-                </a:solidFill>
-                <a:latin typeface="Arial" pitchFamily="34" charset="0"/>
-                <a:ea typeface="Arial" pitchFamily="34" charset="-122"/>
-                <a:cs typeface="Arial" pitchFamily="34" charset="-120"/>
-              </a:rPr>
-              <a:t>Blockers &amp; Risks</a:t>
-            </a:r>
-            <a:endParaRPr lang="en-US" sz="1100" dirty="0"/>
-          </a:p>
-        </p:txBody>
-      </p:sp>
-      <p:sp>
-        <p:nvSpPr>
-          <p:cNvPr id="12" name="Text 10"/>
-          <p:cNvSpPr/>
-          <p:nvPr/>
-        </p:nvSpPr>
-        <p:spPr>
-          <a:xfrm>
-            <a:off x="640080" y="2377440"/>
-            <a:ext cx="640080" cy="457200"/>
-          </a:xfrm>
-          <a:prstGeom prst="rect">
-            <a:avLst/>
-          </a:prstGeom>
-          <a:noFill/>
-          <a:ln/>
-        </p:spPr>
-        <p:txBody>
-          <a:bodyPr wrap="square" lIns="0" tIns="0" rIns="0" bIns="0" rtlCol="0" anchor="t"/>
-          <a:lstStyle/>
-          <a:p>
-            <a:pPr indent="0" marL="0">
-              <a:buNone/>
-            </a:pPr>
-            <a:r>
-              <a:rPr lang="en-US" sz="2400" dirty="0">
-                <a:solidFill>
-                  <a:srgbClr val="A4471F"/>
+              <a:rPr lang="en-US" sz="4800" dirty="0">
+                <a:solidFill>
+                  <a:srgbClr val="1A1A1A"/>
                 </a:solidFill>
                 <a:latin typeface="Georgia" pitchFamily="34" charset="0"/>
                 <a:ea typeface="Georgia" pitchFamily="34" charset="-122"/>
                 <a:cs typeface="Georgia" pitchFamily="34" charset="-120"/>
               </a:rPr>
-              <a:t>01</a:t>
-            </a:r>
-            <a:endParaRPr lang="en-US" sz="2400" dirty="0"/>
-          </a:p>
-        </p:txBody>
-      </p:sp>
-      <p:sp>
-        <p:nvSpPr>
-          <p:cNvPr id="13" name="Text 11"/>
-          <p:cNvSpPr/>
-          <p:nvPr/>
-        </p:nvSpPr>
-        <p:spPr>
-          <a:xfrm>
-            <a:off x="1371600" y="2377440"/>
-            <a:ext cx="4358488" cy="1325880"/>
-          </a:xfrm>
-          <a:prstGeom prst="rect">
-            <a:avLst/>
-          </a:prstGeom>
-          <a:noFill/>
-          <a:ln/>
-        </p:spPr>
-        <p:txBody>
-          <a:bodyPr wrap="square" lIns="0" tIns="0" rIns="0" bIns="0" rtlCol="0" anchor="t">
-            <a:normAutofit/>
-          </a:bodyPr>
-          <a:lstStyle/>
-          <a:p>
-            <a:pPr indent="0" marL="0">
-              <a:lnSpc>
-                <a:spcPct val="115000"/>
-              </a:lnSpc>
-              <a:spcAft>
-                <a:spcPts val="400"/>
-              </a:spcAft>
-              <a:buNone/>
-            </a:pPr>
-            <a:r>
-              <a:rPr lang="en-US" sz="1500" dirty="0">
-                <a:solidFill>
-                  <a:srgbClr val="1A1A1A"/>
-                </a:solidFill>
-                <a:latin typeface="Georgia" pitchFamily="34" charset="0"/>
-                <a:ea typeface="Georgia" pitchFamily="34" charset="-122"/>
-                <a:cs typeface="Georgia" pitchFamily="34" charset="-120"/>
-              </a:rPr>
-              <a:t>Reminders release waiting on one fix</a:t>
-            </a:r>
-            <a:endParaRPr lang="en-US" sz="1500" dirty="0"/>
-          </a:p>
-          <a:p>
-            <a:pPr indent="0" marL="0">
-              <a:lnSpc>
-                <a:spcPct val="115000"/>
-              </a:lnSpc>
-              <a:spcAft>
-                <a:spcPts val="400"/>
-              </a:spcAft>
-              <a:buNone/>
-            </a:pPr>
-            <a:r>
-              <a:rPr lang="en-US" sz="1200" dirty="0">
+              <a:t>212</a:t>
+            </a:r>
+            <a:endParaRPr lang="en-US" sz="4800" dirty="0"/>
+          </a:p>
+        </p:txBody>
+      </p:sp>
+      <p:sp>
+        <p:nvSpPr>
+          <p:cNvPr id="17" name="Text 15"/>
+          <p:cNvSpPr/>
+          <p:nvPr/>
+        </p:nvSpPr>
+        <p:spPr>
+          <a:xfrm>
+            <a:off x="9727997" y="1892808"/>
+            <a:ext cx="1823618" cy="868680"/>
+          </a:xfrm>
+          <a:prstGeom prst="rect">
+            <a:avLst/>
+          </a:prstGeom>
+          <a:noFill/>
+          <a:ln/>
+        </p:spPr>
+        <p:txBody>
+          <a:bodyPr wrap="square" lIns="0" tIns="0" rIns="0" bIns="0" rtlCol="0" anchor="ctr"/>
+          <a:lstStyle/>
+          <a:p>
+            <a:pPr indent="0" marL="0">
+              <a:buNone/>
+            </a:pPr>
+            <a:r>
+              <a:rPr lang="en-US" sz="1250" dirty="0">
                 <a:solidFill>
                   <a:srgbClr val="4A4A46"/>
                 </a:solidFill>
@@ -11193,51 +12628,28 @@
                 <a:ea typeface="Arial" pitchFamily="34" charset="-122"/>
                 <a:cs typeface="Arial" pitchFamily="34" charset="-120"/>
               </a:rPr>
-              <a:t>Duplicate reminders must be prevented before release. Fix is small and already tested.</a:t>
-            </a:r>
-            <a:endParaRPr lang="en-US" sz="1500" dirty="0"/>
-          </a:p>
-          <a:p>
-            <a:pPr indent="0" marL="0">
-              <a:lnSpc>
-                <a:spcPct val="115000"/>
-              </a:lnSpc>
-              <a:spcAft>
-                <a:spcPts val="400"/>
-              </a:spcAft>
-              <a:buNone/>
-            </a:pPr>
-            <a:r>
-              <a:rPr lang="en-US" sz="1100" i="1" dirty="0">
-                <a:solidFill>
-                  <a:srgbClr val="8C8C86"/>
-                </a:solidFill>
-                <a:latin typeface="Arial" pitchFamily="34" charset="0"/>
-                <a:ea typeface="Arial" pitchFamily="34" charset="-122"/>
-                <a:cs typeface="Arial" pitchFamily="34" charset="-120"/>
-              </a:rPr>
-              <a:t>Owner: Nina Rao @Nina · Expected: next week</a:t>
-            </a:r>
-            <a:endParaRPr lang="en-US" sz="1500" dirty="0"/>
-          </a:p>
-        </p:txBody>
-      </p:sp>
-      <p:sp>
-        <p:nvSpPr>
-          <p:cNvPr id="14" name="Shape 12"/>
-          <p:cNvSpPr/>
-          <p:nvPr/>
-        </p:nvSpPr>
-        <p:spPr>
-          <a:xfrm>
-            <a:off x="6461608" y="1783080"/>
-            <a:ext cx="5090008" cy="0"/>
+              <a:t>Automated tests passing (100%)</a:t>
+            </a:r>
+            <a:endParaRPr lang="en-US" sz="1250" dirty="0"/>
+          </a:p>
+        </p:txBody>
+      </p:sp>
+      <p:sp>
+        <p:nvSpPr>
+          <p:cNvPr id="18" name="Shape 16"/>
+          <p:cNvSpPr/>
+          <p:nvPr/>
+        </p:nvSpPr>
+        <p:spPr>
+          <a:xfrm>
+            <a:off x="640080" y="3017520"/>
+            <a:ext cx="10911535" cy="0"/>
           </a:xfrm>
           <a:prstGeom prst="line">
             <a:avLst/>
           </a:prstGeom>
           <a:noFill/>
-          <a:ln w="38100">
+          <a:ln w="9525">
             <a:solidFill>
               <a:srgbClr val="1A1A1A"/>
             </a:solidFill>
@@ -11247,53 +12659,14 @@
       </p:sp>
       <p:sp>
         <p:nvSpPr>
-          <p:cNvPr id="15" name="Text 13"/>
-          <p:cNvSpPr/>
-          <p:nvPr/>
-        </p:nvSpPr>
-        <p:spPr>
-          <a:xfrm>
-            <a:off x="6461608" y="1929384"/>
-            <a:ext cx="5090008" cy="237744"/>
-          </a:xfrm>
-          <a:prstGeom prst="rect">
-            <a:avLst/>
-          </a:prstGeom>
-          <a:noFill/>
-          <a:ln/>
-        </p:spPr>
-        <p:txBody>
-          <a:bodyPr wrap="square" lIns="0" tIns="0" rIns="0" bIns="0" rtlCol="0" anchor="ctr"/>
-          <a:lstStyle/>
-          <a:p>
-            <a:pPr indent="0" marL="0">
-              <a:buNone/>
-            </a:pPr>
-            <a:r>
-              <a:rPr lang="en-US" sz="1100" b="1" dirty="0">
-                <a:solidFill>
-                  <a:srgbClr val="1F5C3A"/>
-                </a:solidFill>
-                <a:latin typeface="Arial" pitchFamily="34" charset="0"/>
-                <a:ea typeface="Arial" pitchFamily="34" charset="-122"/>
-                <a:cs typeface="Arial" pitchFamily="34" charset="-120"/>
-              </a:rPr>
-              <a:t>Decisions Needed</a:t>
-            </a:r>
-            <a:endParaRPr lang="en-US" sz="1100" dirty="0"/>
-          </a:p>
-        </p:txBody>
-      </p:sp>
-      <p:sp>
-        <p:nvSpPr>
-          <p:cNvPr id="16" name="Text 14"/>
-          <p:cNvSpPr/>
-          <p:nvPr/>
-        </p:nvSpPr>
-        <p:spPr>
-          <a:xfrm>
-            <a:off x="6461608" y="2377440"/>
-            <a:ext cx="640080" cy="457200"/>
+          <p:cNvPr id="19" name="Text 17"/>
+          <p:cNvSpPr/>
+          <p:nvPr/>
+        </p:nvSpPr>
+        <p:spPr>
+          <a:xfrm>
+            <a:off x="640080" y="3127248"/>
+            <a:ext cx="640080" cy="411480"/>
           </a:xfrm>
           <a:prstGeom prst="rect">
             <a:avLst/>
@@ -11309,9 +12682,9 @@
               <a:buNone/>
             </a:pPr>
             <a:r>
-              <a:rPr lang="en-US" sz="2400" dirty="0">
-                <a:solidFill>
-                  <a:srgbClr val="1F5C3A"/>
+              <a:rPr lang="en-US" sz="2200" dirty="0">
+                <a:solidFill>
+                  <a:srgbClr val="8C8C86"/>
                 </a:solidFill>
                 <a:latin typeface="Georgia" pitchFamily="34" charset="0"/>
                 <a:ea typeface="Georgia" pitchFamily="34" charset="-122"/>
@@ -11319,20 +12692,112 @@
               </a:rPr>
               <a:t>01</a:t>
             </a:r>
-            <a:endParaRPr lang="en-US" sz="2400" dirty="0"/>
-          </a:p>
-        </p:txBody>
-      </p:sp>
-      <p:sp>
-        <p:nvSpPr>
-          <p:cNvPr id="17" name="Text 15"/>
-          <p:cNvSpPr/>
-          <p:nvPr/>
-        </p:nvSpPr>
-        <p:spPr>
-          <a:xfrm>
-            <a:off x="7193128" y="2377440"/>
-            <a:ext cx="4358488" cy="1325880"/>
+            <a:endParaRPr lang="en-US" sz="2200" dirty="0"/>
+          </a:p>
+        </p:txBody>
+      </p:sp>
+      <p:sp>
+        <p:nvSpPr>
+          <p:cNvPr id="20" name="Text 18"/>
+          <p:cNvSpPr/>
+          <p:nvPr/>
+        </p:nvSpPr>
+        <p:spPr>
+          <a:xfrm>
+            <a:off x="1417320" y="3145536"/>
+            <a:ext cx="7802575" cy="237744"/>
+          </a:xfrm>
+          <a:prstGeom prst="rect">
+            <a:avLst/>
+          </a:prstGeom>
+          <a:noFill/>
+          <a:ln/>
+        </p:spPr>
+        <p:txBody>
+          <a:bodyPr wrap="square" lIns="0" tIns="0" rIns="0" bIns="0" rtlCol="0" anchor="ctr"/>
+          <a:lstStyle/>
+          <a:p>
+            <a:pPr indent="0" marL="0">
+              <a:buNone/>
+            </a:pPr>
+            <a:r>
+              <a:rPr lang="en-US" sz="1100" b="1" dirty="0">
+                <a:solidFill>
+                  <a:srgbClr val="1A1A1A"/>
+                </a:solidFill>
+                <a:latin typeface="Arial" pitchFamily="34" charset="0"/>
+                <a:ea typeface="Arial" pitchFamily="34" charset="-122"/>
+                <a:cs typeface="Arial" pitchFamily="34" charset="-120"/>
+              </a:rPr>
+              <a:t>Appointment Reminders</a:t>
+            </a:r>
+            <a:endParaRPr lang="en-US" sz="1100" dirty="0"/>
+          </a:p>
+        </p:txBody>
+      </p:sp>
+      <p:sp>
+        <p:nvSpPr>
+          <p:cNvPr id="21" name="Text 19"/>
+          <p:cNvSpPr/>
+          <p:nvPr/>
+        </p:nvSpPr>
+        <p:spPr>
+          <a:xfrm>
+            <a:off x="9265615" y="3136392"/>
+            <a:ext cx="2286000" cy="256032"/>
+          </a:xfrm>
+          <a:prstGeom prst="rect">
+            <a:avLst/>
+          </a:prstGeom>
+          <a:noFill/>
+          <a:ln/>
+        </p:spPr>
+        <p:txBody>
+          <a:bodyPr wrap="square" lIns="0" tIns="0" rIns="0" bIns="0" rtlCol="0" anchor="ctr"/>
+          <a:lstStyle/>
+          <a:p>
+            <a:pPr algn="r" indent="0" marL="0">
+              <a:buNone/>
+            </a:pPr>
+            <a:r>
+              <a:rPr lang="en-US" sz="1100" b="1" dirty="0">
+                <a:solidFill>
+                  <a:srgbClr val="1F5C3A"/>
+                </a:solidFill>
+                <a:latin typeface="Arial" pitchFamily="34" charset="0"/>
+                <a:ea typeface="Arial" pitchFamily="34" charset="-122"/>
+                <a:cs typeface="Arial" pitchFamily="34" charset="-120"/>
+              </a:rPr>
+              <a:t>■  </a:t>
+            </a:r>
+            <a:pPr algn="r" indent="0" marL="0">
+              <a:buNone/>
+            </a:pPr>
+            <a:r>
+              <a:rPr lang="en-US" sz="1100" b="1" dirty="0">
+                <a:solidFill>
+                  <a:srgbClr val="1F5C3A"/>
+                </a:solidFill>
+                <a:latin typeface="Arial" pitchFamily="34" charset="0"/>
+                <a:ea typeface="Arial" pitchFamily="34" charset="-122"/>
+                <a:cs typeface="Arial" pitchFamily="34" charset="-120"/>
+              </a:rPr>
+              <a:t>VERIFIED</a:t>
+            </a:r>
+            <a:endParaRPr lang="en-US" sz="1100" dirty="0"/>
+          </a:p>
+        </p:txBody>
+      </p:sp>
+      <p:sp>
+        <p:nvSpPr>
+          <p:cNvPr id="22" name="Text 20"/>
+          <p:cNvSpPr/>
+          <p:nvPr/>
+        </p:nvSpPr>
+        <p:spPr>
+          <a:xfrm>
+            <a:off x="1417320" y="3419856"/>
+            <a:ext cx="7802575" cy="487680"/>
           </a:xfrm>
           <a:prstGeom prst="rect">
             <a:avLst/>
@@ -11350,36 +12815,208 @@
               <a:lnSpc>
                 <a:spcPct val="115000"/>
               </a:lnSpc>
-              <a:spcAft>
-                <a:spcPts val="400"/>
-              </a:spcAft>
-              <a:buNone/>
-            </a:pPr>
-            <a:r>
-              <a:rPr lang="en-US" sz="1500" dirty="0">
-                <a:solidFill>
-                  <a:srgbClr val="1A1A1A"/>
+              <a:buNone/>
+            </a:pPr>
+            <a:r>
+              <a:rPr lang="en-US" sz="1250" dirty="0">
+                <a:solidFill>
+                  <a:srgbClr val="4A4A46"/>
+                </a:solidFill>
+                <a:latin typeface="Arial" pitchFamily="34" charset="0"/>
+                <a:ea typeface="Arial" pitchFamily="34" charset="-122"/>
+                <a:cs typeface="Arial" pitchFamily="34" charset="-120"/>
+              </a:rPr>
+              <a:t>Clinics can send SMS and email reminders 24 hours and 2 hours before each appointment.</a:t>
+            </a:r>
+            <a:endParaRPr lang="en-US" sz="1250" dirty="0"/>
+          </a:p>
+        </p:txBody>
+      </p:sp>
+      <p:sp>
+        <p:nvSpPr>
+          <p:cNvPr id="23" name="Shape 21"/>
+          <p:cNvSpPr/>
+          <p:nvPr/>
+        </p:nvSpPr>
+        <p:spPr>
+          <a:xfrm>
+            <a:off x="1417320" y="3962400"/>
+            <a:ext cx="10134295" cy="0"/>
+          </a:xfrm>
+          <a:prstGeom prst="line">
+            <a:avLst/>
+          </a:prstGeom>
+          <a:noFill/>
+          <a:ln w="9525">
+            <a:solidFill>
+              <a:srgbClr val="D6D6D0"/>
+            </a:solidFill>
+            <a:prstDash val="solid"/>
+          </a:ln>
+        </p:spPr>
+      </p:sp>
+      <p:sp>
+        <p:nvSpPr>
+          <p:cNvPr id="24" name="Text 22"/>
+          <p:cNvSpPr/>
+          <p:nvPr/>
+        </p:nvSpPr>
+        <p:spPr>
+          <a:xfrm>
+            <a:off x="640080" y="4072128"/>
+            <a:ext cx="640080" cy="411480"/>
+          </a:xfrm>
+          <a:prstGeom prst="rect">
+            <a:avLst/>
+          </a:prstGeom>
+          <a:noFill/>
+          <a:ln/>
+        </p:spPr>
+        <p:txBody>
+          <a:bodyPr wrap="square" lIns="0" tIns="0" rIns="0" bIns="0" rtlCol="0" anchor="t"/>
+          <a:lstStyle/>
+          <a:p>
+            <a:pPr indent="0" marL="0">
+              <a:buNone/>
+            </a:pPr>
+            <a:r>
+              <a:rPr lang="en-US" sz="2200" dirty="0">
+                <a:solidFill>
+                  <a:srgbClr val="8C8C86"/>
                 </a:solidFill>
                 <a:latin typeface="Georgia" pitchFamily="34" charset="0"/>
                 <a:ea typeface="Georgia" pitchFamily="34" charset="-122"/>
                 <a:cs typeface="Georgia" pitchFamily="34" charset="-120"/>
               </a:rPr>
-              <a:t>Can patients turn off SMS reminders and keep email only?</a:t>
-            </a:r>
-            <a:endParaRPr lang="en-US" sz="1500" dirty="0"/>
-          </a:p>
+              <a:t>02</a:t>
+            </a:r>
+            <a:endParaRPr lang="en-US" sz="2200" dirty="0"/>
+          </a:p>
+        </p:txBody>
+      </p:sp>
+      <p:sp>
+        <p:nvSpPr>
+          <p:cNvPr id="25" name="Text 23"/>
+          <p:cNvSpPr/>
+          <p:nvPr/>
+        </p:nvSpPr>
+        <p:spPr>
+          <a:xfrm>
+            <a:off x="1417320" y="4090416"/>
+            <a:ext cx="7802575" cy="237744"/>
+          </a:xfrm>
+          <a:prstGeom prst="rect">
+            <a:avLst/>
+          </a:prstGeom>
+          <a:noFill/>
+          <a:ln/>
+        </p:spPr>
+        <p:txBody>
+          <a:bodyPr wrap="square" lIns="0" tIns="0" rIns="0" bIns="0" rtlCol="0" anchor="ctr"/>
+          <a:lstStyle/>
+          <a:p>
+            <a:pPr indent="0" marL="0">
+              <a:buNone/>
+            </a:pPr>
+            <a:r>
+              <a:rPr lang="en-US" sz="1100" b="1" dirty="0">
+                <a:solidFill>
+                  <a:srgbClr val="1A1A1A"/>
+                </a:solidFill>
+                <a:latin typeface="Arial" pitchFamily="34" charset="0"/>
+                <a:ea typeface="Arial" pitchFamily="34" charset="-122"/>
+                <a:cs typeface="Arial" pitchFamily="34" charset="-120"/>
+              </a:rPr>
+              <a:t>Reliability</a:t>
+            </a:r>
+            <a:endParaRPr lang="en-US" sz="1100" dirty="0"/>
+          </a:p>
+        </p:txBody>
+      </p:sp>
+      <p:sp>
+        <p:nvSpPr>
+          <p:cNvPr id="26" name="Text 24"/>
+          <p:cNvSpPr/>
+          <p:nvPr/>
+        </p:nvSpPr>
+        <p:spPr>
+          <a:xfrm>
+            <a:off x="9265615" y="4081272"/>
+            <a:ext cx="2286000" cy="256032"/>
+          </a:xfrm>
+          <a:prstGeom prst="rect">
+            <a:avLst/>
+          </a:prstGeom>
+          <a:noFill/>
+          <a:ln/>
+        </p:spPr>
+        <p:txBody>
+          <a:bodyPr wrap="square" lIns="0" tIns="0" rIns="0" bIns="0" rtlCol="0" anchor="ctr"/>
+          <a:lstStyle/>
+          <a:p>
+            <a:pPr algn="r" indent="0" marL="0">
+              <a:buNone/>
+            </a:pPr>
+            <a:r>
+              <a:rPr lang="en-US" sz="1100" b="1" dirty="0">
+                <a:solidFill>
+                  <a:srgbClr val="8DB39A"/>
+                </a:solidFill>
+                <a:latin typeface="Arial" pitchFamily="34" charset="0"/>
+                <a:ea typeface="Arial" pitchFamily="34" charset="-122"/>
+                <a:cs typeface="Arial" pitchFamily="34" charset="-120"/>
+              </a:rPr>
+              <a:t>■  </a:t>
+            </a:r>
+            <a:pPr algn="r" indent="0" marL="0">
+              <a:buNone/>
+            </a:pPr>
+            <a:r>
+              <a:rPr lang="en-US" sz="1100" b="1" dirty="0">
+                <a:solidFill>
+                  <a:srgbClr val="3F6A4E"/>
+                </a:solidFill>
+                <a:latin typeface="Arial" pitchFamily="34" charset="0"/>
+                <a:ea typeface="Arial" pitchFamily="34" charset="-122"/>
+                <a:cs typeface="Arial" pitchFamily="34" charset="-120"/>
+              </a:rPr>
+              <a:t>FIX BEFORE RELEASE</a:t>
+            </a:r>
+            <a:endParaRPr lang="en-US" sz="1100" dirty="0"/>
+          </a:p>
+        </p:txBody>
+      </p:sp>
+      <p:sp>
+        <p:nvSpPr>
+          <p:cNvPr id="27" name="Text 25"/>
+          <p:cNvSpPr/>
+          <p:nvPr/>
+        </p:nvSpPr>
+        <p:spPr>
+          <a:xfrm>
+            <a:off x="1417320" y="4364736"/>
+            <a:ext cx="7802575" cy="487680"/>
+          </a:xfrm>
+          <a:prstGeom prst="rect">
+            <a:avLst/>
+          </a:prstGeom>
+          <a:noFill/>
+          <a:ln/>
+        </p:spPr>
+        <p:txBody>
+          <a:bodyPr wrap="square" lIns="0" tIns="0" rIns="0" bIns="0" rtlCol="0" anchor="t">
+            <a:normAutofit/>
+          </a:bodyPr>
+          <a:lstStyle/>
           <a:p>
             <a:pPr indent="0" marL="0">
               <a:lnSpc>
                 <a:spcPct val="115000"/>
               </a:lnSpc>
-              <a:spcAft>
-                <a:spcPts val="400"/>
-              </a:spcAft>
-              <a:buNone/>
-            </a:pPr>
-            <a:r>
-              <a:rPr lang="en-US" sz="1200" dirty="0">
+              <a:buNone/>
+            </a:pPr>
+            <a:r>
+              <a:rPr lang="en-US" sz="1250" dirty="0">
                 <a:solidFill>
                   <a:srgbClr val="4A4A46"/>
                 </a:solidFill>
@@ -11387,18 +13024,232 @@
                 <a:ea typeface="Arial" pitchFamily="34" charset="-122"/>
                 <a:cs typeface="Arial" pitchFamily="34" charset="-120"/>
               </a:rPr>
-              <a:t>Today every patient with a phone number receives SMS reminders; some clinics report complaints.</a:t>
-            </a:r>
-            <a:endParaRPr lang="en-US" sz="1500" dirty="0"/>
-          </a:p>
+              <a:t>A patient could receive the same reminder twice if sending is retried. Small fix identified.</a:t>
+            </a:r>
+            <a:endParaRPr lang="en-US" sz="1250" dirty="0"/>
+          </a:p>
+        </p:txBody>
+      </p:sp>
+      <p:sp>
+        <p:nvSpPr>
+          <p:cNvPr id="28" name="Shape 26"/>
+          <p:cNvSpPr/>
+          <p:nvPr/>
+        </p:nvSpPr>
+        <p:spPr>
+          <a:xfrm>
+            <a:off x="1417320" y="4907280"/>
+            <a:ext cx="10134295" cy="0"/>
+          </a:xfrm>
+          <a:prstGeom prst="line">
+            <a:avLst/>
+          </a:prstGeom>
+          <a:noFill/>
+          <a:ln w="9525">
+            <a:solidFill>
+              <a:srgbClr val="D6D6D0"/>
+            </a:solidFill>
+            <a:prstDash val="solid"/>
+          </a:ln>
+        </p:spPr>
+      </p:sp>
+      <p:sp>
+        <p:nvSpPr>
+          <p:cNvPr id="29" name="Text 27"/>
+          <p:cNvSpPr/>
+          <p:nvPr/>
+        </p:nvSpPr>
+        <p:spPr>
+          <a:xfrm>
+            <a:off x="640080" y="5017008"/>
+            <a:ext cx="640080" cy="411480"/>
+          </a:xfrm>
+          <a:prstGeom prst="rect">
+            <a:avLst/>
+          </a:prstGeom>
+          <a:noFill/>
+          <a:ln/>
+        </p:spPr>
+        <p:txBody>
+          <a:bodyPr wrap="square" lIns="0" tIns="0" rIns="0" bIns="0" rtlCol="0" anchor="t"/>
+          <a:lstStyle/>
+          <a:p>
+            <a:pPr indent="0" marL="0">
+              <a:buNone/>
+            </a:pPr>
+            <a:r>
+              <a:rPr lang="en-US" sz="2200" dirty="0">
+                <a:solidFill>
+                  <a:srgbClr val="8C8C86"/>
+                </a:solidFill>
+                <a:latin typeface="Georgia" pitchFamily="34" charset="0"/>
+                <a:ea typeface="Georgia" pitchFamily="34" charset="-122"/>
+                <a:cs typeface="Georgia" pitchFamily="34" charset="-120"/>
+              </a:rPr>
+              <a:t>03</a:t>
+            </a:r>
+            <a:endParaRPr lang="en-US" sz="2200" dirty="0"/>
+          </a:p>
+        </p:txBody>
+      </p:sp>
+      <p:sp>
+        <p:nvSpPr>
+          <p:cNvPr id="30" name="Text 28"/>
+          <p:cNvSpPr/>
+          <p:nvPr/>
+        </p:nvSpPr>
+        <p:spPr>
+          <a:xfrm>
+            <a:off x="1417320" y="5035296"/>
+            <a:ext cx="7802575" cy="237744"/>
+          </a:xfrm>
+          <a:prstGeom prst="rect">
+            <a:avLst/>
+          </a:prstGeom>
+          <a:noFill/>
+          <a:ln/>
+        </p:spPr>
+        <p:txBody>
+          <a:bodyPr wrap="square" lIns="0" tIns="0" rIns="0" bIns="0" rtlCol="0" anchor="ctr"/>
+          <a:lstStyle/>
+          <a:p>
+            <a:pPr indent="0" marL="0">
+              <a:buNone/>
+            </a:pPr>
+            <a:r>
+              <a:rPr lang="en-US" sz="1100" b="1" dirty="0">
+                <a:solidFill>
+                  <a:srgbClr val="1A1A1A"/>
+                </a:solidFill>
+                <a:latin typeface="Arial" pitchFamily="34" charset="0"/>
+                <a:ea typeface="Arial" pitchFamily="34" charset="-122"/>
+                <a:cs typeface="Arial" pitchFamily="34" charset="-120"/>
+              </a:rPr>
+              <a:t>Privacy</a:t>
+            </a:r>
+            <a:endParaRPr lang="en-US" sz="1100" dirty="0"/>
+          </a:p>
+        </p:txBody>
+      </p:sp>
+      <p:sp>
+        <p:nvSpPr>
+          <p:cNvPr id="31" name="Text 29"/>
+          <p:cNvSpPr/>
+          <p:nvPr/>
+        </p:nvSpPr>
+        <p:spPr>
+          <a:xfrm>
+            <a:off x="9265615" y="5026152"/>
+            <a:ext cx="2286000" cy="256032"/>
+          </a:xfrm>
+          <a:prstGeom prst="rect">
+            <a:avLst/>
+          </a:prstGeom>
+          <a:noFill/>
+          <a:ln/>
+        </p:spPr>
+        <p:txBody>
+          <a:bodyPr wrap="square" lIns="0" tIns="0" rIns="0" bIns="0" rtlCol="0" anchor="ctr"/>
+          <a:lstStyle/>
+          <a:p>
+            <a:pPr algn="r" indent="0" marL="0">
+              <a:buNone/>
+            </a:pPr>
+            <a:r>
+              <a:rPr lang="en-US" sz="1100" b="1" dirty="0">
+                <a:solidFill>
+                  <a:srgbClr val="1F5C3A"/>
+                </a:solidFill>
+                <a:latin typeface="Arial" pitchFamily="34" charset="0"/>
+                <a:ea typeface="Arial" pitchFamily="34" charset="-122"/>
+                <a:cs typeface="Arial" pitchFamily="34" charset="-120"/>
+              </a:rPr>
+              <a:t>■  </a:t>
+            </a:r>
+            <a:pPr algn="r" indent="0" marL="0">
+              <a:buNone/>
+            </a:pPr>
+            <a:r>
+              <a:rPr lang="en-US" sz="1100" b="1" dirty="0">
+                <a:solidFill>
+                  <a:srgbClr val="1F5C3A"/>
+                </a:solidFill>
+                <a:latin typeface="Arial" pitchFamily="34" charset="0"/>
+                <a:ea typeface="Arial" pitchFamily="34" charset="-122"/>
+                <a:cs typeface="Arial" pitchFamily="34" charset="-120"/>
+              </a:rPr>
+              <a:t>VERIFIED</a:t>
+            </a:r>
+            <a:endParaRPr lang="en-US" sz="1100" dirty="0"/>
+          </a:p>
+        </p:txBody>
+      </p:sp>
+      <p:sp>
+        <p:nvSpPr>
+          <p:cNvPr id="32" name="Text 30"/>
+          <p:cNvSpPr/>
+          <p:nvPr/>
+        </p:nvSpPr>
+        <p:spPr>
+          <a:xfrm>
+            <a:off x="1417320" y="5309616"/>
+            <a:ext cx="7802575" cy="487680"/>
+          </a:xfrm>
+          <a:prstGeom prst="rect">
+            <a:avLst/>
+          </a:prstGeom>
+          <a:noFill/>
+          <a:ln/>
+        </p:spPr>
+        <p:txBody>
+          <a:bodyPr wrap="square" lIns="0" tIns="0" rIns="0" bIns="0" rtlCol="0" anchor="t">
+            <a:normAutofit/>
+          </a:bodyPr>
+          <a:lstStyle/>
           <a:p>
             <a:pPr indent="0" marL="0">
               <a:lnSpc>
                 <a:spcPct val="115000"/>
               </a:lnSpc>
-              <a:spcAft>
-                <a:spcPts val="400"/>
-              </a:spcAft>
+              <a:buNone/>
+            </a:pPr>
+            <a:r>
+              <a:rPr lang="en-US" sz="1250" dirty="0">
+                <a:solidFill>
+                  <a:srgbClr val="4A4A46"/>
+                </a:solidFill>
+                <a:latin typeface="Arial" pitchFamily="34" charset="0"/>
+                <a:ea typeface="Arial" pitchFamily="34" charset="-122"/>
+                <a:cs typeface="Arial" pitchFamily="34" charset="-120"/>
+              </a:rPr>
+              <a:t>Patient phone numbers are hidden in system logs and only visible to clinic staff.</a:t>
+            </a:r>
+            <a:endParaRPr lang="en-US" sz="1250" dirty="0"/>
+          </a:p>
+        </p:txBody>
+      </p:sp>
+      <p:sp>
+        <p:nvSpPr>
+          <p:cNvPr id="33" name="Text 31"/>
+          <p:cNvSpPr/>
+          <p:nvPr/>
+        </p:nvSpPr>
+        <p:spPr>
+          <a:xfrm>
+            <a:off x="640080" y="5916168"/>
+            <a:ext cx="10911535" cy="320040"/>
+          </a:xfrm>
+          <a:prstGeom prst="rect">
+            <a:avLst/>
+          </a:prstGeom>
+          <a:noFill/>
+          <a:ln/>
+        </p:spPr>
+        <p:txBody>
+          <a:bodyPr wrap="square" lIns="0" tIns="0" rIns="0" bIns="0" rtlCol="0" anchor="ctr"/>
+          <a:lstStyle/>
+          <a:p>
+            <a:pPr indent="0" marL="0">
               <a:buNone/>
             </a:pPr>
             <a:r>
@@ -11406,13 +13257,13 @@
                 <a:solidFill>
                   <a:srgbClr val="8C8C86"/>
                 </a:solidFill>
-                <a:latin typeface="Arial" pitchFamily="34" charset="0"/>
-                <a:ea typeface="Arial" pitchFamily="34" charset="-122"/>
-                <a:cs typeface="Arial" pitchFamily="34" charset="-120"/>
-              </a:rPr>
-              <a:t>Options: allow opt-out · clinic decides per patient · keep as today</a:t>
-            </a:r>
-            <a:endParaRPr lang="en-US" sz="1500" dirty="0"/>
+                <a:latin typeface="Georgia" pitchFamily="34" charset="0"/>
+                <a:ea typeface="Georgia" pitchFamily="34" charset="-122"/>
+                <a:cs typeface="Georgia" pitchFamily="34" charset="-120"/>
+              </a:rPr>
+              <a:t>Source: lead's code reviews this week.</a:t>
+            </a:r>
+            <a:endParaRPr lang="en-US" sz="1100" dirty="0"/>
           </a:p>
         </p:txBody>
       </p:sp>
@@ -11605,7 +13456,7 @@
                 <a:ea typeface="Arial" pitchFamily="34" charset="-122"/>
                 <a:cs typeface="Arial" pitchFamily="34" charset="-120"/>
               </a:rPr>
-              <a:t>Team · Task Tracker</a:t>
+              <a:t>Needs Attention</a:t>
             </a:r>
             <a:endParaRPr lang="en-US" sz="1100" dirty="0"/>
           </a:p>
@@ -11646,7 +13497,7 @@
                 <a:ea typeface="Georgia" pitchFamily="34" charset="-122"/>
                 <a:cs typeface="Georgia" pitchFamily="34" charset="-120"/>
               </a:rPr>
-              <a:t>Developer Task Track</a:t>
+              <a:t>Blockers &amp; Decisions Needed</a:t>
             </a:r>
             <a:endParaRPr lang="en-US" sz="2800" dirty="0"/>
           </a:p>
@@ -11683,392 +13534,8 @@
         </p:nvSpPr>
         <p:spPr>
           <a:xfrm>
-            <a:off x="640080" y="1783080"/>
-            <a:ext cx="3332378" cy="0"/>
-          </a:xfrm>
-          <a:prstGeom prst="line">
-            <a:avLst/>
-          </a:prstGeom>
-          <a:noFill/>
-          <a:ln w="25400">
-            <a:solidFill>
-              <a:srgbClr val="1A1A1A"/>
-            </a:solidFill>
-            <a:prstDash val="solid"/>
-          </a:ln>
-        </p:spPr>
-      </p:sp>
-      <p:sp>
-        <p:nvSpPr>
-          <p:cNvPr id="10" name="Text 8"/>
-          <p:cNvSpPr/>
-          <p:nvPr/>
-        </p:nvSpPr>
-        <p:spPr>
-          <a:xfrm>
-            <a:off x="640080" y="1874520"/>
-            <a:ext cx="3332378" cy="411480"/>
-          </a:xfrm>
-          <a:prstGeom prst="rect">
-            <a:avLst/>
-          </a:prstGeom>
-          <a:noFill/>
-          <a:ln/>
-        </p:spPr>
-        <p:txBody>
-          <a:bodyPr wrap="square" lIns="0" tIns="0" rIns="0" bIns="0" rtlCol="0" anchor="ctr">
-            <a:normAutofit/>
-          </a:bodyPr>
-          <a:lstStyle/>
-          <a:p>
-            <a:pPr indent="0" marL="0">
-              <a:buNone/>
-            </a:pPr>
-            <a:r>
-              <a:rPr lang="en-US" sz="1800" dirty="0">
-                <a:solidFill>
-                  <a:srgbClr val="1A1A1A"/>
-                </a:solidFill>
-                <a:latin typeface="Georgia" pitchFamily="34" charset="0"/>
-                <a:ea typeface="Georgia" pitchFamily="34" charset="-122"/>
-                <a:cs typeface="Georgia" pitchFamily="34" charset="-120"/>
-              </a:rPr>
-              <a:t>Leo Park @Leo</a:t>
-            </a:r>
-            <a:endParaRPr lang="en-US" sz="1800" dirty="0"/>
-          </a:p>
-        </p:txBody>
-      </p:sp>
-      <p:sp>
-        <p:nvSpPr>
-          <p:cNvPr id="11" name="Text 9"/>
-          <p:cNvSpPr/>
-          <p:nvPr/>
-        </p:nvSpPr>
-        <p:spPr>
-          <a:xfrm>
-            <a:off x="640080" y="2286000"/>
-            <a:ext cx="3332378" cy="237744"/>
-          </a:xfrm>
-          <a:prstGeom prst="rect">
-            <a:avLst/>
-          </a:prstGeom>
-          <a:noFill/>
-          <a:ln/>
-        </p:spPr>
-        <p:txBody>
-          <a:bodyPr wrap="square" lIns="0" tIns="0" rIns="0" bIns="0" rtlCol="0" anchor="ctr">
-            <a:normAutofit/>
-          </a:bodyPr>
-          <a:lstStyle/>
-          <a:p>
-            <a:pPr indent="0" marL="0">
-              <a:buNone/>
-            </a:pPr>
-            <a:r>
-              <a:rPr lang="en-US" sz="1100" b="1" dirty="0">
-                <a:solidFill>
-                  <a:srgbClr val="1F5C3A"/>
-                </a:solidFill>
-                <a:latin typeface="Arial" pitchFamily="34" charset="0"/>
-                <a:ea typeface="Arial" pitchFamily="34" charset="-122"/>
-                <a:cs typeface="Arial" pitchFamily="34" charset="-120"/>
-              </a:rPr>
-              <a:t>ClinicBook · Patient App</a:t>
-            </a:r>
-            <a:endParaRPr lang="en-US" sz="1100" dirty="0"/>
-          </a:p>
-        </p:txBody>
-      </p:sp>
-      <p:sp>
-        <p:nvSpPr>
-          <p:cNvPr id="12" name="Text 10"/>
-          <p:cNvSpPr/>
-          <p:nvPr/>
-        </p:nvSpPr>
-        <p:spPr>
-          <a:xfrm>
-            <a:off x="640080" y="2606040"/>
-            <a:ext cx="548640" cy="548640"/>
-          </a:xfrm>
-          <a:prstGeom prst="rect">
-            <a:avLst/>
-          </a:prstGeom>
-          <a:noFill/>
-          <a:ln/>
-        </p:spPr>
-        <p:txBody>
-          <a:bodyPr wrap="square" lIns="0" tIns="0" rIns="0" bIns="0" rtlCol="0" anchor="ctr"/>
-          <a:lstStyle/>
-          <a:p>
-            <a:pPr indent="0" marL="0">
-              <a:buNone/>
-            </a:pPr>
-            <a:r>
-              <a:rPr lang="en-US" sz="3200" dirty="0">
-                <a:solidFill>
-                  <a:srgbClr val="1A1A1A"/>
-                </a:solidFill>
-                <a:latin typeface="Georgia" pitchFamily="34" charset="0"/>
-                <a:ea typeface="Georgia" pitchFamily="34" charset="-122"/>
-                <a:cs typeface="Georgia" pitchFamily="34" charset="-120"/>
-              </a:rPr>
-              <a:t>3</a:t>
-            </a:r>
-            <a:endParaRPr lang="en-US" sz="3200" dirty="0"/>
-          </a:p>
-        </p:txBody>
-      </p:sp>
-      <p:sp>
-        <p:nvSpPr>
-          <p:cNvPr id="13" name="Text 11"/>
-          <p:cNvSpPr/>
-          <p:nvPr/>
-        </p:nvSpPr>
-        <p:spPr>
-          <a:xfrm>
-            <a:off x="1207008" y="2761488"/>
-            <a:ext cx="731520" cy="237744"/>
-          </a:xfrm>
-          <a:prstGeom prst="rect">
-            <a:avLst/>
-          </a:prstGeom>
-          <a:noFill/>
-          <a:ln/>
-        </p:spPr>
-        <p:txBody>
-          <a:bodyPr wrap="square" lIns="0" tIns="0" rIns="0" bIns="0" rtlCol="0" anchor="ctr"/>
-          <a:lstStyle/>
-          <a:p>
-            <a:pPr indent="0" marL="0">
-              <a:buNone/>
-            </a:pPr>
-            <a:r>
-              <a:rPr lang="en-US" sz="1100" b="1" dirty="0">
-                <a:solidFill>
-                  <a:srgbClr val="8C8C86"/>
-                </a:solidFill>
-                <a:latin typeface="Arial" pitchFamily="34" charset="0"/>
-                <a:ea typeface="Arial" pitchFamily="34" charset="-122"/>
-                <a:cs typeface="Arial" pitchFamily="34" charset="-120"/>
-              </a:rPr>
-              <a:t>Done</a:t>
-            </a:r>
-            <a:endParaRPr lang="en-US" sz="1100" dirty="0"/>
-          </a:p>
-        </p:txBody>
-      </p:sp>
-      <p:sp>
-        <p:nvSpPr>
-          <p:cNvPr id="14" name="Text 12"/>
-          <p:cNvSpPr/>
-          <p:nvPr/>
-        </p:nvSpPr>
-        <p:spPr>
-          <a:xfrm>
-            <a:off x="1965960" y="2606040"/>
-            <a:ext cx="548640" cy="548640"/>
-          </a:xfrm>
-          <a:prstGeom prst="rect">
-            <a:avLst/>
-          </a:prstGeom>
-          <a:noFill/>
-          <a:ln/>
-        </p:spPr>
-        <p:txBody>
-          <a:bodyPr wrap="square" lIns="0" tIns="0" rIns="0" bIns="0" rtlCol="0" anchor="ctr"/>
-          <a:lstStyle/>
-          <a:p>
-            <a:pPr indent="0" marL="0">
-              <a:buNone/>
-            </a:pPr>
-            <a:r>
-              <a:rPr lang="en-US" sz="3200" dirty="0">
-                <a:solidFill>
-                  <a:srgbClr val="1A1A1A"/>
-                </a:solidFill>
-                <a:latin typeface="Georgia" pitchFamily="34" charset="0"/>
-                <a:ea typeface="Georgia" pitchFamily="34" charset="-122"/>
-                <a:cs typeface="Georgia" pitchFamily="34" charset="-120"/>
-              </a:rPr>
-              <a:t>2</a:t>
-            </a:r>
-            <a:endParaRPr lang="en-US" sz="3200" dirty="0"/>
-          </a:p>
-        </p:txBody>
-      </p:sp>
-      <p:sp>
-        <p:nvSpPr>
-          <p:cNvPr id="15" name="Text 13"/>
-          <p:cNvSpPr/>
-          <p:nvPr/>
-        </p:nvSpPr>
-        <p:spPr>
-          <a:xfrm>
-            <a:off x="2532888" y="2761488"/>
-            <a:ext cx="731520" cy="237744"/>
-          </a:xfrm>
-          <a:prstGeom prst="rect">
-            <a:avLst/>
-          </a:prstGeom>
-          <a:noFill/>
-          <a:ln/>
-        </p:spPr>
-        <p:txBody>
-          <a:bodyPr wrap="square" lIns="0" tIns="0" rIns="0" bIns="0" rtlCol="0" anchor="ctr"/>
-          <a:lstStyle/>
-          <a:p>
-            <a:pPr indent="0" marL="0">
-              <a:buNone/>
-            </a:pPr>
-            <a:r>
-              <a:rPr lang="en-US" sz="1100" b="1" dirty="0">
-                <a:solidFill>
-                  <a:srgbClr val="8C8C86"/>
-                </a:solidFill>
-                <a:latin typeface="Arial" pitchFamily="34" charset="0"/>
-                <a:ea typeface="Arial" pitchFamily="34" charset="-122"/>
-                <a:cs typeface="Arial" pitchFamily="34" charset="-120"/>
-              </a:rPr>
-              <a:t>Open</a:t>
-            </a:r>
-            <a:endParaRPr lang="en-US" sz="1100" dirty="0"/>
-          </a:p>
-        </p:txBody>
-      </p:sp>
-      <p:sp>
-        <p:nvSpPr>
-          <p:cNvPr id="16" name="Text 14"/>
-          <p:cNvSpPr/>
-          <p:nvPr/>
-        </p:nvSpPr>
-        <p:spPr>
-          <a:xfrm>
-            <a:off x="3058058" y="2606040"/>
-            <a:ext cx="914400" cy="548640"/>
-          </a:xfrm>
-          <a:prstGeom prst="rect">
-            <a:avLst/>
-          </a:prstGeom>
-          <a:noFill/>
-          <a:ln/>
-        </p:spPr>
-        <p:txBody>
-          <a:bodyPr wrap="square" lIns="0" tIns="0" rIns="0" bIns="0" rtlCol="0" anchor="ctr"/>
-          <a:lstStyle/>
-          <a:p>
-            <a:pPr algn="r" indent="0" marL="0">
-              <a:buNone/>
-            </a:pPr>
-            <a:r>
-              <a:rPr lang="en-US" sz="2000" dirty="0">
-                <a:solidFill>
-                  <a:srgbClr val="1A1A1A"/>
-                </a:solidFill>
-                <a:latin typeface="Georgia" pitchFamily="34" charset="0"/>
-                <a:ea typeface="Georgia" pitchFamily="34" charset="-122"/>
-                <a:cs typeface="Georgia" pitchFamily="34" charset="-120"/>
-              </a:rPr>
-              <a:t>60%</a:t>
-            </a:r>
-            <a:endParaRPr lang="en-US" sz="2000" dirty="0"/>
-          </a:p>
-        </p:txBody>
-      </p:sp>
-      <p:sp>
-        <p:nvSpPr>
-          <p:cNvPr id="17" name="Shape 15"/>
-          <p:cNvSpPr/>
-          <p:nvPr/>
-        </p:nvSpPr>
-        <p:spPr>
-          <a:xfrm>
-            <a:off x="640080" y="3246120"/>
-            <a:ext cx="3332378" cy="45720"/>
-          </a:xfrm>
-          <a:prstGeom prst="rect">
-            <a:avLst/>
-          </a:prstGeom>
-          <a:solidFill>
-            <a:srgbClr val="ECECE8"/>
-          </a:solidFill>
-          <a:ln/>
-        </p:spPr>
-      </p:sp>
-      <p:sp>
-        <p:nvSpPr>
-          <p:cNvPr id="18" name="Shape 16"/>
-          <p:cNvSpPr/>
-          <p:nvPr/>
-        </p:nvSpPr>
-        <p:spPr>
-          <a:xfrm>
-            <a:off x="640080" y="3246120"/>
-            <a:ext cx="1999427" cy="45720"/>
-          </a:xfrm>
-          <a:prstGeom prst="rect">
-            <a:avLst/>
-          </a:prstGeom>
-          <a:solidFill>
-            <a:srgbClr val="8DB39A"/>
-          </a:solidFill>
-          <a:ln/>
-        </p:spPr>
-      </p:sp>
-      <p:sp>
-        <p:nvSpPr>
-          <p:cNvPr id="19" name="Text 17"/>
-          <p:cNvSpPr/>
-          <p:nvPr/>
-        </p:nvSpPr>
-        <p:spPr>
-          <a:xfrm>
-            <a:off x="640080" y="3383280"/>
-            <a:ext cx="3332378" cy="594360"/>
-          </a:xfrm>
-          <a:prstGeom prst="rect">
-            <a:avLst/>
-          </a:prstGeom>
-          <a:noFill/>
-          <a:ln/>
-        </p:spPr>
-        <p:txBody>
-          <a:bodyPr wrap="square" lIns="0" tIns="0" rIns="0" bIns="0" rtlCol="0" anchor="t">
-            <a:normAutofit/>
-          </a:bodyPr>
-          <a:lstStyle/>
-          <a:p>
-            <a:pPr indent="0" marL="0">
-              <a:lnSpc>
-                <a:spcPct val="110000"/>
-              </a:lnSpc>
-              <a:buNone/>
-            </a:pPr>
-            <a:r>
-              <a:rPr lang="en-US" sz="1150" i="1" dirty="0">
-                <a:solidFill>
-                  <a:srgbClr val="4A4A46"/>
-                </a:solidFill>
-                <a:latin typeface="Georgia" pitchFamily="34" charset="0"/>
-                <a:ea typeface="Georgia" pitchFamily="34" charset="-122"/>
-                <a:cs typeface="Georgia" pitchFamily="34" charset="-120"/>
-              </a:rPr>
-              <a:t>Sign-in and clinic search done; booking calendar in progress.</a:t>
-            </a:r>
-            <a:endParaRPr lang="en-US" sz="1150" dirty="0"/>
-          </a:p>
-        </p:txBody>
-      </p:sp>
-      <p:sp>
-        <p:nvSpPr>
-          <p:cNvPr id="20" name="Shape 18"/>
-          <p:cNvSpPr/>
-          <p:nvPr/>
-        </p:nvSpPr>
-        <p:spPr>
-          <a:xfrm>
-            <a:off x="640080" y="4023360"/>
-            <a:ext cx="3332378" cy="0"/>
+            <a:off x="6095848" y="1783080"/>
+            <a:ext cx="0" cy="4480560"/>
           </a:xfrm>
           <a:prstGeom prst="line">
             <a:avLst/>
@@ -12084,14 +13551,115 @@
       </p:sp>
       <p:sp>
         <p:nvSpPr>
-          <p:cNvPr id="21" name="Text 19"/>
-          <p:cNvSpPr/>
-          <p:nvPr/>
-        </p:nvSpPr>
-        <p:spPr>
-          <a:xfrm>
-            <a:off x="640080" y="4142232"/>
-            <a:ext cx="3332378" cy="438912"/>
+          <p:cNvPr id="10" name="Shape 8"/>
+          <p:cNvSpPr/>
+          <p:nvPr/>
+        </p:nvSpPr>
+        <p:spPr>
+          <a:xfrm>
+            <a:off x="640080" y="1783080"/>
+            <a:ext cx="5090008" cy="0"/>
+          </a:xfrm>
+          <a:prstGeom prst="line">
+            <a:avLst/>
+          </a:prstGeom>
+          <a:noFill/>
+          <a:ln w="38100">
+            <a:solidFill>
+              <a:srgbClr val="A4471F"/>
+            </a:solidFill>
+            <a:prstDash val="solid"/>
+          </a:ln>
+        </p:spPr>
+      </p:sp>
+      <p:sp>
+        <p:nvSpPr>
+          <p:cNvPr id="11" name="Text 9"/>
+          <p:cNvSpPr/>
+          <p:nvPr/>
+        </p:nvSpPr>
+        <p:spPr>
+          <a:xfrm>
+            <a:off x="640080" y="1929384"/>
+            <a:ext cx="5090008" cy="237744"/>
+          </a:xfrm>
+          <a:prstGeom prst="rect">
+            <a:avLst/>
+          </a:prstGeom>
+          <a:noFill/>
+          <a:ln/>
+        </p:spPr>
+        <p:txBody>
+          <a:bodyPr wrap="square" lIns="0" tIns="0" rIns="0" bIns="0" rtlCol="0" anchor="ctr"/>
+          <a:lstStyle/>
+          <a:p>
+            <a:pPr indent="0" marL="0">
+              <a:buNone/>
+            </a:pPr>
+            <a:r>
+              <a:rPr lang="en-US" sz="1100" b="1" dirty="0">
+                <a:solidFill>
+                  <a:srgbClr val="A4471F"/>
+                </a:solidFill>
+                <a:latin typeface="Arial" pitchFamily="34" charset="0"/>
+                <a:ea typeface="Arial" pitchFamily="34" charset="-122"/>
+                <a:cs typeface="Arial" pitchFamily="34" charset="-120"/>
+              </a:rPr>
+              <a:t>Blockers &amp; Risks</a:t>
+            </a:r>
+            <a:endParaRPr lang="en-US" sz="1100" dirty="0"/>
+          </a:p>
+        </p:txBody>
+      </p:sp>
+      <p:sp>
+        <p:nvSpPr>
+          <p:cNvPr id="12" name="Text 10"/>
+          <p:cNvSpPr/>
+          <p:nvPr/>
+        </p:nvSpPr>
+        <p:spPr>
+          <a:xfrm>
+            <a:off x="640080" y="2377440"/>
+            <a:ext cx="640080" cy="457200"/>
+          </a:xfrm>
+          <a:prstGeom prst="rect">
+            <a:avLst/>
+          </a:prstGeom>
+          <a:noFill/>
+          <a:ln/>
+        </p:spPr>
+        <p:txBody>
+          <a:bodyPr wrap="square" lIns="0" tIns="0" rIns="0" bIns="0" rtlCol="0" anchor="t"/>
+          <a:lstStyle/>
+          <a:p>
+            <a:pPr indent="0" marL="0">
+              <a:buNone/>
+            </a:pPr>
+            <a:r>
+              <a:rPr lang="en-US" sz="2400" dirty="0">
+                <a:solidFill>
+                  <a:srgbClr val="A4471F"/>
+                </a:solidFill>
+                <a:latin typeface="Georgia" pitchFamily="34" charset="0"/>
+                <a:ea typeface="Georgia" pitchFamily="34" charset="-122"/>
+                <a:cs typeface="Georgia" pitchFamily="34" charset="-120"/>
+              </a:rPr>
+              <a:t>01</a:t>
+            </a:r>
+            <a:endParaRPr lang="en-US" sz="2400" dirty="0"/>
+          </a:p>
+        </p:txBody>
+      </p:sp>
+      <p:sp>
+        <p:nvSpPr>
+          <p:cNvPr id="13" name="Text 11"/>
+          <p:cNvSpPr/>
+          <p:nvPr/>
+        </p:nvSpPr>
+        <p:spPr>
+          <a:xfrm>
+            <a:off x="1371600" y="2377440"/>
+            <a:ext cx="4358488" cy="1325880"/>
           </a:xfrm>
           <a:prstGeom prst="rect">
             <a:avLst/>
@@ -12106,175 +13674,62 @@
           <a:lstStyle/>
           <a:p>
             <a:pPr indent="0" marL="0">
-              <a:buNone/>
-            </a:pPr>
-            <a:r>
-              <a:rPr lang="en-US" sz="1100" dirty="0">
-                <a:solidFill>
-                  <a:srgbClr val="1F5C3A"/>
-                </a:solidFill>
-                <a:latin typeface="Arial" pitchFamily="34" charset="0"/>
-                <a:ea typeface="Arial" pitchFamily="34" charset="-122"/>
-                <a:cs typeface="Arial" pitchFamily="34" charset="-120"/>
-              </a:rPr>
-              <a:t>■  </a:t>
-            </a:r>
-            <a:pPr indent="0" marL="0">
-              <a:buNone/>
-            </a:pPr>
-            <a:r>
-              <a:rPr lang="en-US" sz="1100" dirty="0">
+              <a:lnSpc>
+                <a:spcPct val="115000"/>
+              </a:lnSpc>
+              <a:spcAft>
+                <a:spcPts val="400"/>
+              </a:spcAft>
+              <a:buNone/>
+            </a:pPr>
+            <a:r>
+              <a:rPr lang="en-US" sz="1500" dirty="0">
                 <a:solidFill>
                   <a:srgbClr val="1A1A1A"/>
                 </a:solidFill>
-                <a:latin typeface="Arial" pitchFamily="34" charset="0"/>
-                <a:ea typeface="Arial" pitchFamily="34" charset="-122"/>
-                <a:cs typeface="Arial" pitchFamily="34" charset="-120"/>
-              </a:rPr>
-              <a:t>P1 · Accounts &amp; Sign-in (3/3)</a:t>
-            </a:r>
-            <a:endParaRPr lang="en-US" sz="1100" dirty="0"/>
-          </a:p>
-        </p:txBody>
-      </p:sp>
-      <p:sp>
-        <p:nvSpPr>
-          <p:cNvPr id="22" name="Text 20"/>
-          <p:cNvSpPr/>
-          <p:nvPr/>
-        </p:nvSpPr>
-        <p:spPr>
-          <a:xfrm>
-            <a:off x="640080" y="4581144"/>
-            <a:ext cx="3332378" cy="438912"/>
-          </a:xfrm>
-          <a:prstGeom prst="rect">
-            <a:avLst/>
-          </a:prstGeom>
-          <a:noFill/>
-          <a:ln/>
-        </p:spPr>
-        <p:txBody>
-          <a:bodyPr wrap="square" lIns="0" tIns="0" rIns="0" bIns="0" rtlCol="0" anchor="t">
-            <a:normAutofit/>
-          </a:bodyPr>
-          <a:lstStyle/>
-          <a:p>
-            <a:pPr indent="0" marL="0">
-              <a:buNone/>
-            </a:pPr>
-            <a:r>
-              <a:rPr lang="en-US" sz="1100" dirty="0">
-                <a:solidFill>
-                  <a:srgbClr val="1F5C3A"/>
-                </a:solidFill>
-                <a:latin typeface="Arial" pitchFamily="34" charset="0"/>
-                <a:ea typeface="Arial" pitchFamily="34" charset="-122"/>
-                <a:cs typeface="Arial" pitchFamily="34" charset="-120"/>
-              </a:rPr>
-              <a:t>■  </a:t>
-            </a:r>
-            <a:pPr indent="0" marL="0">
-              <a:buNone/>
-            </a:pPr>
-            <a:r>
-              <a:rPr lang="en-US" sz="1100" dirty="0">
-                <a:solidFill>
-                  <a:srgbClr val="1A1A1A"/>
-                </a:solidFill>
-                <a:latin typeface="Arial" pitchFamily="34" charset="0"/>
-                <a:ea typeface="Arial" pitchFamily="34" charset="-122"/>
-                <a:cs typeface="Arial" pitchFamily="34" charset="-120"/>
-              </a:rPr>
-              <a:t>P2 · Clinic Search &amp; Maps (5/5)</a:t>
-            </a:r>
-            <a:endParaRPr lang="en-US" sz="1100" dirty="0"/>
-          </a:p>
-        </p:txBody>
-      </p:sp>
-      <p:sp>
-        <p:nvSpPr>
-          <p:cNvPr id="23" name="Text 21"/>
-          <p:cNvSpPr/>
-          <p:nvPr/>
-        </p:nvSpPr>
-        <p:spPr>
-          <a:xfrm>
-            <a:off x="640080" y="5020056"/>
-            <a:ext cx="3332378" cy="438912"/>
-          </a:xfrm>
-          <a:prstGeom prst="rect">
-            <a:avLst/>
-          </a:prstGeom>
-          <a:noFill/>
-          <a:ln/>
-        </p:spPr>
-        <p:txBody>
-          <a:bodyPr wrap="square" lIns="0" tIns="0" rIns="0" bIns="0" rtlCol="0" anchor="t">
-            <a:normAutofit/>
-          </a:bodyPr>
-          <a:lstStyle/>
-          <a:p>
-            <a:pPr indent="0" marL="0">
-              <a:buNone/>
-            </a:pPr>
-            <a:r>
-              <a:rPr lang="en-US" sz="1100" dirty="0">
-                <a:solidFill>
-                  <a:srgbClr val="8DB39A"/>
-                </a:solidFill>
-                <a:latin typeface="Arial" pitchFamily="34" charset="0"/>
-                <a:ea typeface="Arial" pitchFamily="34" charset="-122"/>
-                <a:cs typeface="Arial" pitchFamily="34" charset="-120"/>
-              </a:rPr>
-              <a:t>■  </a:t>
-            </a:r>
-            <a:pPr indent="0" marL="0">
-              <a:buNone/>
-            </a:pPr>
-            <a:r>
-              <a:rPr lang="en-US" sz="1100" dirty="0">
-                <a:solidFill>
-                  <a:srgbClr val="1A1A1A"/>
-                </a:solidFill>
-                <a:latin typeface="Arial" pitchFamily="34" charset="0"/>
-                <a:ea typeface="Arial" pitchFamily="34" charset="-122"/>
-                <a:cs typeface="Arial" pitchFamily="34" charset="-120"/>
-              </a:rPr>
-              <a:t>P3 · Booking Calendar (2/5)</a:t>
-            </a:r>
-            <a:endParaRPr lang="en-US" sz="1100" dirty="0"/>
-          </a:p>
-        </p:txBody>
-      </p:sp>
-      <p:sp>
-        <p:nvSpPr>
-          <p:cNvPr id="24" name="Text 22"/>
-          <p:cNvSpPr/>
-          <p:nvPr/>
-        </p:nvSpPr>
-        <p:spPr>
-          <a:xfrm>
-            <a:off x="640080" y="5458968"/>
-            <a:ext cx="3332378" cy="438912"/>
-          </a:xfrm>
-          <a:prstGeom prst="rect">
-            <a:avLst/>
-          </a:prstGeom>
-          <a:noFill/>
-          <a:ln/>
-        </p:spPr>
-        <p:txBody>
-          <a:bodyPr wrap="square" lIns="0" tIns="0" rIns="0" bIns="0" rtlCol="0" anchor="t">
-            <a:normAutofit/>
-          </a:bodyPr>
-          <a:lstStyle/>
-          <a:p>
-            <a:pPr indent="0" marL="0">
-              <a:buNone/>
-            </a:pPr>
-            <a:r>
-              <a:rPr lang="en-US" sz="1100" dirty="0">
+                <a:latin typeface="Georgia" pitchFamily="34" charset="0"/>
+                <a:ea typeface="Georgia" pitchFamily="34" charset="-122"/>
+                <a:cs typeface="Georgia" pitchFamily="34" charset="-120"/>
+              </a:rPr>
+              <a:t>Reminders release waiting on one fix</a:t>
+            </a:r>
+            <a:endParaRPr lang="en-US" sz="1500" dirty="0"/>
+          </a:p>
+          <a:p>
+            <a:pPr indent="0" marL="0">
+              <a:lnSpc>
+                <a:spcPct val="115000"/>
+              </a:lnSpc>
+              <a:spcAft>
+                <a:spcPts val="400"/>
+              </a:spcAft>
+              <a:buNone/>
+            </a:pPr>
+            <a:r>
+              <a:rPr lang="en-US" sz="1200" dirty="0">
+                <a:solidFill>
+                  <a:srgbClr val="4A4A46"/>
+                </a:solidFill>
+                <a:latin typeface="Arial" pitchFamily="34" charset="0"/>
+                <a:ea typeface="Arial" pitchFamily="34" charset="-122"/>
+                <a:cs typeface="Arial" pitchFamily="34" charset="-120"/>
+              </a:rPr>
+              <a:t>Duplicate reminders must be prevented before release. Fix is small and already tested.</a:t>
+            </a:r>
+            <a:endParaRPr lang="en-US" sz="1500" dirty="0"/>
+          </a:p>
+          <a:p>
+            <a:pPr indent="0" marL="0">
+              <a:lnSpc>
+                <a:spcPct val="115000"/>
+              </a:lnSpc>
+              <a:spcAft>
+                <a:spcPts val="400"/>
+              </a:spcAft>
+              <a:buNone/>
+            </a:pPr>
+            <a:r>
+              <a:rPr lang="en-US" sz="1100" i="1" dirty="0">
                 <a:solidFill>
                   <a:srgbClr val="8C8C86"/>
                 </a:solidFill>
@@ -12282,65 +13737,28 @@
                 <a:ea typeface="Arial" pitchFamily="34" charset="-122"/>
                 <a:cs typeface="Arial" pitchFamily="34" charset="-120"/>
               </a:rPr>
-              <a:t>■  </a:t>
-            </a:r>
-            <a:pPr indent="0" marL="0">
-              <a:buNone/>
-            </a:pPr>
-            <a:r>
-              <a:rPr lang="en-US" sz="1100" dirty="0">
-                <a:solidFill>
-                  <a:srgbClr val="8C8C86"/>
-                </a:solidFill>
-                <a:latin typeface="Arial" pitchFamily="34" charset="0"/>
-                <a:ea typeface="Arial" pitchFamily="34" charset="-122"/>
-                <a:cs typeface="Arial" pitchFamily="34" charset="-120"/>
-              </a:rPr>
-              <a:t>P4 · Payments &amp; Receipts (0/4)</a:t>
-            </a:r>
-            <a:endParaRPr lang="en-US" sz="1100" dirty="0"/>
-          </a:p>
-        </p:txBody>
-      </p:sp>
-      <p:sp>
-        <p:nvSpPr>
-          <p:cNvPr id="25" name="Shape 23"/>
-          <p:cNvSpPr/>
-          <p:nvPr/>
-        </p:nvSpPr>
-        <p:spPr>
-          <a:xfrm>
-            <a:off x="4201058" y="1920240"/>
-            <a:ext cx="0" cy="3977640"/>
+              <a:t>Owner: Nina Rao @Nina · Expected: next week</a:t>
+            </a:r>
+            <a:endParaRPr lang="en-US" sz="1500" dirty="0"/>
+          </a:p>
+        </p:txBody>
+      </p:sp>
+      <p:sp>
+        <p:nvSpPr>
+          <p:cNvPr id="14" name="Shape 12"/>
+          <p:cNvSpPr/>
+          <p:nvPr/>
+        </p:nvSpPr>
+        <p:spPr>
+          <a:xfrm>
+            <a:off x="6461608" y="1783080"/>
+            <a:ext cx="5090008" cy="0"/>
           </a:xfrm>
           <a:prstGeom prst="line">
             <a:avLst/>
           </a:prstGeom>
           <a:noFill/>
-          <a:ln w="9525">
-            <a:solidFill>
-              <a:srgbClr val="D6D6D0"/>
-            </a:solidFill>
-            <a:prstDash val="solid"/>
-          </a:ln>
-        </p:spPr>
-      </p:sp>
-      <p:sp>
-        <p:nvSpPr>
-          <p:cNvPr id="26" name="Shape 24"/>
-          <p:cNvSpPr/>
-          <p:nvPr/>
-        </p:nvSpPr>
-        <p:spPr>
-          <a:xfrm>
-            <a:off x="4429658" y="1783080"/>
-            <a:ext cx="3332378" cy="0"/>
-          </a:xfrm>
-          <a:prstGeom prst="line">
-            <a:avLst/>
-          </a:prstGeom>
-          <a:noFill/>
-          <a:ln w="25400">
+          <a:ln w="38100">
             <a:solidFill>
               <a:srgbClr val="1A1A1A"/>
             </a:solidFill>
@@ -12350,112 +13768,116 @@
       </p:sp>
       <p:sp>
         <p:nvSpPr>
-          <p:cNvPr id="27" name="Text 25"/>
-          <p:cNvSpPr/>
-          <p:nvPr/>
-        </p:nvSpPr>
-        <p:spPr>
-          <a:xfrm>
-            <a:off x="4429658" y="1874520"/>
-            <a:ext cx="3332378" cy="411480"/>
-          </a:xfrm>
-          <a:prstGeom prst="rect">
-            <a:avLst/>
-          </a:prstGeom>
-          <a:noFill/>
-          <a:ln/>
-        </p:spPr>
-        <p:txBody>
-          <a:bodyPr wrap="square" lIns="0" tIns="0" rIns="0" bIns="0" rtlCol="0" anchor="ctr">
-            <a:normAutofit/>
-          </a:bodyPr>
-          <a:lstStyle/>
-          <a:p>
-            <a:pPr indent="0" marL="0">
-              <a:buNone/>
-            </a:pPr>
-            <a:r>
-              <a:rPr lang="en-US" sz="1800" dirty="0">
-                <a:solidFill>
-                  <a:srgbClr val="1A1A1A"/>
+          <p:cNvPr id="15" name="Text 13"/>
+          <p:cNvSpPr/>
+          <p:nvPr/>
+        </p:nvSpPr>
+        <p:spPr>
+          <a:xfrm>
+            <a:off x="6461608" y="1929384"/>
+            <a:ext cx="5090008" cy="237744"/>
+          </a:xfrm>
+          <a:prstGeom prst="rect">
+            <a:avLst/>
+          </a:prstGeom>
+          <a:noFill/>
+          <a:ln/>
+        </p:spPr>
+        <p:txBody>
+          <a:bodyPr wrap="square" lIns="0" tIns="0" rIns="0" bIns="0" rtlCol="0" anchor="ctr"/>
+          <a:lstStyle/>
+          <a:p>
+            <a:pPr indent="0" marL="0">
+              <a:buNone/>
+            </a:pPr>
+            <a:r>
+              <a:rPr lang="en-US" sz="1100" b="1" dirty="0">
+                <a:solidFill>
+                  <a:srgbClr val="1F5C3A"/>
+                </a:solidFill>
+                <a:latin typeface="Arial" pitchFamily="34" charset="0"/>
+                <a:ea typeface="Arial" pitchFamily="34" charset="-122"/>
+                <a:cs typeface="Arial" pitchFamily="34" charset="-120"/>
+              </a:rPr>
+              <a:t>Decisions Needed</a:t>
+            </a:r>
+            <a:endParaRPr lang="en-US" sz="1100" dirty="0"/>
+          </a:p>
+        </p:txBody>
+      </p:sp>
+      <p:sp>
+        <p:nvSpPr>
+          <p:cNvPr id="16" name="Text 14"/>
+          <p:cNvSpPr/>
+          <p:nvPr/>
+        </p:nvSpPr>
+        <p:spPr>
+          <a:xfrm>
+            <a:off x="6461608" y="2377440"/>
+            <a:ext cx="640080" cy="457200"/>
+          </a:xfrm>
+          <a:prstGeom prst="rect">
+            <a:avLst/>
+          </a:prstGeom>
+          <a:noFill/>
+          <a:ln/>
+        </p:spPr>
+        <p:txBody>
+          <a:bodyPr wrap="square" lIns="0" tIns="0" rIns="0" bIns="0" rtlCol="0" anchor="t"/>
+          <a:lstStyle/>
+          <a:p>
+            <a:pPr indent="0" marL="0">
+              <a:buNone/>
+            </a:pPr>
+            <a:r>
+              <a:rPr lang="en-US" sz="2400" dirty="0">
+                <a:solidFill>
+                  <a:srgbClr val="1F5C3A"/>
                 </a:solidFill>
                 <a:latin typeface="Georgia" pitchFamily="34" charset="0"/>
                 <a:ea typeface="Georgia" pitchFamily="34" charset="-122"/>
                 <a:cs typeface="Georgia" pitchFamily="34" charset="-120"/>
               </a:rPr>
-              <a:t>Nina Rao @Nina</a:t>
-            </a:r>
-            <a:endParaRPr lang="en-US" sz="1800" dirty="0"/>
-          </a:p>
-        </p:txBody>
-      </p:sp>
-      <p:sp>
-        <p:nvSpPr>
-          <p:cNvPr id="28" name="Text 26"/>
-          <p:cNvSpPr/>
-          <p:nvPr/>
-        </p:nvSpPr>
-        <p:spPr>
-          <a:xfrm>
-            <a:off x="4429658" y="2286000"/>
-            <a:ext cx="3332378" cy="237744"/>
-          </a:xfrm>
-          <a:prstGeom prst="rect">
-            <a:avLst/>
-          </a:prstGeom>
-          <a:noFill/>
-          <a:ln/>
-        </p:spPr>
-        <p:txBody>
-          <a:bodyPr wrap="square" lIns="0" tIns="0" rIns="0" bIns="0" rtlCol="0" anchor="ctr">
+              <a:t>01</a:t>
+            </a:r>
+            <a:endParaRPr lang="en-US" sz="2400" dirty="0"/>
+          </a:p>
+        </p:txBody>
+      </p:sp>
+      <p:sp>
+        <p:nvSpPr>
+          <p:cNvPr id="17" name="Text 15"/>
+          <p:cNvSpPr/>
+          <p:nvPr/>
+        </p:nvSpPr>
+        <p:spPr>
+          <a:xfrm>
+            <a:off x="7193128" y="2377440"/>
+            <a:ext cx="4358488" cy="1325880"/>
+          </a:xfrm>
+          <a:prstGeom prst="rect">
+            <a:avLst/>
+          </a:prstGeom>
+          <a:noFill/>
+          <a:ln/>
+        </p:spPr>
+        <p:txBody>
+          <a:bodyPr wrap="square" lIns="0" tIns="0" rIns="0" bIns="0" rtlCol="0" anchor="t">
             <a:normAutofit/>
           </a:bodyPr>
           <a:lstStyle/>
           <a:p>
             <a:pPr indent="0" marL="0">
-              <a:buNone/>
-            </a:pPr>
-            <a:r>
-              <a:rPr lang="en-US" sz="1100" b="1" dirty="0">
-                <a:solidFill>
-                  <a:srgbClr val="1F5C3A"/>
-                </a:solidFill>
-                <a:latin typeface="Arial" pitchFamily="34" charset="0"/>
-                <a:ea typeface="Arial" pitchFamily="34" charset="-122"/>
-                <a:cs typeface="Arial" pitchFamily="34" charset="-120"/>
-              </a:rPr>
-              <a:t>ClinicBook · Clinic Dashboard</a:t>
-            </a:r>
-            <a:endParaRPr lang="en-US" sz="1100" dirty="0"/>
-          </a:p>
-        </p:txBody>
-      </p:sp>
-      <p:sp>
-        <p:nvSpPr>
-          <p:cNvPr id="29" name="Text 27"/>
-          <p:cNvSpPr/>
-          <p:nvPr/>
-        </p:nvSpPr>
-        <p:spPr>
-          <a:xfrm>
-            <a:off x="4429658" y="2606040"/>
-            <a:ext cx="548640" cy="548640"/>
-          </a:xfrm>
-          <a:prstGeom prst="rect">
-            <a:avLst/>
-          </a:prstGeom>
-          <a:noFill/>
-          <a:ln/>
-        </p:spPr>
-        <p:txBody>
-          <a:bodyPr wrap="square" lIns="0" tIns="0" rIns="0" bIns="0" rtlCol="0" anchor="ctr"/>
-          <a:lstStyle/>
-          <a:p>
-            <a:pPr indent="0" marL="0">
-              <a:buNone/>
-            </a:pPr>
-            <a:r>
-              <a:rPr lang="en-US" sz="3200" dirty="0">
+              <a:lnSpc>
+                <a:spcPct val="115000"/>
+              </a:lnSpc>
+              <a:spcAft>
+                <a:spcPts val="400"/>
+              </a:spcAft>
+              <a:buNone/>
+            </a:pPr>
+            <a:r>
+              <a:rPr lang="en-US" sz="1500" dirty="0">
                 <a:solidFill>
                   <a:srgbClr val="1A1A1A"/>
                 </a:solidFill>
@@ -12463,38 +13885,45 @@
                 <a:ea typeface="Georgia" pitchFamily="34" charset="-122"/>
                 <a:cs typeface="Georgia" pitchFamily="34" charset="-120"/>
               </a:rPr>
-              <a:t>4</a:t>
-            </a:r>
-            <a:endParaRPr lang="en-US" sz="3200" dirty="0"/>
-          </a:p>
-        </p:txBody>
-      </p:sp>
-      <p:sp>
-        <p:nvSpPr>
-          <p:cNvPr id="30" name="Text 28"/>
-          <p:cNvSpPr/>
-          <p:nvPr/>
-        </p:nvSpPr>
-        <p:spPr>
-          <a:xfrm>
-            <a:off x="4996586" y="2761488"/>
-            <a:ext cx="731520" cy="237744"/>
-          </a:xfrm>
-          <a:prstGeom prst="rect">
-            <a:avLst/>
-          </a:prstGeom>
-          <a:noFill/>
-          <a:ln/>
-        </p:spPr>
-        <p:txBody>
-          <a:bodyPr wrap="square" lIns="0" tIns="0" rIns="0" bIns="0" rtlCol="0" anchor="ctr"/>
-          <a:lstStyle/>
-          <a:p>
-            <a:pPr indent="0" marL="0">
-              <a:buNone/>
-            </a:pPr>
-            <a:r>
-              <a:rPr lang="en-US" sz="1100" b="1" dirty="0">
+              <a:t>Can patients turn off SMS reminders and keep email only?</a:t>
+            </a:r>
+            <a:endParaRPr lang="en-US" sz="1500" dirty="0"/>
+          </a:p>
+          <a:p>
+            <a:pPr indent="0" marL="0">
+              <a:lnSpc>
+                <a:spcPct val="115000"/>
+              </a:lnSpc>
+              <a:spcAft>
+                <a:spcPts val="400"/>
+              </a:spcAft>
+              <a:buNone/>
+            </a:pPr>
+            <a:r>
+              <a:rPr lang="en-US" sz="1200" dirty="0">
+                <a:solidFill>
+                  <a:srgbClr val="4A4A46"/>
+                </a:solidFill>
+                <a:latin typeface="Arial" pitchFamily="34" charset="0"/>
+                <a:ea typeface="Arial" pitchFamily="34" charset="-122"/>
+                <a:cs typeface="Arial" pitchFamily="34" charset="-120"/>
+              </a:rPr>
+              <a:t>Today every patient with a phone number receives SMS reminders; some clinics report complaints.</a:t>
+            </a:r>
+            <a:endParaRPr lang="en-US" sz="1500" dirty="0"/>
+          </a:p>
+          <a:p>
+            <a:pPr indent="0" marL="0">
+              <a:lnSpc>
+                <a:spcPct val="115000"/>
+              </a:lnSpc>
+              <a:spcAft>
+                <a:spcPts val="400"/>
+              </a:spcAft>
+              <a:buNone/>
+            </a:pPr>
+            <a:r>
+              <a:rPr lang="en-US" sz="1100" i="1" dirty="0">
                 <a:solidFill>
                   <a:srgbClr val="8C8C86"/>
                 </a:solidFill>
@@ -12502,1142 +13931,9 @@
                 <a:ea typeface="Arial" pitchFamily="34" charset="-122"/>
                 <a:cs typeface="Arial" pitchFamily="34" charset="-120"/>
               </a:rPr>
-              <a:t>Done</a:t>
-            </a:r>
-            <a:endParaRPr lang="en-US" sz="1100" dirty="0"/>
-          </a:p>
-        </p:txBody>
-      </p:sp>
-      <p:sp>
-        <p:nvSpPr>
-          <p:cNvPr id="31" name="Text 29"/>
-          <p:cNvSpPr/>
-          <p:nvPr/>
-        </p:nvSpPr>
-        <p:spPr>
-          <a:xfrm>
-            <a:off x="5755538" y="2606040"/>
-            <a:ext cx="548640" cy="548640"/>
-          </a:xfrm>
-          <a:prstGeom prst="rect">
-            <a:avLst/>
-          </a:prstGeom>
-          <a:noFill/>
-          <a:ln/>
-        </p:spPr>
-        <p:txBody>
-          <a:bodyPr wrap="square" lIns="0" tIns="0" rIns="0" bIns="0" rtlCol="0" anchor="ctr"/>
-          <a:lstStyle/>
-          <a:p>
-            <a:pPr indent="0" marL="0">
-              <a:buNone/>
-            </a:pPr>
-            <a:r>
-              <a:rPr lang="en-US" sz="3200" dirty="0">
-                <a:solidFill>
-                  <a:srgbClr val="1A1A1A"/>
-                </a:solidFill>
-                <a:latin typeface="Georgia" pitchFamily="34" charset="0"/>
-                <a:ea typeface="Georgia" pitchFamily="34" charset="-122"/>
-                <a:cs typeface="Georgia" pitchFamily="34" charset="-120"/>
-              </a:rPr>
-              <a:t>1</a:t>
-            </a:r>
-            <a:endParaRPr lang="en-US" sz="3200" dirty="0"/>
-          </a:p>
-        </p:txBody>
-      </p:sp>
-      <p:sp>
-        <p:nvSpPr>
-          <p:cNvPr id="32" name="Text 30"/>
-          <p:cNvSpPr/>
-          <p:nvPr/>
-        </p:nvSpPr>
-        <p:spPr>
-          <a:xfrm>
-            <a:off x="6322466" y="2761488"/>
-            <a:ext cx="731520" cy="237744"/>
-          </a:xfrm>
-          <a:prstGeom prst="rect">
-            <a:avLst/>
-          </a:prstGeom>
-          <a:noFill/>
-          <a:ln/>
-        </p:spPr>
-        <p:txBody>
-          <a:bodyPr wrap="square" lIns="0" tIns="0" rIns="0" bIns="0" rtlCol="0" anchor="ctr"/>
-          <a:lstStyle/>
-          <a:p>
-            <a:pPr indent="0" marL="0">
-              <a:buNone/>
-            </a:pPr>
-            <a:r>
-              <a:rPr lang="en-US" sz="1100" b="1" dirty="0">
-                <a:solidFill>
-                  <a:srgbClr val="8C8C86"/>
-                </a:solidFill>
-                <a:latin typeface="Arial" pitchFamily="34" charset="0"/>
-                <a:ea typeface="Arial" pitchFamily="34" charset="-122"/>
-                <a:cs typeface="Arial" pitchFamily="34" charset="-120"/>
-              </a:rPr>
-              <a:t>Open</a:t>
-            </a:r>
-            <a:endParaRPr lang="en-US" sz="1100" dirty="0"/>
-          </a:p>
-        </p:txBody>
-      </p:sp>
-      <p:sp>
-        <p:nvSpPr>
-          <p:cNvPr id="33" name="Text 31"/>
-          <p:cNvSpPr/>
-          <p:nvPr/>
-        </p:nvSpPr>
-        <p:spPr>
-          <a:xfrm>
-            <a:off x="6847637" y="2606040"/>
-            <a:ext cx="914400" cy="548640"/>
-          </a:xfrm>
-          <a:prstGeom prst="rect">
-            <a:avLst/>
-          </a:prstGeom>
-          <a:noFill/>
-          <a:ln/>
-        </p:spPr>
-        <p:txBody>
-          <a:bodyPr wrap="square" lIns="0" tIns="0" rIns="0" bIns="0" rtlCol="0" anchor="ctr"/>
-          <a:lstStyle/>
-          <a:p>
-            <a:pPr algn="r" indent="0" marL="0">
-              <a:buNone/>
-            </a:pPr>
-            <a:r>
-              <a:rPr lang="en-US" sz="2000" dirty="0">
-                <a:solidFill>
-                  <a:srgbClr val="1A1A1A"/>
-                </a:solidFill>
-                <a:latin typeface="Georgia" pitchFamily="34" charset="0"/>
-                <a:ea typeface="Georgia" pitchFamily="34" charset="-122"/>
-                <a:cs typeface="Georgia" pitchFamily="34" charset="-120"/>
-              </a:rPr>
-              <a:t>70%</a:t>
-            </a:r>
-            <a:endParaRPr lang="en-US" sz="2000" dirty="0"/>
-          </a:p>
-        </p:txBody>
-      </p:sp>
-      <p:sp>
-        <p:nvSpPr>
-          <p:cNvPr id="34" name="Shape 32"/>
-          <p:cNvSpPr/>
-          <p:nvPr/>
-        </p:nvSpPr>
-        <p:spPr>
-          <a:xfrm>
-            <a:off x="4429658" y="3246120"/>
-            <a:ext cx="3332378" cy="45720"/>
-          </a:xfrm>
-          <a:prstGeom prst="rect">
-            <a:avLst/>
-          </a:prstGeom>
-          <a:solidFill>
-            <a:srgbClr val="ECECE8"/>
-          </a:solidFill>
-          <a:ln/>
-        </p:spPr>
-      </p:sp>
-      <p:sp>
-        <p:nvSpPr>
-          <p:cNvPr id="35" name="Shape 33"/>
-          <p:cNvSpPr/>
-          <p:nvPr/>
-        </p:nvSpPr>
-        <p:spPr>
-          <a:xfrm>
-            <a:off x="4429658" y="3246120"/>
-            <a:ext cx="2332665" cy="45720"/>
-          </a:xfrm>
-          <a:prstGeom prst="rect">
-            <a:avLst/>
-          </a:prstGeom>
-          <a:solidFill>
-            <a:srgbClr val="8DB39A"/>
-          </a:solidFill>
-          <a:ln/>
-        </p:spPr>
-      </p:sp>
-      <p:sp>
-        <p:nvSpPr>
-          <p:cNvPr id="36" name="Text 34"/>
-          <p:cNvSpPr/>
-          <p:nvPr/>
-        </p:nvSpPr>
-        <p:spPr>
-          <a:xfrm>
-            <a:off x="4429658" y="3383280"/>
-            <a:ext cx="3332378" cy="594360"/>
-          </a:xfrm>
-          <a:prstGeom prst="rect">
-            <a:avLst/>
-          </a:prstGeom>
-          <a:noFill/>
-          <a:ln/>
-        </p:spPr>
-        <p:txBody>
-          <a:bodyPr wrap="square" lIns="0" tIns="0" rIns="0" bIns="0" rtlCol="0" anchor="t">
-            <a:normAutofit/>
-          </a:bodyPr>
-          <a:lstStyle/>
-          <a:p>
-            <a:pPr indent="0" marL="0">
-              <a:lnSpc>
-                <a:spcPct val="110000"/>
-              </a:lnSpc>
-              <a:buNone/>
-            </a:pPr>
-            <a:r>
-              <a:rPr lang="en-US" sz="1150" i="1" dirty="0">
-                <a:solidFill>
-                  <a:srgbClr val="4A4A46"/>
-                </a:solidFill>
-                <a:latin typeface="Georgia" pitchFamily="34" charset="0"/>
-                <a:ea typeface="Georgia" pitchFamily="34" charset="-122"/>
-                <a:cs typeface="Georgia" pitchFamily="34" charset="-120"/>
-              </a:rPr>
-              <a:t>Onboarding and schedules done; reminders in final review.</a:t>
-            </a:r>
-            <a:endParaRPr lang="en-US" sz="1150" dirty="0"/>
-          </a:p>
-        </p:txBody>
-      </p:sp>
-      <p:sp>
-        <p:nvSpPr>
-          <p:cNvPr id="37" name="Shape 35"/>
-          <p:cNvSpPr/>
-          <p:nvPr/>
-        </p:nvSpPr>
-        <p:spPr>
-          <a:xfrm>
-            <a:off x="4429658" y="4023360"/>
-            <a:ext cx="3332378" cy="0"/>
-          </a:xfrm>
-          <a:prstGeom prst="line">
-            <a:avLst/>
-          </a:prstGeom>
-          <a:noFill/>
-          <a:ln w="9525">
-            <a:solidFill>
-              <a:srgbClr val="D6D6D0"/>
-            </a:solidFill>
-            <a:prstDash val="solid"/>
-          </a:ln>
-        </p:spPr>
-      </p:sp>
-      <p:sp>
-        <p:nvSpPr>
-          <p:cNvPr id="38" name="Text 36"/>
-          <p:cNvSpPr/>
-          <p:nvPr/>
-        </p:nvSpPr>
-        <p:spPr>
-          <a:xfrm>
-            <a:off x="4429658" y="4142232"/>
-            <a:ext cx="3332378" cy="438912"/>
-          </a:xfrm>
-          <a:prstGeom prst="rect">
-            <a:avLst/>
-          </a:prstGeom>
-          <a:noFill/>
-          <a:ln/>
-        </p:spPr>
-        <p:txBody>
-          <a:bodyPr wrap="square" lIns="0" tIns="0" rIns="0" bIns="0" rtlCol="0" anchor="t">
-            <a:normAutofit/>
-          </a:bodyPr>
-          <a:lstStyle/>
-          <a:p>
-            <a:pPr indent="0" marL="0">
-              <a:buNone/>
-            </a:pPr>
-            <a:r>
-              <a:rPr lang="en-US" sz="1100" dirty="0">
-                <a:solidFill>
-                  <a:srgbClr val="1F5C3A"/>
-                </a:solidFill>
-                <a:latin typeface="Arial" pitchFamily="34" charset="0"/>
-                <a:ea typeface="Arial" pitchFamily="34" charset="-122"/>
-                <a:cs typeface="Arial" pitchFamily="34" charset="-120"/>
-              </a:rPr>
-              <a:t>■  </a:t>
-            </a:r>
-            <a:pPr indent="0" marL="0">
-              <a:buNone/>
-            </a:pPr>
-            <a:r>
-              <a:rPr lang="en-US" sz="1100" dirty="0">
-                <a:solidFill>
-                  <a:srgbClr val="1A1A1A"/>
-                </a:solidFill>
-                <a:latin typeface="Arial" pitchFamily="34" charset="0"/>
-                <a:ea typeface="Arial" pitchFamily="34" charset="-122"/>
-                <a:cs typeface="Arial" pitchFamily="34" charset="-120"/>
-              </a:rPr>
-              <a:t>P1 · Clinic Onboarding (3/3)</a:t>
-            </a:r>
-            <a:endParaRPr lang="en-US" sz="1100" dirty="0"/>
-          </a:p>
-        </p:txBody>
-      </p:sp>
-      <p:sp>
-        <p:nvSpPr>
-          <p:cNvPr id="39" name="Text 37"/>
-          <p:cNvSpPr/>
-          <p:nvPr/>
-        </p:nvSpPr>
-        <p:spPr>
-          <a:xfrm>
-            <a:off x="4429658" y="4581144"/>
-            <a:ext cx="3332378" cy="438912"/>
-          </a:xfrm>
-          <a:prstGeom prst="rect">
-            <a:avLst/>
-          </a:prstGeom>
-          <a:noFill/>
-          <a:ln/>
-        </p:spPr>
-        <p:txBody>
-          <a:bodyPr wrap="square" lIns="0" tIns="0" rIns="0" bIns="0" rtlCol="0" anchor="t">
-            <a:normAutofit/>
-          </a:bodyPr>
-          <a:lstStyle/>
-          <a:p>
-            <a:pPr indent="0" marL="0">
-              <a:buNone/>
-            </a:pPr>
-            <a:r>
-              <a:rPr lang="en-US" sz="1100" dirty="0">
-                <a:solidFill>
-                  <a:srgbClr val="1F5C3A"/>
-                </a:solidFill>
-                <a:latin typeface="Arial" pitchFamily="34" charset="0"/>
-                <a:ea typeface="Arial" pitchFamily="34" charset="-122"/>
-                <a:cs typeface="Arial" pitchFamily="34" charset="-120"/>
-              </a:rPr>
-              <a:t>■  </a:t>
-            </a:r>
-            <a:pPr indent="0" marL="0">
-              <a:buNone/>
-            </a:pPr>
-            <a:r>
-              <a:rPr lang="en-US" sz="1100" dirty="0">
-                <a:solidFill>
-                  <a:srgbClr val="1A1A1A"/>
-                </a:solidFill>
-                <a:latin typeface="Arial" pitchFamily="34" charset="0"/>
-                <a:ea typeface="Arial" pitchFamily="34" charset="-122"/>
-                <a:cs typeface="Arial" pitchFamily="34" charset="-120"/>
-              </a:rPr>
-              <a:t>P2 · Doctor Schedules (5/5)</a:t>
-            </a:r>
-            <a:endParaRPr lang="en-US" sz="1100" dirty="0"/>
-          </a:p>
-        </p:txBody>
-      </p:sp>
-      <p:sp>
-        <p:nvSpPr>
-          <p:cNvPr id="40" name="Text 38"/>
-          <p:cNvSpPr/>
-          <p:nvPr/>
-        </p:nvSpPr>
-        <p:spPr>
-          <a:xfrm>
-            <a:off x="4429658" y="5020056"/>
-            <a:ext cx="3332378" cy="438912"/>
-          </a:xfrm>
-          <a:prstGeom prst="rect">
-            <a:avLst/>
-          </a:prstGeom>
-          <a:noFill/>
-          <a:ln/>
-        </p:spPr>
-        <p:txBody>
-          <a:bodyPr wrap="square" lIns="0" tIns="0" rIns="0" bIns="0" rtlCol="0" anchor="t">
-            <a:normAutofit/>
-          </a:bodyPr>
-          <a:lstStyle/>
-          <a:p>
-            <a:pPr indent="0" marL="0">
-              <a:buNone/>
-            </a:pPr>
-            <a:r>
-              <a:rPr lang="en-US" sz="1100" dirty="0">
-                <a:solidFill>
-                  <a:srgbClr val="8DB39A"/>
-                </a:solidFill>
-                <a:latin typeface="Arial" pitchFamily="34" charset="0"/>
-                <a:ea typeface="Arial" pitchFamily="34" charset="-122"/>
-                <a:cs typeface="Arial" pitchFamily="34" charset="-120"/>
-              </a:rPr>
-              <a:t>■  </a:t>
-            </a:r>
-            <a:pPr indent="0" marL="0">
-              <a:buNone/>
-            </a:pPr>
-            <a:r>
-              <a:rPr lang="en-US" sz="1100" dirty="0">
-                <a:solidFill>
-                  <a:srgbClr val="1A1A1A"/>
-                </a:solidFill>
-                <a:latin typeface="Arial" pitchFamily="34" charset="0"/>
-                <a:ea typeface="Arial" pitchFamily="34" charset="-122"/>
-                <a:cs typeface="Arial" pitchFamily="34" charset="-120"/>
-              </a:rPr>
-              <a:t>P4 · Reminders, in review (5/5)</a:t>
-            </a:r>
-            <a:endParaRPr lang="en-US" sz="1100" dirty="0"/>
-          </a:p>
-        </p:txBody>
-      </p:sp>
-      <p:sp>
-        <p:nvSpPr>
-          <p:cNvPr id="41" name="Text 39"/>
-          <p:cNvSpPr/>
-          <p:nvPr/>
-        </p:nvSpPr>
-        <p:spPr>
-          <a:xfrm>
-            <a:off x="4429658" y="5458968"/>
-            <a:ext cx="3332378" cy="438912"/>
-          </a:xfrm>
-          <a:prstGeom prst="rect">
-            <a:avLst/>
-          </a:prstGeom>
-          <a:noFill/>
-          <a:ln/>
-        </p:spPr>
-        <p:txBody>
-          <a:bodyPr wrap="square" lIns="0" tIns="0" rIns="0" bIns="0" rtlCol="0" anchor="t">
-            <a:normAutofit/>
-          </a:bodyPr>
-          <a:lstStyle/>
-          <a:p>
-            <a:pPr indent="0" marL="0">
-              <a:buNone/>
-            </a:pPr>
-            <a:r>
-              <a:rPr lang="en-US" sz="1100" dirty="0">
-                <a:solidFill>
-                  <a:srgbClr val="8C8C86"/>
-                </a:solidFill>
-                <a:latin typeface="Arial" pitchFamily="34" charset="0"/>
-                <a:ea typeface="Arial" pitchFamily="34" charset="-122"/>
-                <a:cs typeface="Arial" pitchFamily="34" charset="-120"/>
-              </a:rPr>
-              <a:t>■  </a:t>
-            </a:r>
-            <a:pPr indent="0" marL="0">
-              <a:buNone/>
-            </a:pPr>
-            <a:r>
-              <a:rPr lang="en-US" sz="1100" dirty="0">
-                <a:solidFill>
-                  <a:srgbClr val="8C8C86"/>
-                </a:solidFill>
-                <a:latin typeface="Arial" pitchFamily="34" charset="0"/>
-                <a:ea typeface="Arial" pitchFamily="34" charset="-122"/>
-                <a:cs typeface="Arial" pitchFamily="34" charset="-120"/>
-              </a:rPr>
-              <a:t>P3 · Reports &amp; Exports (0/3)</a:t>
-            </a:r>
-            <a:endParaRPr lang="en-US" sz="1100" dirty="0"/>
-          </a:p>
-        </p:txBody>
-      </p:sp>
-      <p:sp>
-        <p:nvSpPr>
-          <p:cNvPr id="42" name="Shape 40"/>
-          <p:cNvSpPr/>
-          <p:nvPr/>
-        </p:nvSpPr>
-        <p:spPr>
-          <a:xfrm>
-            <a:off x="7990637" y="1920240"/>
-            <a:ext cx="0" cy="3977640"/>
-          </a:xfrm>
-          <a:prstGeom prst="line">
-            <a:avLst/>
-          </a:prstGeom>
-          <a:noFill/>
-          <a:ln w="9525">
-            <a:solidFill>
-              <a:srgbClr val="D6D6D0"/>
-            </a:solidFill>
-            <a:prstDash val="solid"/>
-          </a:ln>
-        </p:spPr>
-      </p:sp>
-      <p:sp>
-        <p:nvSpPr>
-          <p:cNvPr id="43" name="Shape 41"/>
-          <p:cNvSpPr/>
-          <p:nvPr/>
-        </p:nvSpPr>
-        <p:spPr>
-          <a:xfrm>
-            <a:off x="8219237" y="1783080"/>
-            <a:ext cx="3332378" cy="0"/>
-          </a:xfrm>
-          <a:prstGeom prst="line">
-            <a:avLst/>
-          </a:prstGeom>
-          <a:noFill/>
-          <a:ln w="25400">
-            <a:solidFill>
-              <a:srgbClr val="1A1A1A"/>
-            </a:solidFill>
-            <a:prstDash val="solid"/>
-          </a:ln>
-        </p:spPr>
-      </p:sp>
-      <p:sp>
-        <p:nvSpPr>
-          <p:cNvPr id="44" name="Text 42"/>
-          <p:cNvSpPr/>
-          <p:nvPr/>
-        </p:nvSpPr>
-        <p:spPr>
-          <a:xfrm>
-            <a:off x="8219237" y="1874520"/>
-            <a:ext cx="3332378" cy="411480"/>
-          </a:xfrm>
-          <a:prstGeom prst="rect">
-            <a:avLst/>
-          </a:prstGeom>
-          <a:noFill/>
-          <a:ln/>
-        </p:spPr>
-        <p:txBody>
-          <a:bodyPr wrap="square" lIns="0" tIns="0" rIns="0" bIns="0" rtlCol="0" anchor="ctr">
-            <a:normAutofit/>
-          </a:bodyPr>
-          <a:lstStyle/>
-          <a:p>
-            <a:pPr indent="0" marL="0">
-              <a:buNone/>
-            </a:pPr>
-            <a:r>
-              <a:rPr lang="en-US" sz="1800" dirty="0">
-                <a:solidFill>
-                  <a:srgbClr val="1A1A1A"/>
-                </a:solidFill>
-                <a:latin typeface="Georgia" pitchFamily="34" charset="0"/>
-                <a:ea typeface="Georgia" pitchFamily="34" charset="-122"/>
-                <a:cs typeface="Georgia" pitchFamily="34" charset="-120"/>
-              </a:rPr>
-              <a:t>Maya Lin @Maya</a:t>
-            </a:r>
-            <a:endParaRPr lang="en-US" sz="1800" dirty="0"/>
-          </a:p>
-        </p:txBody>
-      </p:sp>
-      <p:sp>
-        <p:nvSpPr>
-          <p:cNvPr id="45" name="Text 43"/>
-          <p:cNvSpPr/>
-          <p:nvPr/>
-        </p:nvSpPr>
-        <p:spPr>
-          <a:xfrm>
-            <a:off x="8219237" y="2286000"/>
-            <a:ext cx="3332378" cy="237744"/>
-          </a:xfrm>
-          <a:prstGeom prst="rect">
-            <a:avLst/>
-          </a:prstGeom>
-          <a:noFill/>
-          <a:ln/>
-        </p:spPr>
-        <p:txBody>
-          <a:bodyPr wrap="square" lIns="0" tIns="0" rIns="0" bIns="0" rtlCol="0" anchor="ctr">
-            <a:normAutofit/>
-          </a:bodyPr>
-          <a:lstStyle/>
-          <a:p>
-            <a:pPr indent="0" marL="0">
-              <a:buNone/>
-            </a:pPr>
-            <a:r>
-              <a:rPr lang="en-US" sz="1100" b="1" dirty="0">
-                <a:solidFill>
-                  <a:srgbClr val="1F5C3A"/>
-                </a:solidFill>
-                <a:latin typeface="Arial" pitchFamily="34" charset="0"/>
-                <a:ea typeface="Arial" pitchFamily="34" charset="-122"/>
-                <a:cs typeface="Arial" pitchFamily="34" charset="-120"/>
-              </a:rPr>
-              <a:t>PulseBoard · Analytics</a:t>
-            </a:r>
-            <a:endParaRPr lang="en-US" sz="1100" dirty="0"/>
-          </a:p>
-        </p:txBody>
-      </p:sp>
-      <p:sp>
-        <p:nvSpPr>
-          <p:cNvPr id="46" name="Text 44"/>
-          <p:cNvSpPr/>
-          <p:nvPr/>
-        </p:nvSpPr>
-        <p:spPr>
-          <a:xfrm>
-            <a:off x="8219237" y="2606040"/>
-            <a:ext cx="548640" cy="548640"/>
-          </a:xfrm>
-          <a:prstGeom prst="rect">
-            <a:avLst/>
-          </a:prstGeom>
-          <a:noFill/>
-          <a:ln/>
-        </p:spPr>
-        <p:txBody>
-          <a:bodyPr wrap="square" lIns="0" tIns="0" rIns="0" bIns="0" rtlCol="0" anchor="ctr"/>
-          <a:lstStyle/>
-          <a:p>
-            <a:pPr indent="0" marL="0">
-              <a:buNone/>
-            </a:pPr>
-            <a:r>
-              <a:rPr lang="en-US" sz="3200" dirty="0">
-                <a:solidFill>
-                  <a:srgbClr val="1A1A1A"/>
-                </a:solidFill>
-                <a:latin typeface="Georgia" pitchFamily="34" charset="0"/>
-                <a:ea typeface="Georgia" pitchFamily="34" charset="-122"/>
-                <a:cs typeface="Georgia" pitchFamily="34" charset="-120"/>
-              </a:rPr>
-              <a:t>5</a:t>
-            </a:r>
-            <a:endParaRPr lang="en-US" sz="3200" dirty="0"/>
-          </a:p>
-        </p:txBody>
-      </p:sp>
-      <p:sp>
-        <p:nvSpPr>
-          <p:cNvPr id="47" name="Text 45"/>
-          <p:cNvSpPr/>
-          <p:nvPr/>
-        </p:nvSpPr>
-        <p:spPr>
-          <a:xfrm>
-            <a:off x="8786165" y="2761488"/>
-            <a:ext cx="731520" cy="237744"/>
-          </a:xfrm>
-          <a:prstGeom prst="rect">
-            <a:avLst/>
-          </a:prstGeom>
-          <a:noFill/>
-          <a:ln/>
-        </p:spPr>
-        <p:txBody>
-          <a:bodyPr wrap="square" lIns="0" tIns="0" rIns="0" bIns="0" rtlCol="0" anchor="ctr"/>
-          <a:lstStyle/>
-          <a:p>
-            <a:pPr indent="0" marL="0">
-              <a:buNone/>
-            </a:pPr>
-            <a:r>
-              <a:rPr lang="en-US" sz="1100" b="1" dirty="0">
-                <a:solidFill>
-                  <a:srgbClr val="8C8C86"/>
-                </a:solidFill>
-                <a:latin typeface="Arial" pitchFamily="34" charset="0"/>
-                <a:ea typeface="Arial" pitchFamily="34" charset="-122"/>
-                <a:cs typeface="Arial" pitchFamily="34" charset="-120"/>
-              </a:rPr>
-              <a:t>Done</a:t>
-            </a:r>
-            <a:endParaRPr lang="en-US" sz="1100" dirty="0"/>
-          </a:p>
-        </p:txBody>
-      </p:sp>
-      <p:sp>
-        <p:nvSpPr>
-          <p:cNvPr id="48" name="Text 46"/>
-          <p:cNvSpPr/>
-          <p:nvPr/>
-        </p:nvSpPr>
-        <p:spPr>
-          <a:xfrm>
-            <a:off x="9545117" y="2606040"/>
-            <a:ext cx="548640" cy="548640"/>
-          </a:xfrm>
-          <a:prstGeom prst="rect">
-            <a:avLst/>
-          </a:prstGeom>
-          <a:noFill/>
-          <a:ln/>
-        </p:spPr>
-        <p:txBody>
-          <a:bodyPr wrap="square" lIns="0" tIns="0" rIns="0" bIns="0" rtlCol="0" anchor="ctr"/>
-          <a:lstStyle/>
-          <a:p>
-            <a:pPr indent="0" marL="0">
-              <a:buNone/>
-            </a:pPr>
-            <a:r>
-              <a:rPr lang="en-US" sz="3200" dirty="0">
-                <a:solidFill>
-                  <a:srgbClr val="1A1A1A"/>
-                </a:solidFill>
-                <a:latin typeface="Georgia" pitchFamily="34" charset="0"/>
-                <a:ea typeface="Georgia" pitchFamily="34" charset="-122"/>
-                <a:cs typeface="Georgia" pitchFamily="34" charset="-120"/>
-              </a:rPr>
-              <a:t>1</a:t>
-            </a:r>
-            <a:endParaRPr lang="en-US" sz="3200" dirty="0"/>
-          </a:p>
-        </p:txBody>
-      </p:sp>
-      <p:sp>
-        <p:nvSpPr>
-          <p:cNvPr id="49" name="Text 47"/>
-          <p:cNvSpPr/>
-          <p:nvPr/>
-        </p:nvSpPr>
-        <p:spPr>
-          <a:xfrm>
-            <a:off x="10112045" y="2761488"/>
-            <a:ext cx="731520" cy="237744"/>
-          </a:xfrm>
-          <a:prstGeom prst="rect">
-            <a:avLst/>
-          </a:prstGeom>
-          <a:noFill/>
-          <a:ln/>
-        </p:spPr>
-        <p:txBody>
-          <a:bodyPr wrap="square" lIns="0" tIns="0" rIns="0" bIns="0" rtlCol="0" anchor="ctr"/>
-          <a:lstStyle/>
-          <a:p>
-            <a:pPr indent="0" marL="0">
-              <a:buNone/>
-            </a:pPr>
-            <a:r>
-              <a:rPr lang="en-US" sz="1100" b="1" dirty="0">
-                <a:solidFill>
-                  <a:srgbClr val="8C8C86"/>
-                </a:solidFill>
-                <a:latin typeface="Arial" pitchFamily="34" charset="0"/>
-                <a:ea typeface="Arial" pitchFamily="34" charset="-122"/>
-                <a:cs typeface="Arial" pitchFamily="34" charset="-120"/>
-              </a:rPr>
-              <a:t>Open</a:t>
-            </a:r>
-            <a:endParaRPr lang="en-US" sz="1100" dirty="0"/>
-          </a:p>
-        </p:txBody>
-      </p:sp>
-      <p:sp>
-        <p:nvSpPr>
-          <p:cNvPr id="50" name="Text 48"/>
-          <p:cNvSpPr/>
-          <p:nvPr/>
-        </p:nvSpPr>
-        <p:spPr>
-          <a:xfrm>
-            <a:off x="10637215" y="2606040"/>
-            <a:ext cx="914400" cy="548640"/>
-          </a:xfrm>
-          <a:prstGeom prst="rect">
-            <a:avLst/>
-          </a:prstGeom>
-          <a:noFill/>
-          <a:ln/>
-        </p:spPr>
-        <p:txBody>
-          <a:bodyPr wrap="square" lIns="0" tIns="0" rIns="0" bIns="0" rtlCol="0" anchor="ctr"/>
-          <a:lstStyle/>
-          <a:p>
-            <a:pPr algn="r" indent="0" marL="0">
-              <a:buNone/>
-            </a:pPr>
-            <a:r>
-              <a:rPr lang="en-US" sz="2000" dirty="0">
-                <a:solidFill>
-                  <a:srgbClr val="1A1A1A"/>
-                </a:solidFill>
-                <a:latin typeface="Georgia" pitchFamily="34" charset="0"/>
-                <a:ea typeface="Georgia" pitchFamily="34" charset="-122"/>
-                <a:cs typeface="Georgia" pitchFamily="34" charset="-120"/>
-              </a:rPr>
-              <a:t>75%</a:t>
-            </a:r>
-            <a:endParaRPr lang="en-US" sz="2000" dirty="0"/>
-          </a:p>
-        </p:txBody>
-      </p:sp>
-      <p:sp>
-        <p:nvSpPr>
-          <p:cNvPr id="51" name="Shape 49"/>
-          <p:cNvSpPr/>
-          <p:nvPr/>
-        </p:nvSpPr>
-        <p:spPr>
-          <a:xfrm>
-            <a:off x="8219237" y="3246120"/>
-            <a:ext cx="3332378" cy="45720"/>
-          </a:xfrm>
-          <a:prstGeom prst="rect">
-            <a:avLst/>
-          </a:prstGeom>
-          <a:solidFill>
-            <a:srgbClr val="ECECE8"/>
-          </a:solidFill>
-          <a:ln/>
-        </p:spPr>
-      </p:sp>
-      <p:sp>
-        <p:nvSpPr>
-          <p:cNvPr id="52" name="Shape 50"/>
-          <p:cNvSpPr/>
-          <p:nvPr/>
-        </p:nvSpPr>
-        <p:spPr>
-          <a:xfrm>
-            <a:off x="8219237" y="3246120"/>
-            <a:ext cx="2499284" cy="45720"/>
-          </a:xfrm>
-          <a:prstGeom prst="rect">
-            <a:avLst/>
-          </a:prstGeom>
-          <a:solidFill>
-            <a:srgbClr val="8DB39A"/>
-          </a:solidFill>
-          <a:ln/>
-        </p:spPr>
-      </p:sp>
-      <p:sp>
-        <p:nvSpPr>
-          <p:cNvPr id="53" name="Text 51"/>
-          <p:cNvSpPr/>
-          <p:nvPr/>
-        </p:nvSpPr>
-        <p:spPr>
-          <a:xfrm>
-            <a:off x="8219237" y="3383280"/>
-            <a:ext cx="3332378" cy="594360"/>
-          </a:xfrm>
-          <a:prstGeom prst="rect">
-            <a:avLst/>
-          </a:prstGeom>
-          <a:noFill/>
-          <a:ln/>
-        </p:spPr>
-        <p:txBody>
-          <a:bodyPr wrap="square" lIns="0" tIns="0" rIns="0" bIns="0" rtlCol="0" anchor="t">
-            <a:normAutofit/>
-          </a:bodyPr>
-          <a:lstStyle/>
-          <a:p>
-            <a:pPr indent="0" marL="0">
-              <a:lnSpc>
-                <a:spcPct val="110000"/>
-              </a:lnSpc>
-              <a:buNone/>
-            </a:pPr>
-            <a:r>
-              <a:rPr lang="en-US" sz="1150" i="1" dirty="0">
-                <a:solidFill>
-                  <a:srgbClr val="4A4A46"/>
-                </a:solidFill>
-                <a:latin typeface="Georgia" pitchFamily="34" charset="0"/>
-                <a:ea typeface="Georgia" pitchFamily="34" charset="-122"/>
-                <a:cs typeface="Georgia" pitchFamily="34" charset="-120"/>
-              </a:rPr>
-              <a:t>Data transfer done; usage tracking rolling out.</a:t>
-            </a:r>
-            <a:endParaRPr lang="en-US" sz="1150" dirty="0"/>
-          </a:p>
-        </p:txBody>
-      </p:sp>
-      <p:sp>
-        <p:nvSpPr>
-          <p:cNvPr id="54" name="Shape 52"/>
-          <p:cNvSpPr/>
-          <p:nvPr/>
-        </p:nvSpPr>
-        <p:spPr>
-          <a:xfrm>
-            <a:off x="8219237" y="4023360"/>
-            <a:ext cx="3332378" cy="0"/>
-          </a:xfrm>
-          <a:prstGeom prst="line">
-            <a:avLst/>
-          </a:prstGeom>
-          <a:noFill/>
-          <a:ln w="9525">
-            <a:solidFill>
-              <a:srgbClr val="D6D6D0"/>
-            </a:solidFill>
-            <a:prstDash val="solid"/>
-          </a:ln>
-        </p:spPr>
-      </p:sp>
-      <p:sp>
-        <p:nvSpPr>
-          <p:cNvPr id="55" name="Text 53"/>
-          <p:cNvSpPr/>
-          <p:nvPr/>
-        </p:nvSpPr>
-        <p:spPr>
-          <a:xfrm>
-            <a:off x="8219237" y="4142232"/>
-            <a:ext cx="3332378" cy="438912"/>
-          </a:xfrm>
-          <a:prstGeom prst="rect">
-            <a:avLst/>
-          </a:prstGeom>
-          <a:noFill/>
-          <a:ln/>
-        </p:spPr>
-        <p:txBody>
-          <a:bodyPr wrap="square" lIns="0" tIns="0" rIns="0" bIns="0" rtlCol="0" anchor="t">
-            <a:normAutofit/>
-          </a:bodyPr>
-          <a:lstStyle/>
-          <a:p>
-            <a:pPr indent="0" marL="0">
-              <a:buNone/>
-            </a:pPr>
-            <a:r>
-              <a:rPr lang="en-US" sz="1100" dirty="0">
-                <a:solidFill>
-                  <a:srgbClr val="1F5C3A"/>
-                </a:solidFill>
-                <a:latin typeface="Arial" pitchFamily="34" charset="0"/>
-                <a:ea typeface="Arial" pitchFamily="34" charset="-122"/>
-                <a:cs typeface="Arial" pitchFamily="34" charset="-120"/>
-              </a:rPr>
-              <a:t>■  </a:t>
-            </a:r>
-            <a:pPr indent="0" marL="0">
-              <a:buNone/>
-            </a:pPr>
-            <a:r>
-              <a:rPr lang="en-US" sz="1100" dirty="0">
-                <a:solidFill>
-                  <a:srgbClr val="1A1A1A"/>
-                </a:solidFill>
-                <a:latin typeface="Arial" pitchFamily="34" charset="0"/>
-                <a:ea typeface="Arial" pitchFamily="34" charset="-122"/>
-                <a:cs typeface="Arial" pitchFamily="34" charset="-120"/>
-              </a:rPr>
-              <a:t>Data transfer to new system</a:t>
-            </a:r>
-            <a:endParaRPr lang="en-US" sz="1100" dirty="0"/>
-          </a:p>
-        </p:txBody>
-      </p:sp>
-      <p:sp>
-        <p:nvSpPr>
-          <p:cNvPr id="56" name="Text 54"/>
-          <p:cNvSpPr/>
-          <p:nvPr/>
-        </p:nvSpPr>
-        <p:spPr>
-          <a:xfrm>
-            <a:off x="8219237" y="4581144"/>
-            <a:ext cx="3332378" cy="438912"/>
-          </a:xfrm>
-          <a:prstGeom prst="rect">
-            <a:avLst/>
-          </a:prstGeom>
-          <a:noFill/>
-          <a:ln/>
-        </p:spPr>
-        <p:txBody>
-          <a:bodyPr wrap="square" lIns="0" tIns="0" rIns="0" bIns="0" rtlCol="0" anchor="t">
-            <a:normAutofit/>
-          </a:bodyPr>
-          <a:lstStyle/>
-          <a:p>
-            <a:pPr indent="0" marL="0">
-              <a:buNone/>
-            </a:pPr>
-            <a:r>
-              <a:rPr lang="en-US" sz="1100" dirty="0">
-                <a:solidFill>
-                  <a:srgbClr val="1F5C3A"/>
-                </a:solidFill>
-                <a:latin typeface="Arial" pitchFamily="34" charset="0"/>
-                <a:ea typeface="Arial" pitchFamily="34" charset="-122"/>
-                <a:cs typeface="Arial" pitchFamily="34" charset="-120"/>
-              </a:rPr>
-              <a:t>■  </a:t>
-            </a:r>
-            <a:pPr indent="0" marL="0">
-              <a:buNone/>
-            </a:pPr>
-            <a:r>
-              <a:rPr lang="en-US" sz="1100" dirty="0">
-                <a:solidFill>
-                  <a:srgbClr val="1A1A1A"/>
-                </a:solidFill>
-                <a:latin typeface="Arial" pitchFamily="34" charset="0"/>
-                <a:ea typeface="Arial" pitchFamily="34" charset="-122"/>
-                <a:cs typeface="Arial" pitchFamily="34" charset="-120"/>
-              </a:rPr>
-              <a:t>Event plan agreed</a:t>
-            </a:r>
-            <a:endParaRPr lang="en-US" sz="1100" dirty="0"/>
-          </a:p>
-        </p:txBody>
-      </p:sp>
-      <p:sp>
-        <p:nvSpPr>
-          <p:cNvPr id="57" name="Text 55"/>
-          <p:cNvSpPr/>
-          <p:nvPr/>
-        </p:nvSpPr>
-        <p:spPr>
-          <a:xfrm>
-            <a:off x="8219237" y="5020056"/>
-            <a:ext cx="3332378" cy="438912"/>
-          </a:xfrm>
-          <a:prstGeom prst="rect">
-            <a:avLst/>
-          </a:prstGeom>
-          <a:noFill/>
-          <a:ln/>
-        </p:spPr>
-        <p:txBody>
-          <a:bodyPr wrap="square" lIns="0" tIns="0" rIns="0" bIns="0" rtlCol="0" anchor="t">
-            <a:normAutofit/>
-          </a:bodyPr>
-          <a:lstStyle/>
-          <a:p>
-            <a:pPr indent="0" marL="0">
-              <a:buNone/>
-            </a:pPr>
-            <a:r>
-              <a:rPr lang="en-US" sz="1100" dirty="0">
-                <a:solidFill>
-                  <a:srgbClr val="8DB39A"/>
-                </a:solidFill>
-                <a:latin typeface="Arial" pitchFamily="34" charset="0"/>
-                <a:ea typeface="Arial" pitchFamily="34" charset="-122"/>
-                <a:cs typeface="Arial" pitchFamily="34" charset="-120"/>
-              </a:rPr>
-              <a:t>■  </a:t>
-            </a:r>
-            <a:pPr indent="0" marL="0">
-              <a:buNone/>
-            </a:pPr>
-            <a:r>
-              <a:rPr lang="en-US" sz="1100" dirty="0">
-                <a:solidFill>
-                  <a:srgbClr val="1A1A1A"/>
-                </a:solidFill>
-                <a:latin typeface="Arial" pitchFamily="34" charset="0"/>
-                <a:ea typeface="Arial" pitchFamily="34" charset="-122"/>
-                <a:cs typeface="Arial" pitchFamily="34" charset="-120"/>
-              </a:rPr>
-              <a:t>Usage tracking rollout</a:t>
-            </a:r>
-            <a:endParaRPr lang="en-US" sz="1100" dirty="0"/>
-          </a:p>
-        </p:txBody>
-      </p:sp>
-      <p:sp>
-        <p:nvSpPr>
-          <p:cNvPr id="58" name="Text 56"/>
-          <p:cNvSpPr/>
-          <p:nvPr/>
-        </p:nvSpPr>
-        <p:spPr>
-          <a:xfrm>
-            <a:off x="8219237" y="5458968"/>
-            <a:ext cx="3332378" cy="438912"/>
-          </a:xfrm>
-          <a:prstGeom prst="rect">
-            <a:avLst/>
-          </a:prstGeom>
-          <a:noFill/>
-          <a:ln/>
-        </p:spPr>
-        <p:txBody>
-          <a:bodyPr wrap="square" lIns="0" tIns="0" rIns="0" bIns="0" rtlCol="0" anchor="t">
-            <a:normAutofit/>
-          </a:bodyPr>
-          <a:lstStyle/>
-          <a:p>
-            <a:pPr indent="0" marL="0">
-              <a:buNone/>
-            </a:pPr>
-            <a:r>
-              <a:rPr lang="en-US" sz="1100" dirty="0">
-                <a:solidFill>
-                  <a:srgbClr val="1F5C3A"/>
-                </a:solidFill>
-                <a:latin typeface="Arial" pitchFamily="34" charset="0"/>
-                <a:ea typeface="Arial" pitchFamily="34" charset="-122"/>
-                <a:cs typeface="Arial" pitchFamily="34" charset="-120"/>
-              </a:rPr>
-              <a:t>■  </a:t>
-            </a:r>
-            <a:pPr indent="0" marL="0">
-              <a:buNone/>
-            </a:pPr>
-            <a:r>
-              <a:rPr lang="en-US" sz="1100" dirty="0">
-                <a:solidFill>
-                  <a:srgbClr val="1A1A1A"/>
-                </a:solidFill>
-                <a:latin typeface="Arial" pitchFamily="34" charset="0"/>
-                <a:ea typeface="Arial" pitchFamily="34" charset="-122"/>
-                <a:cs typeface="Arial" pitchFamily="34" charset="-120"/>
-              </a:rPr>
-              <a:t>Code reviews, 3 features</a:t>
-            </a:r>
-            <a:endParaRPr lang="en-US" sz="1100" dirty="0"/>
-          </a:p>
-        </p:txBody>
-      </p:sp>
-      <p:sp>
-        <p:nvSpPr>
-          <p:cNvPr id="59" name="Text 57"/>
-          <p:cNvSpPr/>
-          <p:nvPr/>
-        </p:nvSpPr>
-        <p:spPr>
-          <a:xfrm>
-            <a:off x="640080" y="5989320"/>
-            <a:ext cx="10911535" cy="274320"/>
-          </a:xfrm>
-          <a:prstGeom prst="rect">
-            <a:avLst/>
-          </a:prstGeom>
-          <a:noFill/>
-          <a:ln/>
-        </p:spPr>
-        <p:txBody>
-          <a:bodyPr wrap="square" lIns="0" tIns="0" rIns="0" bIns="0" rtlCol="0" anchor="ctr"/>
-          <a:lstStyle/>
-          <a:p>
-            <a:pPr indent="0" marL="0">
-              <a:buNone/>
-            </a:pPr>
-            <a:r>
-              <a:rPr lang="en-US" sz="1100" i="1" dirty="0">
-                <a:solidFill>
-                  <a:srgbClr val="8C8C86"/>
-                </a:solidFill>
-                <a:latin typeface="Georgia" pitchFamily="34" charset="0"/>
-                <a:ea typeface="Georgia" pitchFamily="34" charset="-122"/>
-                <a:cs typeface="Georgia" pitchFamily="34" charset="-120"/>
-              </a:rPr>
-              <a:t>Done/Open = planned tasks this week; work in review stays open until approved.</a:t>
-            </a:r>
-            <a:endParaRPr lang="en-US" sz="1100" dirty="0"/>
+              <a:t>Options: allow opt-out · clinic decides per patient · keep as today</a:t>
+            </a:r>
+            <a:endParaRPr lang="en-US" sz="1500" dirty="0"/>
           </a:p>
         </p:txBody>
       </p:sp>
@@ -13830,7 +14126,7 @@
                 <a:ea typeface="Arial" pitchFamily="34" charset="-122"/>
                 <a:cs typeface="Arial" pitchFamily="34" charset="-120"/>
               </a:rPr>
-              <a:t>Engineering Activity · GitHub</a:t>
+              <a:t>Team · Task Tracker</a:t>
             </a:r>
             <a:endParaRPr lang="en-US" sz="1100" dirty="0"/>
           </a:p>
@@ -13871,7 +14167,7 @@
                 <a:ea typeface="Georgia" pitchFamily="34" charset="-122"/>
                 <a:cs typeface="Georgia" pitchFamily="34" charset="-120"/>
               </a:rPr>
-              <a:t>Team Delivery Activity This Week</a:t>
+              <a:t>Developer Task Track</a:t>
             </a:r>
             <a:endParaRPr lang="en-US" sz="2800" dirty="0"/>
           </a:p>
@@ -13909,7 +14205,7 @@
         <p:spPr>
           <a:xfrm>
             <a:off x="640080" y="1783080"/>
-            <a:ext cx="2743200" cy="0"/>
+            <a:ext cx="3332378" cy="0"/>
           </a:xfrm>
           <a:prstGeom prst="line">
             <a:avLst/>
@@ -13932,85 +14228,368 @@
         <p:spPr>
           <a:xfrm>
             <a:off x="640080" y="1874520"/>
-            <a:ext cx="2743200" cy="821436"/>
-          </a:xfrm>
-          <a:prstGeom prst="rect">
-            <a:avLst/>
-          </a:prstGeom>
-          <a:noFill/>
-          <a:ln/>
-        </p:spPr>
-        <p:txBody>
-          <a:bodyPr wrap="square" lIns="0" tIns="0" rIns="0" bIns="0" rtlCol="0" anchor="b"/>
-          <a:lstStyle/>
-          <a:p>
-            <a:pPr indent="0" marL="0">
-              <a:buNone/>
-            </a:pPr>
-            <a:r>
-              <a:rPr lang="en-US" sz="4400" dirty="0">
-                <a:solidFill>
-                  <a:srgbClr val="1F5C3A"/>
+            <a:ext cx="3332378" cy="411480"/>
+          </a:xfrm>
+          <a:prstGeom prst="rect">
+            <a:avLst/>
+          </a:prstGeom>
+          <a:noFill/>
+          <a:ln/>
+        </p:spPr>
+        <p:txBody>
+          <a:bodyPr wrap="square" lIns="0" tIns="0" rIns="0" bIns="0" rtlCol="0" anchor="ctr">
+            <a:normAutofit/>
+          </a:bodyPr>
+          <a:lstStyle/>
+          <a:p>
+            <a:pPr indent="0" marL="0">
+              <a:buNone/>
+            </a:pPr>
+            <a:r>
+              <a:rPr lang="en-US" sz="1800" dirty="0">
+                <a:solidFill>
+                  <a:srgbClr val="1A1A1A"/>
                 </a:solidFill>
                 <a:latin typeface="Georgia" pitchFamily="34" charset="0"/>
                 <a:ea typeface="Georgia" pitchFamily="34" charset="-122"/>
                 <a:cs typeface="Georgia" pitchFamily="34" charset="-120"/>
               </a:rPr>
+              <a:t>Leo Park @Leo</a:t>
+            </a:r>
+            <a:endParaRPr lang="en-US" sz="1800" dirty="0"/>
+          </a:p>
+        </p:txBody>
+      </p:sp>
+      <p:sp>
+        <p:nvSpPr>
+          <p:cNvPr id="11" name="Text 9"/>
+          <p:cNvSpPr/>
+          <p:nvPr/>
+        </p:nvSpPr>
+        <p:spPr>
+          <a:xfrm>
+            <a:off x="640080" y="2286000"/>
+            <a:ext cx="3332378" cy="237744"/>
+          </a:xfrm>
+          <a:prstGeom prst="rect">
+            <a:avLst/>
+          </a:prstGeom>
+          <a:noFill/>
+          <a:ln/>
+        </p:spPr>
+        <p:txBody>
+          <a:bodyPr wrap="square" lIns="0" tIns="0" rIns="0" bIns="0" rtlCol="0" anchor="ctr">
+            <a:normAutofit/>
+          </a:bodyPr>
+          <a:lstStyle/>
+          <a:p>
+            <a:pPr indent="0" marL="0">
+              <a:buNone/>
+            </a:pPr>
+            <a:r>
+              <a:rPr lang="en-US" sz="1100" b="1" dirty="0">
+                <a:solidFill>
+                  <a:srgbClr val="1F5C3A"/>
+                </a:solidFill>
+                <a:latin typeface="Arial" pitchFamily="34" charset="0"/>
+                <a:ea typeface="Arial" pitchFamily="34" charset="-122"/>
+                <a:cs typeface="Arial" pitchFamily="34" charset="-120"/>
+              </a:rPr>
+              <a:t>ClinicBook · Patient App</a:t>
+            </a:r>
+            <a:endParaRPr lang="en-US" sz="1100" dirty="0"/>
+          </a:p>
+        </p:txBody>
+      </p:sp>
+      <p:sp>
+        <p:nvSpPr>
+          <p:cNvPr id="12" name="Text 10"/>
+          <p:cNvSpPr/>
+          <p:nvPr/>
+        </p:nvSpPr>
+        <p:spPr>
+          <a:xfrm>
+            <a:off x="640080" y="2606040"/>
+            <a:ext cx="548640" cy="548640"/>
+          </a:xfrm>
+          <a:prstGeom prst="rect">
+            <a:avLst/>
+          </a:prstGeom>
+          <a:noFill/>
+          <a:ln/>
+        </p:spPr>
+        <p:txBody>
+          <a:bodyPr wrap="square" lIns="0" tIns="0" rIns="0" bIns="0" rtlCol="0" anchor="ctr"/>
+          <a:lstStyle/>
+          <a:p>
+            <a:pPr indent="0" marL="0">
+              <a:buNone/>
+            </a:pPr>
+            <a:r>
+              <a:rPr lang="en-US" sz="3200" dirty="0">
+                <a:solidFill>
+                  <a:srgbClr val="1A1A1A"/>
+                </a:solidFill>
+                <a:latin typeface="Georgia" pitchFamily="34" charset="0"/>
+                <a:ea typeface="Georgia" pitchFamily="34" charset="-122"/>
+                <a:cs typeface="Georgia" pitchFamily="34" charset="-120"/>
+              </a:rPr>
               <a:t>3</a:t>
             </a:r>
-            <a:endParaRPr lang="en-US" sz="4400" dirty="0"/>
-          </a:p>
-        </p:txBody>
-      </p:sp>
-      <p:sp>
-        <p:nvSpPr>
-          <p:cNvPr id="11" name="Text 9"/>
-          <p:cNvSpPr/>
-          <p:nvPr/>
-        </p:nvSpPr>
-        <p:spPr>
-          <a:xfrm>
-            <a:off x="640080" y="2725826"/>
-            <a:ext cx="2743200" cy="522732"/>
-          </a:xfrm>
-          <a:prstGeom prst="rect">
-            <a:avLst/>
-          </a:prstGeom>
-          <a:noFill/>
-          <a:ln/>
-        </p:spPr>
-        <p:txBody>
-          <a:bodyPr wrap="square" lIns="0" tIns="0" rIns="0" bIns="0" rtlCol="0" anchor="t"/>
-          <a:lstStyle/>
-          <a:p>
-            <a:pPr indent="0" marL="0">
-              <a:buNone/>
-            </a:pPr>
-            <a:r>
-              <a:rPr lang="en-US" sz="1200" dirty="0">
+            <a:endParaRPr lang="en-US" sz="3200" dirty="0"/>
+          </a:p>
+        </p:txBody>
+      </p:sp>
+      <p:sp>
+        <p:nvSpPr>
+          <p:cNvPr id="13" name="Text 11"/>
+          <p:cNvSpPr/>
+          <p:nvPr/>
+        </p:nvSpPr>
+        <p:spPr>
+          <a:xfrm>
+            <a:off x="1207008" y="2761488"/>
+            <a:ext cx="731520" cy="237744"/>
+          </a:xfrm>
+          <a:prstGeom prst="rect">
+            <a:avLst/>
+          </a:prstGeom>
+          <a:noFill/>
+          <a:ln/>
+        </p:spPr>
+        <p:txBody>
+          <a:bodyPr wrap="square" lIns="0" tIns="0" rIns="0" bIns="0" rtlCol="0" anchor="ctr"/>
+          <a:lstStyle/>
+          <a:p>
+            <a:pPr indent="0" marL="0">
+              <a:buNone/>
+            </a:pPr>
+            <a:r>
+              <a:rPr lang="en-US" sz="1100" b="1" dirty="0">
+                <a:solidFill>
+                  <a:srgbClr val="8C8C86"/>
+                </a:solidFill>
+                <a:latin typeface="Arial" pitchFamily="34" charset="0"/>
+                <a:ea typeface="Arial" pitchFamily="34" charset="-122"/>
+                <a:cs typeface="Arial" pitchFamily="34" charset="-120"/>
+              </a:rPr>
+              <a:t>Done</a:t>
+            </a:r>
+            <a:endParaRPr lang="en-US" sz="1100" dirty="0"/>
+          </a:p>
+        </p:txBody>
+      </p:sp>
+      <p:sp>
+        <p:nvSpPr>
+          <p:cNvPr id="14" name="Text 12"/>
+          <p:cNvSpPr/>
+          <p:nvPr/>
+        </p:nvSpPr>
+        <p:spPr>
+          <a:xfrm>
+            <a:off x="1965960" y="2606040"/>
+            <a:ext cx="548640" cy="548640"/>
+          </a:xfrm>
+          <a:prstGeom prst="rect">
+            <a:avLst/>
+          </a:prstGeom>
+          <a:noFill/>
+          <a:ln/>
+        </p:spPr>
+        <p:txBody>
+          <a:bodyPr wrap="square" lIns="0" tIns="0" rIns="0" bIns="0" rtlCol="0" anchor="ctr"/>
+          <a:lstStyle/>
+          <a:p>
+            <a:pPr indent="0" marL="0">
+              <a:buNone/>
+            </a:pPr>
+            <a:r>
+              <a:rPr lang="en-US" sz="3200" dirty="0">
+                <a:solidFill>
+                  <a:srgbClr val="1A1A1A"/>
+                </a:solidFill>
+                <a:latin typeface="Georgia" pitchFamily="34" charset="0"/>
+                <a:ea typeface="Georgia" pitchFamily="34" charset="-122"/>
+                <a:cs typeface="Georgia" pitchFamily="34" charset="-120"/>
+              </a:rPr>
+              <a:t>2</a:t>
+            </a:r>
+            <a:endParaRPr lang="en-US" sz="3200" dirty="0"/>
+          </a:p>
+        </p:txBody>
+      </p:sp>
+      <p:sp>
+        <p:nvSpPr>
+          <p:cNvPr id="15" name="Text 13"/>
+          <p:cNvSpPr/>
+          <p:nvPr/>
+        </p:nvSpPr>
+        <p:spPr>
+          <a:xfrm>
+            <a:off x="2532888" y="2761488"/>
+            <a:ext cx="731520" cy="237744"/>
+          </a:xfrm>
+          <a:prstGeom prst="rect">
+            <a:avLst/>
+          </a:prstGeom>
+          <a:noFill/>
+          <a:ln/>
+        </p:spPr>
+        <p:txBody>
+          <a:bodyPr wrap="square" lIns="0" tIns="0" rIns="0" bIns="0" rtlCol="0" anchor="ctr"/>
+          <a:lstStyle/>
+          <a:p>
+            <a:pPr indent="0" marL="0">
+              <a:buNone/>
+            </a:pPr>
+            <a:r>
+              <a:rPr lang="en-US" sz="1100" b="1" dirty="0">
+                <a:solidFill>
+                  <a:srgbClr val="8C8C86"/>
+                </a:solidFill>
+                <a:latin typeface="Arial" pitchFamily="34" charset="0"/>
+                <a:ea typeface="Arial" pitchFamily="34" charset="-122"/>
+                <a:cs typeface="Arial" pitchFamily="34" charset="-120"/>
+              </a:rPr>
+              <a:t>Open</a:t>
+            </a:r>
+            <a:endParaRPr lang="en-US" sz="1100" dirty="0"/>
+          </a:p>
+        </p:txBody>
+      </p:sp>
+      <p:sp>
+        <p:nvSpPr>
+          <p:cNvPr id="16" name="Text 14"/>
+          <p:cNvSpPr/>
+          <p:nvPr/>
+        </p:nvSpPr>
+        <p:spPr>
+          <a:xfrm>
+            <a:off x="3058058" y="2606040"/>
+            <a:ext cx="914400" cy="548640"/>
+          </a:xfrm>
+          <a:prstGeom prst="rect">
+            <a:avLst/>
+          </a:prstGeom>
+          <a:noFill/>
+          <a:ln/>
+        </p:spPr>
+        <p:txBody>
+          <a:bodyPr wrap="square" lIns="0" tIns="0" rIns="0" bIns="0" rtlCol="0" anchor="ctr"/>
+          <a:lstStyle/>
+          <a:p>
+            <a:pPr algn="r" indent="0" marL="0">
+              <a:buNone/>
+            </a:pPr>
+            <a:r>
+              <a:rPr lang="en-US" sz="2000" dirty="0">
+                <a:solidFill>
+                  <a:srgbClr val="1A1A1A"/>
+                </a:solidFill>
+                <a:latin typeface="Georgia" pitchFamily="34" charset="0"/>
+                <a:ea typeface="Georgia" pitchFamily="34" charset="-122"/>
+                <a:cs typeface="Georgia" pitchFamily="34" charset="-120"/>
+              </a:rPr>
+              <a:t>60%</a:t>
+            </a:r>
+            <a:endParaRPr lang="en-US" sz="2000" dirty="0"/>
+          </a:p>
+        </p:txBody>
+      </p:sp>
+      <p:sp>
+        <p:nvSpPr>
+          <p:cNvPr id="17" name="Shape 15"/>
+          <p:cNvSpPr/>
+          <p:nvPr/>
+        </p:nvSpPr>
+        <p:spPr>
+          <a:xfrm>
+            <a:off x="640080" y="3246120"/>
+            <a:ext cx="3332378" cy="45720"/>
+          </a:xfrm>
+          <a:prstGeom prst="rect">
+            <a:avLst/>
+          </a:prstGeom>
+          <a:solidFill>
+            <a:srgbClr val="ECECE8"/>
+          </a:solidFill>
+          <a:ln/>
+        </p:spPr>
+      </p:sp>
+      <p:sp>
+        <p:nvSpPr>
+          <p:cNvPr id="18" name="Shape 16"/>
+          <p:cNvSpPr/>
+          <p:nvPr/>
+        </p:nvSpPr>
+        <p:spPr>
+          <a:xfrm>
+            <a:off x="640080" y="3246120"/>
+            <a:ext cx="1999427" cy="45720"/>
+          </a:xfrm>
+          <a:prstGeom prst="rect">
+            <a:avLst/>
+          </a:prstGeom>
+          <a:solidFill>
+            <a:srgbClr val="8DB39A"/>
+          </a:solidFill>
+          <a:ln/>
+        </p:spPr>
+      </p:sp>
+      <p:sp>
+        <p:nvSpPr>
+          <p:cNvPr id="19" name="Text 17"/>
+          <p:cNvSpPr/>
+          <p:nvPr/>
+        </p:nvSpPr>
+        <p:spPr>
+          <a:xfrm>
+            <a:off x="640080" y="3383280"/>
+            <a:ext cx="3332378" cy="594360"/>
+          </a:xfrm>
+          <a:prstGeom prst="rect">
+            <a:avLst/>
+          </a:prstGeom>
+          <a:noFill/>
+          <a:ln/>
+        </p:spPr>
+        <p:txBody>
+          <a:bodyPr wrap="square" lIns="0" tIns="0" rIns="0" bIns="0" rtlCol="0" anchor="t">
+            <a:normAutofit/>
+          </a:bodyPr>
+          <a:lstStyle/>
+          <a:p>
+            <a:pPr indent="0" marL="0">
+              <a:lnSpc>
+                <a:spcPct val="110000"/>
+              </a:lnSpc>
+              <a:buNone/>
+            </a:pPr>
+            <a:r>
+              <a:rPr lang="en-US" sz="1150" i="1" dirty="0">
                 <a:solidFill>
                   <a:srgbClr val="4A4A46"/>
                 </a:solidFill>
-                <a:latin typeface="Arial" pitchFamily="34" charset="0"/>
-                <a:ea typeface="Arial" pitchFamily="34" charset="-122"/>
-                <a:cs typeface="Arial" pitchFamily="34" charset="-120"/>
-              </a:rPr>
-              <a:t>Features approved</a:t>
-            </a:r>
-            <a:endParaRPr lang="en-US" sz="1200" dirty="0"/>
-          </a:p>
-        </p:txBody>
-      </p:sp>
-      <p:sp>
-        <p:nvSpPr>
-          <p:cNvPr id="12" name="Shape 10"/>
-          <p:cNvSpPr/>
-          <p:nvPr/>
-        </p:nvSpPr>
-        <p:spPr>
-          <a:xfrm>
-            <a:off x="640080" y="3276600"/>
-            <a:ext cx="2743200" cy="0"/>
+                <a:latin typeface="Georgia" pitchFamily="34" charset="0"/>
+                <a:ea typeface="Georgia" pitchFamily="34" charset="-122"/>
+                <a:cs typeface="Georgia" pitchFamily="34" charset="-120"/>
+              </a:rPr>
+              <a:t>Sign-in and clinic search done; booking calendar in progress.</a:t>
+            </a:r>
+            <a:endParaRPr lang="en-US" sz="1150" dirty="0"/>
+          </a:p>
+        </p:txBody>
+      </p:sp>
+      <p:sp>
+        <p:nvSpPr>
+          <p:cNvPr id="20" name="Shape 18"/>
+          <p:cNvSpPr/>
+          <p:nvPr/>
+        </p:nvSpPr>
+        <p:spPr>
+          <a:xfrm>
+            <a:off x="640080" y="4023360"/>
+            <a:ext cx="3332378" cy="0"/>
           </a:xfrm>
           <a:prstGeom prst="line">
             <a:avLst/>
@@ -14026,92 +14605,234 @@
       </p:sp>
       <p:sp>
         <p:nvSpPr>
-          <p:cNvPr id="13" name="Text 11"/>
-          <p:cNvSpPr/>
-          <p:nvPr/>
-        </p:nvSpPr>
-        <p:spPr>
-          <a:xfrm>
-            <a:off x="640080" y="3368040"/>
-            <a:ext cx="2743200" cy="821436"/>
-          </a:xfrm>
-          <a:prstGeom prst="rect">
-            <a:avLst/>
-          </a:prstGeom>
-          <a:noFill/>
-          <a:ln/>
-        </p:spPr>
-        <p:txBody>
-          <a:bodyPr wrap="square" lIns="0" tIns="0" rIns="0" bIns="0" rtlCol="0" anchor="b"/>
-          <a:lstStyle/>
-          <a:p>
-            <a:pPr indent="0" marL="0">
-              <a:buNone/>
-            </a:pPr>
-            <a:r>
-              <a:rPr lang="en-US" sz="4400" dirty="0">
+          <p:cNvPr id="21" name="Text 19"/>
+          <p:cNvSpPr/>
+          <p:nvPr/>
+        </p:nvSpPr>
+        <p:spPr>
+          <a:xfrm>
+            <a:off x="640080" y="4142232"/>
+            <a:ext cx="3332378" cy="438912"/>
+          </a:xfrm>
+          <a:prstGeom prst="rect">
+            <a:avLst/>
+          </a:prstGeom>
+          <a:noFill/>
+          <a:ln/>
+        </p:spPr>
+        <p:txBody>
+          <a:bodyPr wrap="square" lIns="0" tIns="0" rIns="0" bIns="0" rtlCol="0" anchor="t">
+            <a:normAutofit/>
+          </a:bodyPr>
+          <a:lstStyle/>
+          <a:p>
+            <a:pPr indent="0" marL="0">
+              <a:buNone/>
+            </a:pPr>
+            <a:r>
+              <a:rPr lang="en-US" sz="1100" dirty="0">
+                <a:solidFill>
+                  <a:srgbClr val="1F5C3A"/>
+                </a:solidFill>
+                <a:latin typeface="Arial" pitchFamily="34" charset="0"/>
+                <a:ea typeface="Arial" pitchFamily="34" charset="-122"/>
+                <a:cs typeface="Arial" pitchFamily="34" charset="-120"/>
+              </a:rPr>
+              <a:t>■  </a:t>
+            </a:r>
+            <a:pPr indent="0" marL="0">
+              <a:buNone/>
+            </a:pPr>
+            <a:r>
+              <a:rPr lang="en-US" sz="1100" dirty="0">
                 <a:solidFill>
                   <a:srgbClr val="1A1A1A"/>
                 </a:solidFill>
-                <a:latin typeface="Georgia" pitchFamily="34" charset="0"/>
-                <a:ea typeface="Georgia" pitchFamily="34" charset="-122"/>
-                <a:cs typeface="Georgia" pitchFamily="34" charset="-120"/>
-              </a:rPr>
-              <a:t>2</a:t>
-            </a:r>
-            <a:endParaRPr lang="en-US" sz="4400" dirty="0"/>
-          </a:p>
-        </p:txBody>
-      </p:sp>
-      <p:sp>
-        <p:nvSpPr>
-          <p:cNvPr id="14" name="Text 12"/>
-          <p:cNvSpPr/>
-          <p:nvPr/>
-        </p:nvSpPr>
-        <p:spPr>
-          <a:xfrm>
-            <a:off x="640080" y="4219346"/>
-            <a:ext cx="2743200" cy="522732"/>
-          </a:xfrm>
-          <a:prstGeom prst="rect">
-            <a:avLst/>
-          </a:prstGeom>
-          <a:noFill/>
-          <a:ln/>
-        </p:spPr>
-        <p:txBody>
-          <a:bodyPr wrap="square" lIns="0" tIns="0" rIns="0" bIns="0" rtlCol="0" anchor="t"/>
-          <a:lstStyle/>
-          <a:p>
-            <a:pPr indent="0" marL="0">
-              <a:buNone/>
-            </a:pPr>
-            <a:r>
-              <a:rPr lang="en-US" sz="1200" dirty="0">
-                <a:solidFill>
-                  <a:srgbClr val="4A4A46"/>
-                </a:solidFill>
-                <a:latin typeface="Arial" pitchFamily="34" charset="0"/>
-                <a:ea typeface="Arial" pitchFamily="34" charset="-122"/>
-                <a:cs typeface="Arial" pitchFamily="34" charset="-120"/>
-              </a:rPr>
-              <a:t>In final review</a:t>
-            </a:r>
-            <a:endParaRPr lang="en-US" sz="1200" dirty="0"/>
-          </a:p>
-        </p:txBody>
-      </p:sp>
-      <p:sp>
-        <p:nvSpPr>
-          <p:cNvPr id="15" name="Shape 13"/>
-          <p:cNvSpPr/>
-          <p:nvPr/>
-        </p:nvSpPr>
-        <p:spPr>
-          <a:xfrm>
-            <a:off x="640080" y="4770120"/>
-            <a:ext cx="2743200" cy="0"/>
+                <a:latin typeface="Arial" pitchFamily="34" charset="0"/>
+                <a:ea typeface="Arial" pitchFamily="34" charset="-122"/>
+                <a:cs typeface="Arial" pitchFamily="34" charset="-120"/>
+              </a:rPr>
+              <a:t>P1 · Accounts &amp; Sign-in (3/3)</a:t>
+            </a:r>
+            <a:endParaRPr lang="en-US" sz="1100" dirty="0"/>
+          </a:p>
+        </p:txBody>
+      </p:sp>
+      <p:sp>
+        <p:nvSpPr>
+          <p:cNvPr id="22" name="Text 20"/>
+          <p:cNvSpPr/>
+          <p:nvPr/>
+        </p:nvSpPr>
+        <p:spPr>
+          <a:xfrm>
+            <a:off x="640080" y="4581144"/>
+            <a:ext cx="3332378" cy="438912"/>
+          </a:xfrm>
+          <a:prstGeom prst="rect">
+            <a:avLst/>
+          </a:prstGeom>
+          <a:noFill/>
+          <a:ln/>
+        </p:spPr>
+        <p:txBody>
+          <a:bodyPr wrap="square" lIns="0" tIns="0" rIns="0" bIns="0" rtlCol="0" anchor="t">
+            <a:normAutofit/>
+          </a:bodyPr>
+          <a:lstStyle/>
+          <a:p>
+            <a:pPr indent="0" marL="0">
+              <a:buNone/>
+            </a:pPr>
+            <a:r>
+              <a:rPr lang="en-US" sz="1100" dirty="0">
+                <a:solidFill>
+                  <a:srgbClr val="1F5C3A"/>
+                </a:solidFill>
+                <a:latin typeface="Arial" pitchFamily="34" charset="0"/>
+                <a:ea typeface="Arial" pitchFamily="34" charset="-122"/>
+                <a:cs typeface="Arial" pitchFamily="34" charset="-120"/>
+              </a:rPr>
+              <a:t>■  </a:t>
+            </a:r>
+            <a:pPr indent="0" marL="0">
+              <a:buNone/>
+            </a:pPr>
+            <a:r>
+              <a:rPr lang="en-US" sz="1100" dirty="0">
+                <a:solidFill>
+                  <a:srgbClr val="1A1A1A"/>
+                </a:solidFill>
+                <a:latin typeface="Arial" pitchFamily="34" charset="0"/>
+                <a:ea typeface="Arial" pitchFamily="34" charset="-122"/>
+                <a:cs typeface="Arial" pitchFamily="34" charset="-120"/>
+              </a:rPr>
+              <a:t>P2 · Clinic Search &amp; Maps (5/5)</a:t>
+            </a:r>
+            <a:endParaRPr lang="en-US" sz="1100" dirty="0"/>
+          </a:p>
+        </p:txBody>
+      </p:sp>
+      <p:sp>
+        <p:nvSpPr>
+          <p:cNvPr id="23" name="Text 21"/>
+          <p:cNvSpPr/>
+          <p:nvPr/>
+        </p:nvSpPr>
+        <p:spPr>
+          <a:xfrm>
+            <a:off x="640080" y="5020056"/>
+            <a:ext cx="3332378" cy="438912"/>
+          </a:xfrm>
+          <a:prstGeom prst="rect">
+            <a:avLst/>
+          </a:prstGeom>
+          <a:noFill/>
+          <a:ln/>
+        </p:spPr>
+        <p:txBody>
+          <a:bodyPr wrap="square" lIns="0" tIns="0" rIns="0" bIns="0" rtlCol="0" anchor="t">
+            <a:normAutofit/>
+          </a:bodyPr>
+          <a:lstStyle/>
+          <a:p>
+            <a:pPr indent="0" marL="0">
+              <a:buNone/>
+            </a:pPr>
+            <a:r>
+              <a:rPr lang="en-US" sz="1100" dirty="0">
+                <a:solidFill>
+                  <a:srgbClr val="8DB39A"/>
+                </a:solidFill>
+                <a:latin typeface="Arial" pitchFamily="34" charset="0"/>
+                <a:ea typeface="Arial" pitchFamily="34" charset="-122"/>
+                <a:cs typeface="Arial" pitchFamily="34" charset="-120"/>
+              </a:rPr>
+              <a:t>■  </a:t>
+            </a:r>
+            <a:pPr indent="0" marL="0">
+              <a:buNone/>
+            </a:pPr>
+            <a:r>
+              <a:rPr lang="en-US" sz="1100" dirty="0">
+                <a:solidFill>
+                  <a:srgbClr val="1A1A1A"/>
+                </a:solidFill>
+                <a:latin typeface="Arial" pitchFamily="34" charset="0"/>
+                <a:ea typeface="Arial" pitchFamily="34" charset="-122"/>
+                <a:cs typeface="Arial" pitchFamily="34" charset="-120"/>
+              </a:rPr>
+              <a:t>P3 · Booking Calendar (2/5)</a:t>
+            </a:r>
+            <a:endParaRPr lang="en-US" sz="1100" dirty="0"/>
+          </a:p>
+        </p:txBody>
+      </p:sp>
+      <p:sp>
+        <p:nvSpPr>
+          <p:cNvPr id="24" name="Text 22"/>
+          <p:cNvSpPr/>
+          <p:nvPr/>
+        </p:nvSpPr>
+        <p:spPr>
+          <a:xfrm>
+            <a:off x="640080" y="5458968"/>
+            <a:ext cx="3332378" cy="438912"/>
+          </a:xfrm>
+          <a:prstGeom prst="rect">
+            <a:avLst/>
+          </a:prstGeom>
+          <a:noFill/>
+          <a:ln/>
+        </p:spPr>
+        <p:txBody>
+          <a:bodyPr wrap="square" lIns="0" tIns="0" rIns="0" bIns="0" rtlCol="0" anchor="t">
+            <a:normAutofit/>
+          </a:bodyPr>
+          <a:lstStyle/>
+          <a:p>
+            <a:pPr indent="0" marL="0">
+              <a:buNone/>
+            </a:pPr>
+            <a:r>
+              <a:rPr lang="en-US" sz="1100" dirty="0">
+                <a:solidFill>
+                  <a:srgbClr val="8C8C86"/>
+                </a:solidFill>
+                <a:latin typeface="Arial" pitchFamily="34" charset="0"/>
+                <a:ea typeface="Arial" pitchFamily="34" charset="-122"/>
+                <a:cs typeface="Arial" pitchFamily="34" charset="-120"/>
+              </a:rPr>
+              <a:t>■  </a:t>
+            </a:r>
+            <a:pPr indent="0" marL="0">
+              <a:buNone/>
+            </a:pPr>
+            <a:r>
+              <a:rPr lang="en-US" sz="1100" dirty="0">
+                <a:solidFill>
+                  <a:srgbClr val="8C8C86"/>
+                </a:solidFill>
+                <a:latin typeface="Arial" pitchFamily="34" charset="0"/>
+                <a:ea typeface="Arial" pitchFamily="34" charset="-122"/>
+                <a:cs typeface="Arial" pitchFamily="34" charset="-120"/>
+              </a:rPr>
+              <a:t>P4 · Payments &amp; Receipts (0/4)</a:t>
+            </a:r>
+            <a:endParaRPr lang="en-US" sz="1100" dirty="0"/>
+          </a:p>
+        </p:txBody>
+      </p:sp>
+      <p:sp>
+        <p:nvSpPr>
+          <p:cNvPr id="25" name="Shape 23"/>
+          <p:cNvSpPr/>
+          <p:nvPr/>
+        </p:nvSpPr>
+        <p:spPr>
+          <a:xfrm>
+            <a:off x="4201058" y="1920240"/>
+            <a:ext cx="0" cy="3977640"/>
           </a:xfrm>
           <a:prstGeom prst="line">
             <a:avLst/>
@@ -14127,30 +14848,55 @@
       </p:sp>
       <p:sp>
         <p:nvSpPr>
-          <p:cNvPr id="16" name="Text 14"/>
-          <p:cNvSpPr/>
-          <p:nvPr/>
-        </p:nvSpPr>
-        <p:spPr>
-          <a:xfrm>
-            <a:off x="640080" y="4861560"/>
-            <a:ext cx="2743200" cy="821436"/>
-          </a:xfrm>
-          <a:prstGeom prst="rect">
-            <a:avLst/>
-          </a:prstGeom>
-          <a:noFill/>
-          <a:ln/>
-        </p:spPr>
-        <p:txBody>
-          <a:bodyPr wrap="square" lIns="0" tIns="0" rIns="0" bIns="0" rtlCol="0" anchor="b"/>
-          <a:lstStyle/>
-          <a:p>
-            <a:pPr indent="0" marL="0">
-              <a:buNone/>
-            </a:pPr>
-            <a:r>
-              <a:rPr lang="en-US" sz="4400" dirty="0">
+          <p:cNvPr id="26" name="Shape 24"/>
+          <p:cNvSpPr/>
+          <p:nvPr/>
+        </p:nvSpPr>
+        <p:spPr>
+          <a:xfrm>
+            <a:off x="4429658" y="1783080"/>
+            <a:ext cx="3332378" cy="0"/>
+          </a:xfrm>
+          <a:prstGeom prst="line">
+            <a:avLst/>
+          </a:prstGeom>
+          <a:noFill/>
+          <a:ln w="25400">
+            <a:solidFill>
+              <a:srgbClr val="1A1A1A"/>
+            </a:solidFill>
+            <a:prstDash val="solid"/>
+          </a:ln>
+        </p:spPr>
+      </p:sp>
+      <p:sp>
+        <p:nvSpPr>
+          <p:cNvPr id="27" name="Text 25"/>
+          <p:cNvSpPr/>
+          <p:nvPr/>
+        </p:nvSpPr>
+        <p:spPr>
+          <a:xfrm>
+            <a:off x="4429658" y="1874520"/>
+            <a:ext cx="3332378" cy="411480"/>
+          </a:xfrm>
+          <a:prstGeom prst="rect">
+            <a:avLst/>
+          </a:prstGeom>
+          <a:noFill/>
+          <a:ln/>
+        </p:spPr>
+        <p:txBody>
+          <a:bodyPr wrap="square" lIns="0" tIns="0" rIns="0" bIns="0" rtlCol="0" anchor="ctr">
+            <a:normAutofit/>
+          </a:bodyPr>
+          <a:lstStyle/>
+          <a:p>
+            <a:pPr indent="0" marL="0">
+              <a:buNone/>
+            </a:pPr>
+            <a:r>
+              <a:rPr lang="en-US" sz="1800" dirty="0">
                 <a:solidFill>
                   <a:srgbClr val="1A1A1A"/>
                 </a:solidFill>
@@ -14158,61 +14904,342 @@
                 <a:ea typeface="Georgia" pitchFamily="34" charset="-122"/>
                 <a:cs typeface="Georgia" pitchFamily="34" charset="-120"/>
               </a:rPr>
-              <a:t>7</a:t>
-            </a:r>
-            <a:endParaRPr lang="en-US" sz="4400" dirty="0"/>
-          </a:p>
-        </p:txBody>
-      </p:sp>
-      <p:sp>
-        <p:nvSpPr>
-          <p:cNvPr id="17" name="Text 15"/>
-          <p:cNvSpPr/>
-          <p:nvPr/>
-        </p:nvSpPr>
-        <p:spPr>
-          <a:xfrm>
-            <a:off x="640080" y="5712866"/>
-            <a:ext cx="2743200" cy="522732"/>
-          </a:xfrm>
-          <a:prstGeom prst="rect">
-            <a:avLst/>
-          </a:prstGeom>
-          <a:noFill/>
-          <a:ln/>
-        </p:spPr>
-        <p:txBody>
-          <a:bodyPr wrap="square" lIns="0" tIns="0" rIns="0" bIns="0" rtlCol="0" anchor="t"/>
-          <a:lstStyle/>
-          <a:p>
-            <a:pPr indent="0" marL="0">
-              <a:buNone/>
-            </a:pPr>
-            <a:r>
-              <a:rPr lang="en-US" sz="1200" dirty="0">
+              <a:t>Nina Rao @Nina</a:t>
+            </a:r>
+            <a:endParaRPr lang="en-US" sz="1800" dirty="0"/>
+          </a:p>
+        </p:txBody>
+      </p:sp>
+      <p:sp>
+        <p:nvSpPr>
+          <p:cNvPr id="28" name="Text 26"/>
+          <p:cNvSpPr/>
+          <p:nvPr/>
+        </p:nvSpPr>
+        <p:spPr>
+          <a:xfrm>
+            <a:off x="4429658" y="2286000"/>
+            <a:ext cx="3332378" cy="237744"/>
+          </a:xfrm>
+          <a:prstGeom prst="rect">
+            <a:avLst/>
+          </a:prstGeom>
+          <a:noFill/>
+          <a:ln/>
+        </p:spPr>
+        <p:txBody>
+          <a:bodyPr wrap="square" lIns="0" tIns="0" rIns="0" bIns="0" rtlCol="0" anchor="ctr">
+            <a:normAutofit/>
+          </a:bodyPr>
+          <a:lstStyle/>
+          <a:p>
+            <a:pPr indent="0" marL="0">
+              <a:buNone/>
+            </a:pPr>
+            <a:r>
+              <a:rPr lang="en-US" sz="1100" b="1" dirty="0">
+                <a:solidFill>
+                  <a:srgbClr val="1F5C3A"/>
+                </a:solidFill>
+                <a:latin typeface="Arial" pitchFamily="34" charset="0"/>
+                <a:ea typeface="Arial" pitchFamily="34" charset="-122"/>
+                <a:cs typeface="Arial" pitchFamily="34" charset="-120"/>
+              </a:rPr>
+              <a:t>ClinicBook · Clinic Dashboard</a:t>
+            </a:r>
+            <a:endParaRPr lang="en-US" sz="1100" dirty="0"/>
+          </a:p>
+        </p:txBody>
+      </p:sp>
+      <p:sp>
+        <p:nvSpPr>
+          <p:cNvPr id="29" name="Text 27"/>
+          <p:cNvSpPr/>
+          <p:nvPr/>
+        </p:nvSpPr>
+        <p:spPr>
+          <a:xfrm>
+            <a:off x="4429658" y="2606040"/>
+            <a:ext cx="548640" cy="548640"/>
+          </a:xfrm>
+          <a:prstGeom prst="rect">
+            <a:avLst/>
+          </a:prstGeom>
+          <a:noFill/>
+          <a:ln/>
+        </p:spPr>
+        <p:txBody>
+          <a:bodyPr wrap="square" lIns="0" tIns="0" rIns="0" bIns="0" rtlCol="0" anchor="ctr"/>
+          <a:lstStyle/>
+          <a:p>
+            <a:pPr indent="0" marL="0">
+              <a:buNone/>
+            </a:pPr>
+            <a:r>
+              <a:rPr lang="en-US" sz="3200" dirty="0">
+                <a:solidFill>
+                  <a:srgbClr val="1A1A1A"/>
+                </a:solidFill>
+                <a:latin typeface="Georgia" pitchFamily="34" charset="0"/>
+                <a:ea typeface="Georgia" pitchFamily="34" charset="-122"/>
+                <a:cs typeface="Georgia" pitchFamily="34" charset="-120"/>
+              </a:rPr>
+              <a:t>4</a:t>
+            </a:r>
+            <a:endParaRPr lang="en-US" sz="3200" dirty="0"/>
+          </a:p>
+        </p:txBody>
+      </p:sp>
+      <p:sp>
+        <p:nvSpPr>
+          <p:cNvPr id="30" name="Text 28"/>
+          <p:cNvSpPr/>
+          <p:nvPr/>
+        </p:nvSpPr>
+        <p:spPr>
+          <a:xfrm>
+            <a:off x="4996586" y="2761488"/>
+            <a:ext cx="731520" cy="237744"/>
+          </a:xfrm>
+          <a:prstGeom prst="rect">
+            <a:avLst/>
+          </a:prstGeom>
+          <a:noFill/>
+          <a:ln/>
+        </p:spPr>
+        <p:txBody>
+          <a:bodyPr wrap="square" lIns="0" tIns="0" rIns="0" bIns="0" rtlCol="0" anchor="ctr"/>
+          <a:lstStyle/>
+          <a:p>
+            <a:pPr indent="0" marL="0">
+              <a:buNone/>
+            </a:pPr>
+            <a:r>
+              <a:rPr lang="en-US" sz="1100" b="1" dirty="0">
+                <a:solidFill>
+                  <a:srgbClr val="8C8C86"/>
+                </a:solidFill>
+                <a:latin typeface="Arial" pitchFamily="34" charset="0"/>
+                <a:ea typeface="Arial" pitchFamily="34" charset="-122"/>
+                <a:cs typeface="Arial" pitchFamily="34" charset="-120"/>
+              </a:rPr>
+              <a:t>Done</a:t>
+            </a:r>
+            <a:endParaRPr lang="en-US" sz="1100" dirty="0"/>
+          </a:p>
+        </p:txBody>
+      </p:sp>
+      <p:sp>
+        <p:nvSpPr>
+          <p:cNvPr id="31" name="Text 29"/>
+          <p:cNvSpPr/>
+          <p:nvPr/>
+        </p:nvSpPr>
+        <p:spPr>
+          <a:xfrm>
+            <a:off x="5755538" y="2606040"/>
+            <a:ext cx="548640" cy="548640"/>
+          </a:xfrm>
+          <a:prstGeom prst="rect">
+            <a:avLst/>
+          </a:prstGeom>
+          <a:noFill/>
+          <a:ln/>
+        </p:spPr>
+        <p:txBody>
+          <a:bodyPr wrap="square" lIns="0" tIns="0" rIns="0" bIns="0" rtlCol="0" anchor="ctr"/>
+          <a:lstStyle/>
+          <a:p>
+            <a:pPr indent="0" marL="0">
+              <a:buNone/>
+            </a:pPr>
+            <a:r>
+              <a:rPr lang="en-US" sz="3200" dirty="0">
+                <a:solidFill>
+                  <a:srgbClr val="1A1A1A"/>
+                </a:solidFill>
+                <a:latin typeface="Georgia" pitchFamily="34" charset="0"/>
+                <a:ea typeface="Georgia" pitchFamily="34" charset="-122"/>
+                <a:cs typeface="Georgia" pitchFamily="34" charset="-120"/>
+              </a:rPr>
+              <a:t>1</a:t>
+            </a:r>
+            <a:endParaRPr lang="en-US" sz="3200" dirty="0"/>
+          </a:p>
+        </p:txBody>
+      </p:sp>
+      <p:sp>
+        <p:nvSpPr>
+          <p:cNvPr id="32" name="Text 30"/>
+          <p:cNvSpPr/>
+          <p:nvPr/>
+        </p:nvSpPr>
+        <p:spPr>
+          <a:xfrm>
+            <a:off x="6322466" y="2761488"/>
+            <a:ext cx="731520" cy="237744"/>
+          </a:xfrm>
+          <a:prstGeom prst="rect">
+            <a:avLst/>
+          </a:prstGeom>
+          <a:noFill/>
+          <a:ln/>
+        </p:spPr>
+        <p:txBody>
+          <a:bodyPr wrap="square" lIns="0" tIns="0" rIns="0" bIns="0" rtlCol="0" anchor="ctr"/>
+          <a:lstStyle/>
+          <a:p>
+            <a:pPr indent="0" marL="0">
+              <a:buNone/>
+            </a:pPr>
+            <a:r>
+              <a:rPr lang="en-US" sz="1100" b="1" dirty="0">
+                <a:solidFill>
+                  <a:srgbClr val="8C8C86"/>
+                </a:solidFill>
+                <a:latin typeface="Arial" pitchFamily="34" charset="0"/>
+                <a:ea typeface="Arial" pitchFamily="34" charset="-122"/>
+                <a:cs typeface="Arial" pitchFamily="34" charset="-120"/>
+              </a:rPr>
+              <a:t>Open</a:t>
+            </a:r>
+            <a:endParaRPr lang="en-US" sz="1100" dirty="0"/>
+          </a:p>
+        </p:txBody>
+      </p:sp>
+      <p:sp>
+        <p:nvSpPr>
+          <p:cNvPr id="33" name="Text 31"/>
+          <p:cNvSpPr/>
+          <p:nvPr/>
+        </p:nvSpPr>
+        <p:spPr>
+          <a:xfrm>
+            <a:off x="6847637" y="2606040"/>
+            <a:ext cx="914400" cy="548640"/>
+          </a:xfrm>
+          <a:prstGeom prst="rect">
+            <a:avLst/>
+          </a:prstGeom>
+          <a:noFill/>
+          <a:ln/>
+        </p:spPr>
+        <p:txBody>
+          <a:bodyPr wrap="square" lIns="0" tIns="0" rIns="0" bIns="0" rtlCol="0" anchor="ctr"/>
+          <a:lstStyle/>
+          <a:p>
+            <a:pPr algn="r" indent="0" marL="0">
+              <a:buNone/>
+            </a:pPr>
+            <a:r>
+              <a:rPr lang="en-US" sz="2000" dirty="0">
+                <a:solidFill>
+                  <a:srgbClr val="1A1A1A"/>
+                </a:solidFill>
+                <a:latin typeface="Georgia" pitchFamily="34" charset="0"/>
+                <a:ea typeface="Georgia" pitchFamily="34" charset="-122"/>
+                <a:cs typeface="Georgia" pitchFamily="34" charset="-120"/>
+              </a:rPr>
+              <a:t>70%</a:t>
+            </a:r>
+            <a:endParaRPr lang="en-US" sz="2000" dirty="0"/>
+          </a:p>
+        </p:txBody>
+      </p:sp>
+      <p:sp>
+        <p:nvSpPr>
+          <p:cNvPr id="34" name="Shape 32"/>
+          <p:cNvSpPr/>
+          <p:nvPr/>
+        </p:nvSpPr>
+        <p:spPr>
+          <a:xfrm>
+            <a:off x="4429658" y="3246120"/>
+            <a:ext cx="3332378" cy="45720"/>
+          </a:xfrm>
+          <a:prstGeom prst="rect">
+            <a:avLst/>
+          </a:prstGeom>
+          <a:solidFill>
+            <a:srgbClr val="ECECE8"/>
+          </a:solidFill>
+          <a:ln/>
+        </p:spPr>
+      </p:sp>
+      <p:sp>
+        <p:nvSpPr>
+          <p:cNvPr id="35" name="Shape 33"/>
+          <p:cNvSpPr/>
+          <p:nvPr/>
+        </p:nvSpPr>
+        <p:spPr>
+          <a:xfrm>
+            <a:off x="4429658" y="3246120"/>
+            <a:ext cx="2332665" cy="45720"/>
+          </a:xfrm>
+          <a:prstGeom prst="rect">
+            <a:avLst/>
+          </a:prstGeom>
+          <a:solidFill>
+            <a:srgbClr val="8DB39A"/>
+          </a:solidFill>
+          <a:ln/>
+        </p:spPr>
+      </p:sp>
+      <p:sp>
+        <p:nvSpPr>
+          <p:cNvPr id="36" name="Text 34"/>
+          <p:cNvSpPr/>
+          <p:nvPr/>
+        </p:nvSpPr>
+        <p:spPr>
+          <a:xfrm>
+            <a:off x="4429658" y="3383280"/>
+            <a:ext cx="3332378" cy="594360"/>
+          </a:xfrm>
+          <a:prstGeom prst="rect">
+            <a:avLst/>
+          </a:prstGeom>
+          <a:noFill/>
+          <a:ln/>
+        </p:spPr>
+        <p:txBody>
+          <a:bodyPr wrap="square" lIns="0" tIns="0" rIns="0" bIns="0" rtlCol="0" anchor="t">
+            <a:normAutofit/>
+          </a:bodyPr>
+          <a:lstStyle/>
+          <a:p>
+            <a:pPr indent="0" marL="0">
+              <a:lnSpc>
+                <a:spcPct val="110000"/>
+              </a:lnSpc>
+              <a:buNone/>
+            </a:pPr>
+            <a:r>
+              <a:rPr lang="en-US" sz="1150" i="1" dirty="0">
                 <a:solidFill>
                   <a:srgbClr val="4A4A46"/>
                 </a:solidFill>
-                <a:latin typeface="Arial" pitchFamily="34" charset="0"/>
-                <a:ea typeface="Arial" pitchFamily="34" charset="-122"/>
-                <a:cs typeface="Arial" pitchFamily="34" charset="-120"/>
-              </a:rPr>
-              <a:t>Code reviews completed</a:t>
-            </a:r>
-            <a:endParaRPr lang="en-US" sz="1200" dirty="0"/>
-          </a:p>
-        </p:txBody>
-      </p:sp>
-      <p:sp>
-        <p:nvSpPr>
-          <p:cNvPr id="18" name="Shape 16"/>
-          <p:cNvSpPr/>
-          <p:nvPr/>
-        </p:nvSpPr>
-        <p:spPr>
-          <a:xfrm>
-            <a:off x="3657600" y="1783080"/>
-            <a:ext cx="0" cy="4480560"/>
+                <a:latin typeface="Georgia" pitchFamily="34" charset="0"/>
+                <a:ea typeface="Georgia" pitchFamily="34" charset="-122"/>
+                <a:cs typeface="Georgia" pitchFamily="34" charset="-120"/>
+              </a:rPr>
+              <a:t>Onboarding and schedules done; reminders in final review.</a:t>
+            </a:r>
+            <a:endParaRPr lang="en-US" sz="1150" dirty="0"/>
+          </a:p>
+        </p:txBody>
+      </p:sp>
+      <p:sp>
+        <p:nvSpPr>
+          <p:cNvPr id="37" name="Shape 35"/>
+          <p:cNvSpPr/>
+          <p:nvPr/>
+        </p:nvSpPr>
+        <p:spPr>
+          <a:xfrm>
+            <a:off x="4429658" y="4023360"/>
+            <a:ext cx="3332378" cy="0"/>
           </a:xfrm>
           <a:prstGeom prst="line">
             <a:avLst/>
@@ -14228,14 +15255,257 @@
       </p:sp>
       <p:sp>
         <p:nvSpPr>
-          <p:cNvPr id="19" name="Shape 17"/>
-          <p:cNvSpPr/>
-          <p:nvPr/>
-        </p:nvSpPr>
-        <p:spPr>
-          <a:xfrm>
-            <a:off x="3931920" y="1783080"/>
-            <a:ext cx="7619695" cy="0"/>
+          <p:cNvPr id="38" name="Text 36"/>
+          <p:cNvSpPr/>
+          <p:nvPr/>
+        </p:nvSpPr>
+        <p:spPr>
+          <a:xfrm>
+            <a:off x="4429658" y="4142232"/>
+            <a:ext cx="3332378" cy="438912"/>
+          </a:xfrm>
+          <a:prstGeom prst="rect">
+            <a:avLst/>
+          </a:prstGeom>
+          <a:noFill/>
+          <a:ln/>
+        </p:spPr>
+        <p:txBody>
+          <a:bodyPr wrap="square" lIns="0" tIns="0" rIns="0" bIns="0" rtlCol="0" anchor="t">
+            <a:normAutofit/>
+          </a:bodyPr>
+          <a:lstStyle/>
+          <a:p>
+            <a:pPr indent="0" marL="0">
+              <a:buNone/>
+            </a:pPr>
+            <a:r>
+              <a:rPr lang="en-US" sz="1100" dirty="0">
+                <a:solidFill>
+                  <a:srgbClr val="1F5C3A"/>
+                </a:solidFill>
+                <a:latin typeface="Arial" pitchFamily="34" charset="0"/>
+                <a:ea typeface="Arial" pitchFamily="34" charset="-122"/>
+                <a:cs typeface="Arial" pitchFamily="34" charset="-120"/>
+              </a:rPr>
+              <a:t>■  </a:t>
+            </a:r>
+            <a:pPr indent="0" marL="0">
+              <a:buNone/>
+            </a:pPr>
+            <a:r>
+              <a:rPr lang="en-US" sz="1100" dirty="0">
+                <a:solidFill>
+                  <a:srgbClr val="1A1A1A"/>
+                </a:solidFill>
+                <a:latin typeface="Arial" pitchFamily="34" charset="0"/>
+                <a:ea typeface="Arial" pitchFamily="34" charset="-122"/>
+                <a:cs typeface="Arial" pitchFamily="34" charset="-120"/>
+              </a:rPr>
+              <a:t>P1 · Clinic Onboarding (3/3)</a:t>
+            </a:r>
+            <a:endParaRPr lang="en-US" sz="1100" dirty="0"/>
+          </a:p>
+        </p:txBody>
+      </p:sp>
+      <p:sp>
+        <p:nvSpPr>
+          <p:cNvPr id="39" name="Text 37"/>
+          <p:cNvSpPr/>
+          <p:nvPr/>
+        </p:nvSpPr>
+        <p:spPr>
+          <a:xfrm>
+            <a:off x="4429658" y="4581144"/>
+            <a:ext cx="3332378" cy="438912"/>
+          </a:xfrm>
+          <a:prstGeom prst="rect">
+            <a:avLst/>
+          </a:prstGeom>
+          <a:noFill/>
+          <a:ln/>
+        </p:spPr>
+        <p:txBody>
+          <a:bodyPr wrap="square" lIns="0" tIns="0" rIns="0" bIns="0" rtlCol="0" anchor="t">
+            <a:normAutofit/>
+          </a:bodyPr>
+          <a:lstStyle/>
+          <a:p>
+            <a:pPr indent="0" marL="0">
+              <a:buNone/>
+            </a:pPr>
+            <a:r>
+              <a:rPr lang="en-US" sz="1100" dirty="0">
+                <a:solidFill>
+                  <a:srgbClr val="1F5C3A"/>
+                </a:solidFill>
+                <a:latin typeface="Arial" pitchFamily="34" charset="0"/>
+                <a:ea typeface="Arial" pitchFamily="34" charset="-122"/>
+                <a:cs typeface="Arial" pitchFamily="34" charset="-120"/>
+              </a:rPr>
+              <a:t>■  </a:t>
+            </a:r>
+            <a:pPr indent="0" marL="0">
+              <a:buNone/>
+            </a:pPr>
+            <a:r>
+              <a:rPr lang="en-US" sz="1100" dirty="0">
+                <a:solidFill>
+                  <a:srgbClr val="1A1A1A"/>
+                </a:solidFill>
+                <a:latin typeface="Arial" pitchFamily="34" charset="0"/>
+                <a:ea typeface="Arial" pitchFamily="34" charset="-122"/>
+                <a:cs typeface="Arial" pitchFamily="34" charset="-120"/>
+              </a:rPr>
+              <a:t>P2 · Doctor Schedules (5/5)</a:t>
+            </a:r>
+            <a:endParaRPr lang="en-US" sz="1100" dirty="0"/>
+          </a:p>
+        </p:txBody>
+      </p:sp>
+      <p:sp>
+        <p:nvSpPr>
+          <p:cNvPr id="40" name="Text 38"/>
+          <p:cNvSpPr/>
+          <p:nvPr/>
+        </p:nvSpPr>
+        <p:spPr>
+          <a:xfrm>
+            <a:off x="4429658" y="5020056"/>
+            <a:ext cx="3332378" cy="438912"/>
+          </a:xfrm>
+          <a:prstGeom prst="rect">
+            <a:avLst/>
+          </a:prstGeom>
+          <a:noFill/>
+          <a:ln/>
+        </p:spPr>
+        <p:txBody>
+          <a:bodyPr wrap="square" lIns="0" tIns="0" rIns="0" bIns="0" rtlCol="0" anchor="t">
+            <a:normAutofit/>
+          </a:bodyPr>
+          <a:lstStyle/>
+          <a:p>
+            <a:pPr indent="0" marL="0">
+              <a:buNone/>
+            </a:pPr>
+            <a:r>
+              <a:rPr lang="en-US" sz="1100" dirty="0">
+                <a:solidFill>
+                  <a:srgbClr val="8DB39A"/>
+                </a:solidFill>
+                <a:latin typeface="Arial" pitchFamily="34" charset="0"/>
+                <a:ea typeface="Arial" pitchFamily="34" charset="-122"/>
+                <a:cs typeface="Arial" pitchFamily="34" charset="-120"/>
+              </a:rPr>
+              <a:t>■  </a:t>
+            </a:r>
+            <a:pPr indent="0" marL="0">
+              <a:buNone/>
+            </a:pPr>
+            <a:r>
+              <a:rPr lang="en-US" sz="1100" dirty="0">
+                <a:solidFill>
+                  <a:srgbClr val="1A1A1A"/>
+                </a:solidFill>
+                <a:latin typeface="Arial" pitchFamily="34" charset="0"/>
+                <a:ea typeface="Arial" pitchFamily="34" charset="-122"/>
+                <a:cs typeface="Arial" pitchFamily="34" charset="-120"/>
+              </a:rPr>
+              <a:t>P4 · Reminders, in review (5/5)</a:t>
+            </a:r>
+            <a:endParaRPr lang="en-US" sz="1100" dirty="0"/>
+          </a:p>
+        </p:txBody>
+      </p:sp>
+      <p:sp>
+        <p:nvSpPr>
+          <p:cNvPr id="41" name="Text 39"/>
+          <p:cNvSpPr/>
+          <p:nvPr/>
+        </p:nvSpPr>
+        <p:spPr>
+          <a:xfrm>
+            <a:off x="4429658" y="5458968"/>
+            <a:ext cx="3332378" cy="438912"/>
+          </a:xfrm>
+          <a:prstGeom prst="rect">
+            <a:avLst/>
+          </a:prstGeom>
+          <a:noFill/>
+          <a:ln/>
+        </p:spPr>
+        <p:txBody>
+          <a:bodyPr wrap="square" lIns="0" tIns="0" rIns="0" bIns="0" rtlCol="0" anchor="t">
+            <a:normAutofit/>
+          </a:bodyPr>
+          <a:lstStyle/>
+          <a:p>
+            <a:pPr indent="0" marL="0">
+              <a:buNone/>
+            </a:pPr>
+            <a:r>
+              <a:rPr lang="en-US" sz="1100" dirty="0">
+                <a:solidFill>
+                  <a:srgbClr val="8C8C86"/>
+                </a:solidFill>
+                <a:latin typeface="Arial" pitchFamily="34" charset="0"/>
+                <a:ea typeface="Arial" pitchFamily="34" charset="-122"/>
+                <a:cs typeface="Arial" pitchFamily="34" charset="-120"/>
+              </a:rPr>
+              <a:t>■  </a:t>
+            </a:r>
+            <a:pPr indent="0" marL="0">
+              <a:buNone/>
+            </a:pPr>
+            <a:r>
+              <a:rPr lang="en-US" sz="1100" dirty="0">
+                <a:solidFill>
+                  <a:srgbClr val="8C8C86"/>
+                </a:solidFill>
+                <a:latin typeface="Arial" pitchFamily="34" charset="0"/>
+                <a:ea typeface="Arial" pitchFamily="34" charset="-122"/>
+                <a:cs typeface="Arial" pitchFamily="34" charset="-120"/>
+              </a:rPr>
+              <a:t>P3 · Reports &amp; Exports (0/3)</a:t>
+            </a:r>
+            <a:endParaRPr lang="en-US" sz="1100" dirty="0"/>
+          </a:p>
+        </p:txBody>
+      </p:sp>
+      <p:sp>
+        <p:nvSpPr>
+          <p:cNvPr id="42" name="Shape 40"/>
+          <p:cNvSpPr/>
+          <p:nvPr/>
+        </p:nvSpPr>
+        <p:spPr>
+          <a:xfrm>
+            <a:off x="7990637" y="1920240"/>
+            <a:ext cx="0" cy="3977640"/>
+          </a:xfrm>
+          <a:prstGeom prst="line">
+            <a:avLst/>
+          </a:prstGeom>
+          <a:noFill/>
+          <a:ln w="9525">
+            <a:solidFill>
+              <a:srgbClr val="D6D6D0"/>
+            </a:solidFill>
+            <a:prstDash val="solid"/>
+          </a:ln>
+        </p:spPr>
+      </p:sp>
+      <p:sp>
+        <p:nvSpPr>
+          <p:cNvPr id="43" name="Shape 41"/>
+          <p:cNvSpPr/>
+          <p:nvPr/>
+        </p:nvSpPr>
+        <p:spPr>
+          <a:xfrm>
+            <a:off x="8219237" y="1783080"/>
+            <a:ext cx="3332378" cy="0"/>
           </a:xfrm>
           <a:prstGeom prst="line">
             <a:avLst/>
@@ -14249,56 +15519,644 @@
           </a:ln>
         </p:spPr>
       </p:sp>
-      <p:graphicFrame>
-        <p:nvGraphicFramePr>
-          <p:cNvPr id="20" name="Chart 0" descr=""/>
-          <p:cNvGraphicFramePr/>
-          <p:nvPr/>
-        </p:nvGraphicFramePr>
-        <p:xfrm>
-          <a:off x="3840480" y="1920240"/>
-          <a:ext cx="7711135" cy="3977640"/>
-        </p:xfrm>
-        <a:graphic xmlns:a="http://schemas.openxmlformats.org/drawingml/2006/main">
-          <a:graphicData uri="http://schemas.openxmlformats.org/drawingml/2006/chart">
-            <c:chart xmlns:c="http://schemas.openxmlformats.org/drawingml/2006/chart" r:id="rId1"/>
-          </a:graphicData>
-        </a:graphic>
-      </p:graphicFrame>
-      <p:sp>
-        <p:nvSpPr>
-          <p:cNvPr id="21" name="Text 18"/>
-          <p:cNvSpPr/>
-          <p:nvPr/>
-        </p:nvSpPr>
-        <p:spPr>
-          <a:xfrm>
-            <a:off x="3931920" y="5916168"/>
-            <a:ext cx="7619695" cy="320040"/>
-          </a:xfrm>
-          <a:prstGeom prst="rect">
-            <a:avLst/>
-          </a:prstGeom>
-          <a:noFill/>
-          <a:ln/>
-        </p:spPr>
-        <p:txBody>
-          <a:bodyPr wrap="square" lIns="0" tIns="0" rIns="0" bIns="0" rtlCol="0" anchor="ctr"/>
-          <a:lstStyle/>
-          <a:p>
-            <a:pPr indent="0" marL="0">
-              <a:buNone/>
-            </a:pPr>
-            <a:r>
-              <a:rPr lang="en-US" sz="1100" i="1" dirty="0">
-                <a:solidFill>
-                  <a:srgbClr val="8C8C86"/>
+      <p:sp>
+        <p:nvSpPr>
+          <p:cNvPr id="44" name="Text 42"/>
+          <p:cNvSpPr/>
+          <p:nvPr/>
+        </p:nvSpPr>
+        <p:spPr>
+          <a:xfrm>
+            <a:off x="8219237" y="1874520"/>
+            <a:ext cx="3332378" cy="411480"/>
+          </a:xfrm>
+          <a:prstGeom prst="rect">
+            <a:avLst/>
+          </a:prstGeom>
+          <a:noFill/>
+          <a:ln/>
+        </p:spPr>
+        <p:txBody>
+          <a:bodyPr wrap="square" lIns="0" tIns="0" rIns="0" bIns="0" rtlCol="0" anchor="ctr">
+            <a:normAutofit/>
+          </a:bodyPr>
+          <a:lstStyle/>
+          <a:p>
+            <a:pPr indent="0" marL="0">
+              <a:buNone/>
+            </a:pPr>
+            <a:r>
+              <a:rPr lang="en-US" sz="1800" dirty="0">
+                <a:solidFill>
+                  <a:srgbClr val="1A1A1A"/>
                 </a:solidFill>
                 <a:latin typeface="Georgia" pitchFamily="34" charset="0"/>
                 <a:ea typeface="Georgia" pitchFamily="34" charset="-122"/>
                 <a:cs typeface="Georgia" pitchFamily="34" charset="-120"/>
               </a:rPr>
-              <a:t>Source: GitHub activity this week.</a:t>
+              <a:t>Maya Lin @Maya</a:t>
+            </a:r>
+            <a:endParaRPr lang="en-US" sz="1800" dirty="0"/>
+          </a:p>
+        </p:txBody>
+      </p:sp>
+      <p:sp>
+        <p:nvSpPr>
+          <p:cNvPr id="45" name="Text 43"/>
+          <p:cNvSpPr/>
+          <p:nvPr/>
+        </p:nvSpPr>
+        <p:spPr>
+          <a:xfrm>
+            <a:off x="8219237" y="2286000"/>
+            <a:ext cx="3332378" cy="237744"/>
+          </a:xfrm>
+          <a:prstGeom prst="rect">
+            <a:avLst/>
+          </a:prstGeom>
+          <a:noFill/>
+          <a:ln/>
+        </p:spPr>
+        <p:txBody>
+          <a:bodyPr wrap="square" lIns="0" tIns="0" rIns="0" bIns="0" rtlCol="0" anchor="ctr">
+            <a:normAutofit/>
+          </a:bodyPr>
+          <a:lstStyle/>
+          <a:p>
+            <a:pPr indent="0" marL="0">
+              <a:buNone/>
+            </a:pPr>
+            <a:r>
+              <a:rPr lang="en-US" sz="1100" b="1" dirty="0">
+                <a:solidFill>
+                  <a:srgbClr val="1F5C3A"/>
+                </a:solidFill>
+                <a:latin typeface="Arial" pitchFamily="34" charset="0"/>
+                <a:ea typeface="Arial" pitchFamily="34" charset="-122"/>
+                <a:cs typeface="Arial" pitchFamily="34" charset="-120"/>
+              </a:rPr>
+              <a:t>PulseBoard · Analytics</a:t>
+            </a:r>
+            <a:endParaRPr lang="en-US" sz="1100" dirty="0"/>
+          </a:p>
+        </p:txBody>
+      </p:sp>
+      <p:sp>
+        <p:nvSpPr>
+          <p:cNvPr id="46" name="Text 44"/>
+          <p:cNvSpPr/>
+          <p:nvPr/>
+        </p:nvSpPr>
+        <p:spPr>
+          <a:xfrm>
+            <a:off x="8219237" y="2606040"/>
+            <a:ext cx="548640" cy="548640"/>
+          </a:xfrm>
+          <a:prstGeom prst="rect">
+            <a:avLst/>
+          </a:prstGeom>
+          <a:noFill/>
+          <a:ln/>
+        </p:spPr>
+        <p:txBody>
+          <a:bodyPr wrap="square" lIns="0" tIns="0" rIns="0" bIns="0" rtlCol="0" anchor="ctr"/>
+          <a:lstStyle/>
+          <a:p>
+            <a:pPr indent="0" marL="0">
+              <a:buNone/>
+            </a:pPr>
+            <a:r>
+              <a:rPr lang="en-US" sz="3200" dirty="0">
+                <a:solidFill>
+                  <a:srgbClr val="1A1A1A"/>
+                </a:solidFill>
+                <a:latin typeface="Georgia" pitchFamily="34" charset="0"/>
+                <a:ea typeface="Georgia" pitchFamily="34" charset="-122"/>
+                <a:cs typeface="Georgia" pitchFamily="34" charset="-120"/>
+              </a:rPr>
+              <a:t>5</a:t>
+            </a:r>
+            <a:endParaRPr lang="en-US" sz="3200" dirty="0"/>
+          </a:p>
+        </p:txBody>
+      </p:sp>
+      <p:sp>
+        <p:nvSpPr>
+          <p:cNvPr id="47" name="Text 45"/>
+          <p:cNvSpPr/>
+          <p:nvPr/>
+        </p:nvSpPr>
+        <p:spPr>
+          <a:xfrm>
+            <a:off x="8786165" y="2761488"/>
+            <a:ext cx="731520" cy="237744"/>
+          </a:xfrm>
+          <a:prstGeom prst="rect">
+            <a:avLst/>
+          </a:prstGeom>
+          <a:noFill/>
+          <a:ln/>
+        </p:spPr>
+        <p:txBody>
+          <a:bodyPr wrap="square" lIns="0" tIns="0" rIns="0" bIns="0" rtlCol="0" anchor="ctr"/>
+          <a:lstStyle/>
+          <a:p>
+            <a:pPr indent="0" marL="0">
+              <a:buNone/>
+            </a:pPr>
+            <a:r>
+              <a:rPr lang="en-US" sz="1100" b="1" dirty="0">
+                <a:solidFill>
+                  <a:srgbClr val="8C8C86"/>
+                </a:solidFill>
+                <a:latin typeface="Arial" pitchFamily="34" charset="0"/>
+                <a:ea typeface="Arial" pitchFamily="34" charset="-122"/>
+                <a:cs typeface="Arial" pitchFamily="34" charset="-120"/>
+              </a:rPr>
+              <a:t>Done</a:t>
+            </a:r>
+            <a:endParaRPr lang="en-US" sz="1100" dirty="0"/>
+          </a:p>
+        </p:txBody>
+      </p:sp>
+      <p:sp>
+        <p:nvSpPr>
+          <p:cNvPr id="48" name="Text 46"/>
+          <p:cNvSpPr/>
+          <p:nvPr/>
+        </p:nvSpPr>
+        <p:spPr>
+          <a:xfrm>
+            <a:off x="9545117" y="2606040"/>
+            <a:ext cx="548640" cy="548640"/>
+          </a:xfrm>
+          <a:prstGeom prst="rect">
+            <a:avLst/>
+          </a:prstGeom>
+          <a:noFill/>
+          <a:ln/>
+        </p:spPr>
+        <p:txBody>
+          <a:bodyPr wrap="square" lIns="0" tIns="0" rIns="0" bIns="0" rtlCol="0" anchor="ctr"/>
+          <a:lstStyle/>
+          <a:p>
+            <a:pPr indent="0" marL="0">
+              <a:buNone/>
+            </a:pPr>
+            <a:r>
+              <a:rPr lang="en-US" sz="3200" dirty="0">
+                <a:solidFill>
+                  <a:srgbClr val="1A1A1A"/>
+                </a:solidFill>
+                <a:latin typeface="Georgia" pitchFamily="34" charset="0"/>
+                <a:ea typeface="Georgia" pitchFamily="34" charset="-122"/>
+                <a:cs typeface="Georgia" pitchFamily="34" charset="-120"/>
+              </a:rPr>
+              <a:t>1</a:t>
+            </a:r>
+            <a:endParaRPr lang="en-US" sz="3200" dirty="0"/>
+          </a:p>
+        </p:txBody>
+      </p:sp>
+      <p:sp>
+        <p:nvSpPr>
+          <p:cNvPr id="49" name="Text 47"/>
+          <p:cNvSpPr/>
+          <p:nvPr/>
+        </p:nvSpPr>
+        <p:spPr>
+          <a:xfrm>
+            <a:off x="10112045" y="2761488"/>
+            <a:ext cx="731520" cy="237744"/>
+          </a:xfrm>
+          <a:prstGeom prst="rect">
+            <a:avLst/>
+          </a:prstGeom>
+          <a:noFill/>
+          <a:ln/>
+        </p:spPr>
+        <p:txBody>
+          <a:bodyPr wrap="square" lIns="0" tIns="0" rIns="0" bIns="0" rtlCol="0" anchor="ctr"/>
+          <a:lstStyle/>
+          <a:p>
+            <a:pPr indent="0" marL="0">
+              <a:buNone/>
+            </a:pPr>
+            <a:r>
+              <a:rPr lang="en-US" sz="1100" b="1" dirty="0">
+                <a:solidFill>
+                  <a:srgbClr val="8C8C86"/>
+                </a:solidFill>
+                <a:latin typeface="Arial" pitchFamily="34" charset="0"/>
+                <a:ea typeface="Arial" pitchFamily="34" charset="-122"/>
+                <a:cs typeface="Arial" pitchFamily="34" charset="-120"/>
+              </a:rPr>
+              <a:t>Open</a:t>
+            </a:r>
+            <a:endParaRPr lang="en-US" sz="1100" dirty="0"/>
+          </a:p>
+        </p:txBody>
+      </p:sp>
+      <p:sp>
+        <p:nvSpPr>
+          <p:cNvPr id="50" name="Text 48"/>
+          <p:cNvSpPr/>
+          <p:nvPr/>
+        </p:nvSpPr>
+        <p:spPr>
+          <a:xfrm>
+            <a:off x="10637215" y="2606040"/>
+            <a:ext cx="914400" cy="548640"/>
+          </a:xfrm>
+          <a:prstGeom prst="rect">
+            <a:avLst/>
+          </a:prstGeom>
+          <a:noFill/>
+          <a:ln/>
+        </p:spPr>
+        <p:txBody>
+          <a:bodyPr wrap="square" lIns="0" tIns="0" rIns="0" bIns="0" rtlCol="0" anchor="ctr"/>
+          <a:lstStyle/>
+          <a:p>
+            <a:pPr algn="r" indent="0" marL="0">
+              <a:buNone/>
+            </a:pPr>
+            <a:r>
+              <a:rPr lang="en-US" sz="2000" dirty="0">
+                <a:solidFill>
+                  <a:srgbClr val="1A1A1A"/>
+                </a:solidFill>
+                <a:latin typeface="Georgia" pitchFamily="34" charset="0"/>
+                <a:ea typeface="Georgia" pitchFamily="34" charset="-122"/>
+                <a:cs typeface="Georgia" pitchFamily="34" charset="-120"/>
+              </a:rPr>
+              <a:t>75%</a:t>
+            </a:r>
+            <a:endParaRPr lang="en-US" sz="2000" dirty="0"/>
+          </a:p>
+        </p:txBody>
+      </p:sp>
+      <p:sp>
+        <p:nvSpPr>
+          <p:cNvPr id="51" name="Shape 49"/>
+          <p:cNvSpPr/>
+          <p:nvPr/>
+        </p:nvSpPr>
+        <p:spPr>
+          <a:xfrm>
+            <a:off x="8219237" y="3246120"/>
+            <a:ext cx="3332378" cy="45720"/>
+          </a:xfrm>
+          <a:prstGeom prst="rect">
+            <a:avLst/>
+          </a:prstGeom>
+          <a:solidFill>
+            <a:srgbClr val="ECECE8"/>
+          </a:solidFill>
+          <a:ln/>
+        </p:spPr>
+      </p:sp>
+      <p:sp>
+        <p:nvSpPr>
+          <p:cNvPr id="52" name="Shape 50"/>
+          <p:cNvSpPr/>
+          <p:nvPr/>
+        </p:nvSpPr>
+        <p:spPr>
+          <a:xfrm>
+            <a:off x="8219237" y="3246120"/>
+            <a:ext cx="2499284" cy="45720"/>
+          </a:xfrm>
+          <a:prstGeom prst="rect">
+            <a:avLst/>
+          </a:prstGeom>
+          <a:solidFill>
+            <a:srgbClr val="8DB39A"/>
+          </a:solidFill>
+          <a:ln/>
+        </p:spPr>
+      </p:sp>
+      <p:sp>
+        <p:nvSpPr>
+          <p:cNvPr id="53" name="Text 51"/>
+          <p:cNvSpPr/>
+          <p:nvPr/>
+        </p:nvSpPr>
+        <p:spPr>
+          <a:xfrm>
+            <a:off x="8219237" y="3383280"/>
+            <a:ext cx="3332378" cy="594360"/>
+          </a:xfrm>
+          <a:prstGeom prst="rect">
+            <a:avLst/>
+          </a:prstGeom>
+          <a:noFill/>
+          <a:ln/>
+        </p:spPr>
+        <p:txBody>
+          <a:bodyPr wrap="square" lIns="0" tIns="0" rIns="0" bIns="0" rtlCol="0" anchor="t">
+            <a:normAutofit/>
+          </a:bodyPr>
+          <a:lstStyle/>
+          <a:p>
+            <a:pPr indent="0" marL="0">
+              <a:lnSpc>
+                <a:spcPct val="110000"/>
+              </a:lnSpc>
+              <a:buNone/>
+            </a:pPr>
+            <a:r>
+              <a:rPr lang="en-US" sz="1150" i="1" dirty="0">
+                <a:solidFill>
+                  <a:srgbClr val="4A4A46"/>
+                </a:solidFill>
+                <a:latin typeface="Georgia" pitchFamily="34" charset="0"/>
+                <a:ea typeface="Georgia" pitchFamily="34" charset="-122"/>
+                <a:cs typeface="Georgia" pitchFamily="34" charset="-120"/>
+              </a:rPr>
+              <a:t>Data transfer done; usage tracking rolling out.</a:t>
+            </a:r>
+            <a:endParaRPr lang="en-US" sz="1150" dirty="0"/>
+          </a:p>
+        </p:txBody>
+      </p:sp>
+      <p:sp>
+        <p:nvSpPr>
+          <p:cNvPr id="54" name="Shape 52"/>
+          <p:cNvSpPr/>
+          <p:nvPr/>
+        </p:nvSpPr>
+        <p:spPr>
+          <a:xfrm>
+            <a:off x="8219237" y="4023360"/>
+            <a:ext cx="3332378" cy="0"/>
+          </a:xfrm>
+          <a:prstGeom prst="line">
+            <a:avLst/>
+          </a:prstGeom>
+          <a:noFill/>
+          <a:ln w="9525">
+            <a:solidFill>
+              <a:srgbClr val="D6D6D0"/>
+            </a:solidFill>
+            <a:prstDash val="solid"/>
+          </a:ln>
+        </p:spPr>
+      </p:sp>
+      <p:sp>
+        <p:nvSpPr>
+          <p:cNvPr id="55" name="Text 53"/>
+          <p:cNvSpPr/>
+          <p:nvPr/>
+        </p:nvSpPr>
+        <p:spPr>
+          <a:xfrm>
+            <a:off x="8219237" y="4142232"/>
+            <a:ext cx="3332378" cy="438912"/>
+          </a:xfrm>
+          <a:prstGeom prst="rect">
+            <a:avLst/>
+          </a:prstGeom>
+          <a:noFill/>
+          <a:ln/>
+        </p:spPr>
+        <p:txBody>
+          <a:bodyPr wrap="square" lIns="0" tIns="0" rIns="0" bIns="0" rtlCol="0" anchor="t">
+            <a:normAutofit/>
+          </a:bodyPr>
+          <a:lstStyle/>
+          <a:p>
+            <a:pPr indent="0" marL="0">
+              <a:buNone/>
+            </a:pPr>
+            <a:r>
+              <a:rPr lang="en-US" sz="1100" dirty="0">
+                <a:solidFill>
+                  <a:srgbClr val="1F5C3A"/>
+                </a:solidFill>
+                <a:latin typeface="Arial" pitchFamily="34" charset="0"/>
+                <a:ea typeface="Arial" pitchFamily="34" charset="-122"/>
+                <a:cs typeface="Arial" pitchFamily="34" charset="-120"/>
+              </a:rPr>
+              <a:t>■  </a:t>
+            </a:r>
+            <a:pPr indent="0" marL="0">
+              <a:buNone/>
+            </a:pPr>
+            <a:r>
+              <a:rPr lang="en-US" sz="1100" dirty="0">
+                <a:solidFill>
+                  <a:srgbClr val="1A1A1A"/>
+                </a:solidFill>
+                <a:latin typeface="Arial" pitchFamily="34" charset="0"/>
+                <a:ea typeface="Arial" pitchFamily="34" charset="-122"/>
+                <a:cs typeface="Arial" pitchFamily="34" charset="-120"/>
+              </a:rPr>
+              <a:t>Data transfer to new system</a:t>
+            </a:r>
+            <a:endParaRPr lang="en-US" sz="1100" dirty="0"/>
+          </a:p>
+        </p:txBody>
+      </p:sp>
+      <p:sp>
+        <p:nvSpPr>
+          <p:cNvPr id="56" name="Text 54"/>
+          <p:cNvSpPr/>
+          <p:nvPr/>
+        </p:nvSpPr>
+        <p:spPr>
+          <a:xfrm>
+            <a:off x="8219237" y="4581144"/>
+            <a:ext cx="3332378" cy="438912"/>
+          </a:xfrm>
+          <a:prstGeom prst="rect">
+            <a:avLst/>
+          </a:prstGeom>
+          <a:noFill/>
+          <a:ln/>
+        </p:spPr>
+        <p:txBody>
+          <a:bodyPr wrap="square" lIns="0" tIns="0" rIns="0" bIns="0" rtlCol="0" anchor="t">
+            <a:normAutofit/>
+          </a:bodyPr>
+          <a:lstStyle/>
+          <a:p>
+            <a:pPr indent="0" marL="0">
+              <a:buNone/>
+            </a:pPr>
+            <a:r>
+              <a:rPr lang="en-US" sz="1100" dirty="0">
+                <a:solidFill>
+                  <a:srgbClr val="1F5C3A"/>
+                </a:solidFill>
+                <a:latin typeface="Arial" pitchFamily="34" charset="0"/>
+                <a:ea typeface="Arial" pitchFamily="34" charset="-122"/>
+                <a:cs typeface="Arial" pitchFamily="34" charset="-120"/>
+              </a:rPr>
+              <a:t>■  </a:t>
+            </a:r>
+            <a:pPr indent="0" marL="0">
+              <a:buNone/>
+            </a:pPr>
+            <a:r>
+              <a:rPr lang="en-US" sz="1100" dirty="0">
+                <a:solidFill>
+                  <a:srgbClr val="1A1A1A"/>
+                </a:solidFill>
+                <a:latin typeface="Arial" pitchFamily="34" charset="0"/>
+                <a:ea typeface="Arial" pitchFamily="34" charset="-122"/>
+                <a:cs typeface="Arial" pitchFamily="34" charset="-120"/>
+              </a:rPr>
+              <a:t>Event plan agreed</a:t>
+            </a:r>
+            <a:endParaRPr lang="en-US" sz="1100" dirty="0"/>
+          </a:p>
+        </p:txBody>
+      </p:sp>
+      <p:sp>
+        <p:nvSpPr>
+          <p:cNvPr id="57" name="Text 55"/>
+          <p:cNvSpPr/>
+          <p:nvPr/>
+        </p:nvSpPr>
+        <p:spPr>
+          <a:xfrm>
+            <a:off x="8219237" y="5020056"/>
+            <a:ext cx="3332378" cy="438912"/>
+          </a:xfrm>
+          <a:prstGeom prst="rect">
+            <a:avLst/>
+          </a:prstGeom>
+          <a:noFill/>
+          <a:ln/>
+        </p:spPr>
+        <p:txBody>
+          <a:bodyPr wrap="square" lIns="0" tIns="0" rIns="0" bIns="0" rtlCol="0" anchor="t">
+            <a:normAutofit/>
+          </a:bodyPr>
+          <a:lstStyle/>
+          <a:p>
+            <a:pPr indent="0" marL="0">
+              <a:buNone/>
+            </a:pPr>
+            <a:r>
+              <a:rPr lang="en-US" sz="1100" dirty="0">
+                <a:solidFill>
+                  <a:srgbClr val="8DB39A"/>
+                </a:solidFill>
+                <a:latin typeface="Arial" pitchFamily="34" charset="0"/>
+                <a:ea typeface="Arial" pitchFamily="34" charset="-122"/>
+                <a:cs typeface="Arial" pitchFamily="34" charset="-120"/>
+              </a:rPr>
+              <a:t>■  </a:t>
+            </a:r>
+            <a:pPr indent="0" marL="0">
+              <a:buNone/>
+            </a:pPr>
+            <a:r>
+              <a:rPr lang="en-US" sz="1100" dirty="0">
+                <a:solidFill>
+                  <a:srgbClr val="1A1A1A"/>
+                </a:solidFill>
+                <a:latin typeface="Arial" pitchFamily="34" charset="0"/>
+                <a:ea typeface="Arial" pitchFamily="34" charset="-122"/>
+                <a:cs typeface="Arial" pitchFamily="34" charset="-120"/>
+              </a:rPr>
+              <a:t>Usage tracking rollout</a:t>
+            </a:r>
+            <a:endParaRPr lang="en-US" sz="1100" dirty="0"/>
+          </a:p>
+        </p:txBody>
+      </p:sp>
+      <p:sp>
+        <p:nvSpPr>
+          <p:cNvPr id="58" name="Text 56"/>
+          <p:cNvSpPr/>
+          <p:nvPr/>
+        </p:nvSpPr>
+        <p:spPr>
+          <a:xfrm>
+            <a:off x="8219237" y="5458968"/>
+            <a:ext cx="3332378" cy="438912"/>
+          </a:xfrm>
+          <a:prstGeom prst="rect">
+            <a:avLst/>
+          </a:prstGeom>
+          <a:noFill/>
+          <a:ln/>
+        </p:spPr>
+        <p:txBody>
+          <a:bodyPr wrap="square" lIns="0" tIns="0" rIns="0" bIns="0" rtlCol="0" anchor="t">
+            <a:normAutofit/>
+          </a:bodyPr>
+          <a:lstStyle/>
+          <a:p>
+            <a:pPr indent="0" marL="0">
+              <a:buNone/>
+            </a:pPr>
+            <a:r>
+              <a:rPr lang="en-US" sz="1100" dirty="0">
+                <a:solidFill>
+                  <a:srgbClr val="1F5C3A"/>
+                </a:solidFill>
+                <a:latin typeface="Arial" pitchFamily="34" charset="0"/>
+                <a:ea typeface="Arial" pitchFamily="34" charset="-122"/>
+                <a:cs typeface="Arial" pitchFamily="34" charset="-120"/>
+              </a:rPr>
+              <a:t>■  </a:t>
+            </a:r>
+            <a:pPr indent="0" marL="0">
+              <a:buNone/>
+            </a:pPr>
+            <a:r>
+              <a:rPr lang="en-US" sz="1100" dirty="0">
+                <a:solidFill>
+                  <a:srgbClr val="1A1A1A"/>
+                </a:solidFill>
+                <a:latin typeface="Arial" pitchFamily="34" charset="0"/>
+                <a:ea typeface="Arial" pitchFamily="34" charset="-122"/>
+                <a:cs typeface="Arial" pitchFamily="34" charset="-120"/>
+              </a:rPr>
+              <a:t>Code reviews, 3 features</a:t>
+            </a:r>
+            <a:endParaRPr lang="en-US" sz="1100" dirty="0"/>
+          </a:p>
+        </p:txBody>
+      </p:sp>
+      <p:sp>
+        <p:nvSpPr>
+          <p:cNvPr id="59" name="Text 57"/>
+          <p:cNvSpPr/>
+          <p:nvPr/>
+        </p:nvSpPr>
+        <p:spPr>
+          <a:xfrm>
+            <a:off x="640080" y="5989320"/>
+            <a:ext cx="10911535" cy="274320"/>
+          </a:xfrm>
+          <a:prstGeom prst="rect">
+            <a:avLst/>
+          </a:prstGeom>
+          <a:noFill/>
+          <a:ln/>
+        </p:spPr>
+        <p:txBody>
+          <a:bodyPr wrap="square" lIns="0" tIns="0" rIns="0" bIns="0" rtlCol="0" anchor="ctr"/>
+          <a:lstStyle/>
+          <a:p>
+            <a:pPr indent="0" marL="0">
+              <a:buNone/>
+            </a:pPr>
+            <a:r>
+              <a:rPr lang="en-US" sz="1100" i="1" dirty="0">
+                <a:solidFill>
+                  <a:srgbClr val="8C8C86"/>
+                </a:solidFill>
+                <a:latin typeface="Georgia" pitchFamily="34" charset="0"/>
+                <a:ea typeface="Georgia" pitchFamily="34" charset="-122"/>
+                <a:cs typeface="Georgia" pitchFamily="34" charset="-120"/>
+              </a:rPr>
+              <a:t>Done/Open = planned tasks this week; work in review stays open until approved.</a:t>
             </a:r>
             <a:endParaRPr lang="en-US" sz="1100" dirty="0"/>
           </a:p>

--- a/src/assets/downloads/example-deck.pptx
+++ b/src/assets/downloads/example-deck.pptx
@@ -2397,7 +2397,7 @@
       </p:sp>
       <p:pic>
         <p:nvPicPr>
-          <p:cNvPr id="4" name="Image 0" descr="/var/folders/lw/rmylcyvd5rjfxk9g1z9rrm8w0000gq/T/showship-deck-KIMuBX/logo_trimmed.png">    </p:cNvPr>
+          <p:cNvPr id="4" name="Image 0" descr="/var/folders/lw/rmylcyvd5rjfxk9g1z9rrm8w0000gq/T/showship-deck-COU6GW/logo_trimmed.png">    </p:cNvPr>
           <p:cNvPicPr>
             <a:picLocks noChangeAspect="1"/>
           </p:cNvPicPr>
@@ -4735,7 +4735,7 @@
       </p:sp>
       <p:pic>
         <p:nvPicPr>
-          <p:cNvPr id="4" name="Image 0" descr="/var/folders/lw/rmylcyvd5rjfxk9g1z9rrm8w0000gq/T/showship-deck-KIMuBX/logo_trimmed.png">    </p:cNvPr>
+          <p:cNvPr id="4" name="Image 0" descr="/var/folders/lw/rmylcyvd5rjfxk9g1z9rrm8w0000gq/T/showship-deck-COU6GW/logo_trimmed.png">    </p:cNvPr>
           <p:cNvPicPr>
             <a:picLocks noChangeAspect="1"/>
           </p:cNvPicPr>
@@ -11107,7 +11107,7 @@
         <p:spPr>
           <a:xfrm>
             <a:off x="4230624" y="1783080"/>
-            <a:ext cx="0" cy="4160520"/>
+            <a:ext cx="0" cy="3694938"/>
           </a:xfrm>
           <a:prstGeom prst="line">
             <a:avLst/>
@@ -11444,7 +11444,7 @@
         <p:spPr>
           <a:xfrm>
             <a:off x="4843272" y="4536186"/>
-            <a:ext cx="2749296" cy="390144"/>
+            <a:ext cx="2749296" cy="222504"/>
           </a:xfrm>
           <a:prstGeom prst="rect">
             <a:avLst/>
@@ -11482,7 +11482,7 @@
         </p:nvSpPr>
         <p:spPr>
           <a:xfrm>
-            <a:off x="4596384" y="4981194"/>
+            <a:off x="4596384" y="4813554"/>
             <a:ext cx="118872" cy="118872"/>
           </a:xfrm>
           <a:prstGeom prst="ellipse">
@@ -11502,7 +11502,7 @@
         </p:nvSpPr>
         <p:spPr>
           <a:xfrm>
-            <a:off x="4843272" y="4926330"/>
+            <a:off x="4843272" y="4758690"/>
             <a:ext cx="2749296" cy="222504"/>
           </a:xfrm>
           <a:prstGeom prst="rect">
@@ -11541,7 +11541,7 @@
         </p:nvSpPr>
         <p:spPr>
           <a:xfrm>
-            <a:off x="4596384" y="5203698"/>
+            <a:off x="4596384" y="5036058"/>
             <a:ext cx="118872" cy="118872"/>
           </a:xfrm>
           <a:prstGeom prst="ellipse">
@@ -11561,7 +11561,7 @@
         </p:nvSpPr>
         <p:spPr>
           <a:xfrm>
-            <a:off x="4843272" y="5148834"/>
+            <a:off x="4843272" y="4981194"/>
             <a:ext cx="2749296" cy="222504"/>
           </a:xfrm>
           <a:prstGeom prst="rect">
@@ -11601,7 +11601,7 @@
         <p:spPr>
           <a:xfrm>
             <a:off x="7958328" y="1783080"/>
-            <a:ext cx="0" cy="4160520"/>
+            <a:ext cx="0" cy="3694938"/>
           </a:xfrm>
           <a:prstGeom prst="line">
             <a:avLst/>
@@ -11778,7 +11778,7 @@
         <p:spPr>
           <a:xfrm>
             <a:off x="8324088" y="2871597"/>
-            <a:ext cx="2996184" cy="792480"/>
+            <a:ext cx="2996184" cy="594360"/>
           </a:xfrm>
           <a:prstGeom prst="rect">
             <a:avLst/>
@@ -11819,7 +11819,7 @@
         </p:nvSpPr>
         <p:spPr>
           <a:xfrm>
-            <a:off x="8324088" y="3801237"/>
+            <a:off x="8324088" y="3603117"/>
             <a:ext cx="2996184" cy="228600"/>
           </a:xfrm>
           <a:prstGeom prst="rect">
@@ -11858,7 +11858,7 @@
         </p:nvSpPr>
         <p:spPr>
           <a:xfrm>
-            <a:off x="8324088" y="4130421"/>
+            <a:off x="8324088" y="3932301"/>
             <a:ext cx="118872" cy="118872"/>
           </a:xfrm>
           <a:prstGeom prst="ellipse">
@@ -11880,7 +11880,7 @@
         </p:nvSpPr>
         <p:spPr>
           <a:xfrm>
-            <a:off x="8570976" y="4075557"/>
+            <a:off x="8570976" y="3877437"/>
             <a:ext cx="2749296" cy="222504"/>
           </a:xfrm>
           <a:prstGeom prst="rect">
@@ -11919,7 +11919,7 @@
         </p:nvSpPr>
         <p:spPr>
           <a:xfrm>
-            <a:off x="8324088" y="4352925"/>
+            <a:off x="8324088" y="4154805"/>
             <a:ext cx="118872" cy="118872"/>
           </a:xfrm>
           <a:prstGeom prst="ellipse">
@@ -11941,7 +11941,7 @@
         </p:nvSpPr>
         <p:spPr>
           <a:xfrm>
-            <a:off x="8570976" y="4298061"/>
+            <a:off x="8570976" y="4099941"/>
             <a:ext cx="2749296" cy="222504"/>
           </a:xfrm>
           <a:prstGeom prst="rect">
@@ -11980,7 +11980,7 @@
         </p:nvSpPr>
         <p:spPr>
           <a:xfrm>
-            <a:off x="8324088" y="4575429"/>
+            <a:off x="8324088" y="4377309"/>
             <a:ext cx="118872" cy="118872"/>
           </a:xfrm>
           <a:prstGeom prst="ellipse">
@@ -12002,7 +12002,7 @@
         </p:nvSpPr>
         <p:spPr>
           <a:xfrm>
-            <a:off x="8570976" y="4520565"/>
+            <a:off x="8570976" y="4322445"/>
             <a:ext cx="2749296" cy="222504"/>
           </a:xfrm>
           <a:prstGeom prst="rect">
@@ -12041,7 +12041,7 @@
         </p:nvSpPr>
         <p:spPr>
           <a:xfrm>
-            <a:off x="640080" y="5989320"/>
+            <a:off x="640080" y="5615178"/>
             <a:ext cx="10908792" cy="274320"/>
           </a:xfrm>
           <a:prstGeom prst="rect">

--- a/src/assets/downloads/example-deck.pptx
+++ b/src/assets/downloads/example-deck.pptx
@@ -2397,7 +2397,7 @@
       </p:sp>
       <p:pic>
         <p:nvPicPr>
-          <p:cNvPr id="4" name="Image 0" descr="/var/folders/lw/rmylcyvd5rjfxk9g1z9rrm8w0000gq/T/showship-deck-COU6GW/logo_trimmed.png">    </p:cNvPr>
+          <p:cNvPr id="4" name="Image 0" descr="/var/folders/lw/rmylcyvd5rjfxk9g1z9rrm8w0000gq/T/showship-deck-hPCAky/logo_trimmed.png">    </p:cNvPr>
           <p:cNvPicPr>
             <a:picLocks noChangeAspect="1"/>
           </p:cNvPicPr>
@@ -4614,13 +4614,13 @@
                       <a:r>
                         <a:rPr lang="en-US" sz="1100" b="1" dirty="0">
                           <a:solidFill>
-                            <a:srgbClr val="1F5C3A"/>
+                            <a:srgbClr val="77776F"/>
                           </a:solidFill>
                           <a:latin typeface="Arial" pitchFamily="34" charset="0"/>
                           <a:ea typeface="Arial" pitchFamily="34" charset="-122"/>
                           <a:cs typeface="Arial" pitchFamily="34" charset="-120"/>
                         </a:rPr>
-                        <a:t>■  DONE</a:t>
+                        <a:t>■  NOT STARTED</a:t>
                       </a:r>
                       <a:endParaRPr lang="en-US" sz="1100" dirty="0">
                         <a:latin typeface="Arial" charset="0"/>
@@ -4735,7 +4735,7 @@
       </p:sp>
       <p:pic>
         <p:nvPicPr>
-          <p:cNvPr id="4" name="Image 0" descr="/var/folders/lw/rmylcyvd5rjfxk9g1z9rrm8w0000gq/T/showship-deck-COU6GW/logo_trimmed.png">    </p:cNvPr>
+          <p:cNvPr id="4" name="Image 0" descr="/var/folders/lw/rmylcyvd5rjfxk9g1z9rrm8w0000gq/T/showship-deck-hPCAky/logo_trimmed.png">    </p:cNvPr>
           <p:cNvPicPr>
             <a:picLocks noChangeAspect="1"/>
           </p:cNvPicPr>

--- a/src/assets/downloads/example-deck.pptx
+++ b/src/assets/downloads/example-deck.pptx
@@ -2397,7 +2397,7 @@
       </p:sp>
       <p:pic>
         <p:nvPicPr>
-          <p:cNvPr id="4" name="Image 0" descr="/var/folders/lw/rmylcyvd5rjfxk9g1z9rrm8w0000gq/T/showship-deck-hPCAky/logo_trimmed.png">    </p:cNvPr>
+          <p:cNvPr id="4" name="Image 0" descr="/var/folders/lw/rmylcyvd5rjfxk9g1z9rrm8w0000gq/T/showship-deck-zYh8PE/logo_trimmed.png">    </p:cNvPr>
           <p:cNvPicPr>
             <a:picLocks noChangeAspect="1"/>
           </p:cNvPicPr>
@@ -4735,7 +4735,7 @@
       </p:sp>
       <p:pic>
         <p:nvPicPr>
-          <p:cNvPr id="4" name="Image 0" descr="/var/folders/lw/rmylcyvd5rjfxk9g1z9rrm8w0000gq/T/showship-deck-hPCAky/logo_trimmed.png">    </p:cNvPr>
+          <p:cNvPr id="4" name="Image 0" descr="/var/folders/lw/rmylcyvd5rjfxk9g1z9rrm8w0000gq/T/showship-deck-zYh8PE/logo_trimmed.png">    </p:cNvPr>
           <p:cNvPicPr>
             <a:picLocks noChangeAspect="1"/>
           </p:cNvPicPr>

--- a/src/assets/downloads/example-deck.pptx
+++ b/src/assets/downloads/example-deck.pptx
@@ -2397,7 +2397,7 @@
       </p:sp>
       <p:pic>
         <p:nvPicPr>
-          <p:cNvPr id="4" name="Image 0" descr="/var/folders/lw/rmylcyvd5rjfxk9g1z9rrm8w0000gq/T/showship-deck-zYh8PE/logo_trimmed.png">    </p:cNvPr>
+          <p:cNvPr id="4" name="Image 0" descr="/var/folders/lw/rmylcyvd5rjfxk9g1z9rrm8w0000gq/T/showship-deck-E38O8x/logo_trimmed.png">    </p:cNvPr>
           <p:cNvPicPr>
             <a:picLocks noChangeAspect="1"/>
           </p:cNvPicPr>
@@ -4735,7 +4735,7 @@
       </p:sp>
       <p:pic>
         <p:nvPicPr>
-          <p:cNvPr id="4" name="Image 0" descr="/var/folders/lw/rmylcyvd5rjfxk9g1z9rrm8w0000gq/T/showship-deck-zYh8PE/logo_trimmed.png">    </p:cNvPr>
+          <p:cNvPr id="4" name="Image 0" descr="/var/folders/lw/rmylcyvd5rjfxk9g1z9rrm8w0000gq/T/showship-deck-E38O8x/logo_trimmed.png">    </p:cNvPr>
           <p:cNvPicPr>
             <a:picLocks noChangeAspect="1"/>
           </p:cNvPicPr>
